--- a/slides/decks/s29-hodgkin-indolent-cll.pptx
+++ b/slides/decks/s29-hodgkin-indolent-cll.pptx
@@ -136,13 +136,13 @@
   <p:extLst>
     <p:ext uri="{521415D9-36F7-43E2-AB2F-B90AF26B5E84}">
       <p14:sectionLst xmlns:p14="http://schemas.microsoft.com/office/powerpoint/2010/main">
-        <p14:section name="Opening" id="{b4a70945-9cc6-9203-dcf2-ffb16dd22501}">
+        <p14:section name="Opening" id="{cb8a68f8-2008-d9c8-6125-f4dd775238ac}">
           <p14:sldIdLst>
             <p14:sldId id="256"/>
             <p14:sldId id="257"/>
           </p14:sldIdLst>
         </p14:section>
-        <p14:section name="Classical Hodgkin lymphoma" id="{4906700d-d640-eb28-206e-63c77ab59d22}">
+        <p14:section name="Classical Hodgkin lymphoma" id="{b6c8deeb-c6bd-6d22-abac-15fd606d0229}">
           <p14:sldIdLst>
             <p14:sldId id="258"/>
             <p14:sldId id="259"/>
@@ -153,7 +153,7 @@
             <p14:sldId id="264"/>
           </p14:sldIdLst>
         </p14:section>
-        <p14:section name="Indolent lymphoma" id="{9b9d39b6-dfdb-94b4-3f00-3731ace1f2a2}">
+        <p14:section name="Indolent lymphoma" id="{c2b2417b-4339-0923-0fc1-e9103b692442}">
           <p14:sldIdLst>
             <p14:sldId id="265"/>
             <p14:sldId id="266"/>
@@ -161,14 +161,14 @@
             <p14:sldId id="268"/>
           </p14:sldIdLst>
         </p14:section>
-        <p14:section name="Chronic lymphocytic leukaemia" id="{5b7e27df-4adc-2ea7-b0b2-0ab45c5c45cd}">
+        <p14:section name="Chronic lymphocytic leukaemia" id="{b973193a-5701-fa8d-90b2-0e78339c289b}">
           <p14:sldIdLst>
             <p14:sldId id="269"/>
             <p14:sldId id="270"/>
             <p14:sldId id="271"/>
           </p14:sldIdLst>
         </p14:section>
-        <p14:section name="Board questions" id="{b032e623-25be-d38d-60a0-8650f2a2f4c3}">
+        <p14:section name="Board questions" id="{4391d867-4117-21b8-fd15-297edb26dab2}">
           <p14:sldIdLst>
             <p14:sldId id="272"/>
             <p14:sldId id="273"/>
@@ -178,7 +178,7 @@
             <p14:sldId id="277"/>
           </p14:sldIdLst>
         </p14:section>
-        <p14:section name="References" id="{c7a74df7-9f2d-d5a4-5549-d6956d5a9ae9}">
+        <p14:section name="References" id="{02534260-6980-a72e-f966-c8d0f19aead5}">
           <p14:sldIdLst>
             <p14:sldId id="278"/>
             <p14:sldId id="279"/>
@@ -186,7 +186,7 @@
             <p14:sldId id="281"/>
           </p14:sldIdLst>
         </p14:section>
-        <p14:section name="Backup" id="{285e6c7e-a66e-17e7-a689-2d58f4f0fdfa}">
+        <p14:section name="Backup" id="{8d70d915-2a43-10fd-9e6e-af8858e23337}">
           <p14:sldIdLst>
             <p14:sldId id="282"/>
             <p14:sldId id="283"/>
@@ -742,6 +742,17 @@
               <a:t>前提是 reinduction 有反應。多數歐洲專家把 auto 當第一次移植，allo 留給 auto 後復發的人。CAR-T 和 bispecific antibody 的角色還在試驗中釐清。</a:t>
             </a:r>
           </a:p>
+          <a:p>
+            <a:pPr>
+              <a:spcAft>
+                <a:spcPts val="600"/>
+              </a:spcAft>
+            </a:pPr>
+            <a:r>
+              <a:rPr lang="en-US" dirty="0"/>
+              <a:t>診斷要靠手術或 excisional biopsy，分期和評估反應最好用 PET，不然用 CT。最常用的預後分數是 FLIPI，復發時 FLIPI 高的人同樣可以考慮移植。現在非移植的選擇很多，所以建議移植前，一定要把移植和非移植的選項都跟病人說清楚。</a:t>
+            </a:r>
+          </a:p>
         </p:txBody>
       </p:sp>
       <p:sp>
@@ -867,6 +878,17 @@
               <a:t>毒性要算進去。60 歲以上的 TRM 可能超過 10%，而 relapsed FL 的中位年齡是 69 歲。GOELAMS 用 TBI conditioning，第二癌和 MDS/AML 明顯增加，因此可以先查骨髓的 clonal hematopoiesis 和染色體。</a:t>
             </a:r>
           </a:p>
+          <a:p>
+            <a:pPr>
+              <a:spcAft>
+                <a:spcPts val="600"/>
+              </a:spcAft>
+            </a:pPr>
+            <a:r>
+              <a:rPr lang="en-US" dirty="0"/>
+              <a:t>Conditioning 方面，BEAM 最常用，也有人把 BCNU 換成 bendamustine，效果可能相近、毒性較低。年紀大，或骨髓有 clonal hematopoiesis、染色體異常的人，第二癌風險較高，也許其他復發治療更適合。</a:t>
+            </a:r>
+          </a:p>
         </p:txBody>
       </p:sp>
       <p:sp>
@@ -992,6 +1014,17 @@
               <a:t>所以 auto 毒性較低、可能治癒一部分人，被當作第一次移植；RIC allo 是 auto 後復發的治癒選項。也有 EBMT 中心在特定病人直接以 allo 作為第一次移植。</a:t>
             </a:r>
           </a:p>
+          <a:p>
+            <a:pPr>
+              <a:spcAft>
+                <a:spcPts val="600"/>
+              </a:spcAft>
+            </a:pPr>
+            <a:r>
+              <a:rPr lang="en-US" dirty="0"/>
+              <a:t>看這張表要注意兩邊 TRM 的時間點不一樣，auto 是一年、allo 是五年，不能直接相減。早期的 retrospective 比較也一樣，MAC allo 復發較低、TRM 較高，OS 和 auto 相近，所以後來才發展出 RIC，讓年紀大、共病多或做過 auto 的病人也能接受 allo。</a:t>
+            </a:r>
+          </a:p>
         </p:txBody>
       </p:sp>
       <p:sp>
@@ -1117,6 +1150,28 @@
               <a:t>MSD 和 MUD 結果相近，沒有的話 haplo 加 PTCy 或 cord blood 都可行。GVHD prophylaxis 沒有偏好；做 T-cell depletion 要搭配 chimerism-directed DLI，四年 PFS 76%。Allo 後不需要 maintenance。</a:t>
             </a:r>
           </a:p>
+          <a:p>
+            <a:pPr>
+              <a:spcAft>
+                <a:spcPts val="600"/>
+              </a:spcAft>
+            </a:pPr>
+            <a:r>
+              <a:rPr lang="en-US" dirty="0"/>
+              <a:t>TCD 和 DLI 要一起看。T-cell depletion 降低 GVHD，但也移除了負責 GVL 的 alloreactive T cell，復發會變多。依 chimerism 補 DLI，等於把 GVL 加回來，所以這個系列四年復發只有 24%，GVHD 也不多。</a:t>
+            </a:r>
+          </a:p>
+          <a:p>
+            <a:pPr>
+              <a:spcAft>
+                <a:spcPts val="600"/>
+              </a:spcAft>
+            </a:pPr>
+            <a:r>
+              <a:rPr lang="en-US" dirty="0"/>
+              <a:t>沒有 MSD 或 MUD 時，cord blood 和 PTCy haplo 在包括 FL 在內的 NHL 都已有可行性的報告。</a:t>
+            </a:r>
+          </a:p>
         </p:txBody>
       </p:sp>
       <p:sp>
@@ -1242,6 +1297,17 @@
               <a:t>有個陷阱，第一線用 BTKi 加 venetoclax fixed duration，停藥後才失敗，不算 double refractory。書上也建議，只要一類 pathway inhibitor 失敗，就轉介移植中心諮詢。</a:t>
             </a:r>
           </a:p>
+          <a:p>
+            <a:pPr>
+              <a:spcAft>
+                <a:spcPts val="600"/>
+              </a:spcAft>
+            </a:pPr>
+            <a:r>
+              <a:rPr lang="en-US" dirty="0"/>
+              <a:t>Noncovalent BTKi 能不能改善 double refractory 的預後，目前還不清楚。移植時機要和病人個別討論，一邊是移植併發症的風險，一邊是還剩多少藥物選擇，可以用 HCT-CI 或 EBMT risk score 估計 NRM。</a:t>
+            </a:r>
+          </a:p>
         </p:txBody>
       </p:sp>
       <p:sp>
@@ -1367,6 +1433,17 @@
               <a:t>移植後的 MRD 用 PCR 或 flow，敏感度達到萬分之一。MRD 下降常常比較慢，和免疫重建有關，可用來決定 immunosuppression 減量和 DLI。Auto 只用在 Richter，CAR-T 目前只在臨床試驗。</a:t>
             </a:r>
           </a:p>
+          <a:p>
+            <a:pPr>
+              <a:spcAft>
+                <a:spcPts val="600"/>
+              </a:spcAft>
+            </a:pPr>
+            <a:r>
+              <a:rPr lang="en-US" dirty="0"/>
+              <a:t>最後兩列也是考點。NRM 的危險因子是年紀大、體能差或 HCT-CI 高、partially matched donor，以及不利的 donor 和病人性別組合。移植後復發也不必悲觀，書上說所有核准的 CLL 藥物都還能用，allo 的病史不會限制藥物選擇。</a:t>
+            </a:r>
+          </a:p>
         </p:txBody>
       </p:sp>
       <p:sp>
@@ -1481,6 +1558,17 @@
               <a:t>晚期失敗由復發和 NRM 各佔一半。兩年 NRM 的危險因子是年紀大、體能差、unrelated donor 和不利的性別配對。進入 pathway inhibitor 時代後 NRM 已經下降，移植後復發也還能用所有核准的 CLL 藥物治療。</a:t>
             </a:r>
           </a:p>
+          <a:p>
+            <a:pPr>
+              <a:spcAft>
+                <a:spcPts val="600"/>
+              </a:spcAft>
+            </a:pPr>
+            <a:r>
+              <a:rPr lang="en-US" dirty="0"/>
+              <a:t>講者換算一下，十年 EFS 28%，大約每三到四位病人有一位長期無事件。這是年輕、高風險 CLL 仍值得考慮 allo 的理由；但短期死亡風險高於藥物治療的人，就不該推薦。</a:t>
+            </a:r>
+          </a:p>
         </p:txBody>
       </p:sp>
       <p:sp>
@@ -1602,6 +1690,17 @@
               </a:spcAft>
             </a:pPr>
             <a:r>
+              <a:rPr lang="en-US" dirty="0"/>
+              <a:t>題目給的時間點和用藥順序都是線索，先想 auto 後多久復發、之前用過什麼藥。</a:t>
+            </a:r>
+          </a:p>
+          <a:p>
+            <a:pPr>
+              <a:spcAft>
+                <a:spcPts val="600"/>
+              </a:spcAft>
+            </a:pPr>
+            <a:r>
               <a:rPr lang="en-US" b="1" dirty="0"/>
               <a:t>[Pause for answers.]</a:t>
             </a:r>
@@ -1731,6 +1830,17 @@
               <a:t>題目先講她用過 BV，這是為了對應演算法，用過 BV 才走 PD-1 那一支。</a:t>
             </a:r>
           </a:p>
+          <a:p>
+            <a:pPr>
+              <a:spcAft>
+                <a:spcPts val="600"/>
+              </a:spcAft>
+            </a:pPr>
+            <a:r>
+              <a:rPr lang="en-US" dirty="0"/>
+              <a:t>Auto 後五個月就復發屬於早期復發，預後較差，更需要 allo 來鞏固。</a:t>
+            </a:r>
+          </a:p>
         </p:txBody>
       </p:sp>
       <p:sp>
@@ -1852,6 +1962,17 @@
               </a:spcAft>
             </a:pPr>
             <a:r>
+              <a:rPr lang="en-US" dirty="0"/>
+              <a:t>注意題目特別講了復發的時間點和沒有轉化，這兩件事決定他屬不屬於該移植的族群，也決定先做哪一種移植。</a:t>
+            </a:r>
+          </a:p>
+          <a:p>
+            <a:pPr>
+              <a:spcAft>
+                <a:spcPts val="600"/>
+              </a:spcAft>
+            </a:pPr>
+            <a:r>
               <a:rPr lang="en-US" b="1" dirty="0"/>
               <a:t>[Pause for answers.]</a:t>
             </a:r>
@@ -1970,6 +2091,17 @@
               <a:t>第二段是以 follicular lymphoma 為代表的 indolent lymphoma，重點是哪些病人值得移植，以及 auto 和 allo 怎麼取捨。第三段是 CLL，在 pathway inhibitor 的時代，allo 的適應症只剩三種情境，很好記。最後五分鐘做三題，剛好每一段各一題。</a:t>
             </a:r>
           </a:p>
+          <a:p>
+            <a:pPr>
+              <a:spcAft>
+                <a:spcPts val="600"/>
+              </a:spcAft>
+            </a:pPr>
+            <a:r>
+              <a:rPr lang="en-US" dirty="0"/>
+              <a:t>三個疾病有一條共同的線索。移植的時機都取決於疾病對前一線治療還敏不敏感，以及有沒有更安全的新藥可以先用，等一下 chemosensitivity 這個詞會反覆出現。</a:t>
+            </a:r>
+          </a:p>
         </p:txBody>
       </p:sp>
       <p:sp>
@@ -2095,6 +2227,17 @@
               <a:t>如果題目改成 auto 後才復發，答案就會變成 RIC allo，這是同一個考點的另一面。</a:t>
             </a:r>
           </a:p>
+          <a:p>
+            <a:pPr>
+              <a:spcAft>
+                <a:spcPts val="600"/>
+              </a:spcAft>
+            </a:pPr>
+            <a:r>
+              <a:rPr lang="en-US" dirty="0"/>
+              <a:t>這位病人 54 歲，比 relapsed FL 的中位年齡 69 歲年輕很多，auto 的 TRM 也比較能接受。</a:t>
+            </a:r>
+          </a:p>
         </p:txBody>
       </p:sp>
       <p:sp>
@@ -2216,6 +2359,28 @@
               </a:spcAft>
             </a:pPr>
             <a:r>
+              <a:rPr lang="en-US" dirty="0"/>
+              <a:t>這題要同時看三件事，遺傳學風險、用過幾類藥，以及現在疾病有沒有控制住。Donor 和 HCT-CI 都不是問題，重點在時機。</a:t>
+            </a:r>
+          </a:p>
+          <a:p>
+            <a:pPr>
+              <a:spcAft>
+                <a:spcPts val="600"/>
+              </a:spcAft>
+            </a:pPr>
+            <a:r>
+              <a:rPr lang="en-US" dirty="0"/>
+              <a:t>先決定該不該移植，再決定怎麼移植。</a:t>
+            </a:r>
+          </a:p>
+          <a:p>
+            <a:pPr>
+              <a:spcAft>
+                <a:spcPts val="600"/>
+              </a:spcAft>
+            </a:pPr>
+            <a:r>
               <a:rPr lang="en-US" b="1" dirty="0"/>
               <a:t>[Pause for answers.]</a:t>
             </a:r>
@@ -2334,6 +2499,17 @@
               <a:t>A 是主要陷阱，等到兩類都失敗才移植，只適用於沒有 TP53 或 complex karyotype 的人；書上也提醒，allo 應該在完全抗藥之前就考慮。B 錯，auto 除了 Richter 之外沒有角色。D 錯，CLL 目前沒有核准的 CAR-T 產品，只能在試驗中使用。E 錯，MAC 沒有優於 RIC，CLL 靠的是 GVL。</a:t>
             </a:r>
           </a:p>
+          <a:p>
+            <a:pPr>
+              <a:spcAft>
+                <a:spcPts val="600"/>
+              </a:spcAft>
+            </a:pPr>
+            <a:r>
+              <a:rPr lang="en-US" dirty="0"/>
+              <a:t>書上也建議，一類 pathway inhibitor 失敗就應轉介移植中心，這位病人現在正是轉介的時機。</a:t>
+            </a:r>
+          </a:p>
         </p:txBody>
       </p:sp>
       <p:sp>
@@ -3075,6 +3251,17 @@
               <a:t>Salvage 的目標是 chemosensitivity，書上把 PET-negative 當作 chemosensitive 的定義，它對 auto 後的結果影響最大。下面兩列不含化療，BV 單藥核准給不適合 auto、至少兩線化療失敗的人。</a:t>
             </a:r>
           </a:p>
+          <a:p>
+            <a:pPr>
+              <a:spcAft>
+                <a:spcPts val="600"/>
+              </a:spcAft>
+            </a:pPr>
+            <a:r>
+              <a:rPr lang="en-US" dirty="0"/>
+              <a:t>實務上，所有化療型 salvage 都有血液毒性，infection 和 neutropenic fever 約 10 到 24%，每一種方案動員幹細胞都沒有問題。治療前要評估心肺功能，有需要先做生育諮詢。新藥加化療的組合，例如 pembrolizumab 加 GVD，PET-negative rate 可到 95%，但這些組合都還沒有核准。</a:t>
+            </a:r>
+          </a:p>
         </p:txBody>
       </p:sp>
       <p:sp>
@@ -3288,6 +3475,17 @@
               <a:t>做過 auto 再復發，第二次 auto 是 clinical option，NRM 15%，五年 OS 和 PFS 都是 30%。Tandem auto 給 poor-risk 病人，NRM 0 到 5%，現在有了 BV 和 checkpoint inhibitor，要不要做第二次 auto 需要重新評估。</a:t>
             </a:r>
           </a:p>
+          <a:p>
+            <a:pPr>
+              <a:spcAft>
+                <a:spcPts val="600"/>
+              </a:spcAft>
+            </a:pPr>
+            <a:r>
+              <a:rPr lang="en-US" dirty="0"/>
+              <a:t>臨床上判斷 chemosensitive 的工具就是 PET。Salvage 後 PET 陰性，直接走 auto；PET 仍陽性，就要考慮換 salvage，或把 tandem、BV consolidation 這些加強手段一起納入討論。Primary refractory 的人結果雖然差，仍有大約三成長期存活，所以不是放棄移植的理由。</a:t>
+            </a:r>
+          </a:p>
         </p:txBody>
       </p:sp>
       <p:sp>
@@ -3420,6 +3618,28 @@
               </a:spcAft>
             </a:pPr>
             <a:r>
+              <a:rPr lang="en-US" dirty="0"/>
+              <a:t>BEAM 四個藥的順序和天數容易出配對題。BCNU 只給一次而且最早給，melphalan 也只給一次、放在最後一天，中間四天是 etoposide 和 cytarabine。肺部是 BEAM 最常見的晚期問題之一，追蹤時有咳嗽、喘或 DLCO 下降，要想到 chronic interstitial fibrosis。</a:t>
+            </a:r>
+          </a:p>
+          <a:p>
+            <a:pPr>
+              <a:spcAft>
+                <a:spcPts val="600"/>
+              </a:spcAft>
+            </a:pPr>
+            <a:r>
+              <a:rPr lang="en-US" dirty="0"/>
+              <a:t>第二腫瘤加上 metabolic syndrome 和心血管問題，代表 auto 後的長期追蹤不只是看復發。</a:t>
+            </a:r>
+          </a:p>
+          <a:p>
+            <a:pPr>
+              <a:spcAft>
+                <a:spcPts val="600"/>
+              </a:spcAft>
+            </a:pPr>
+            <a:r>
               <a:rPr lang="en-US" b="1" dirty="0"/>
               <a:t>講者提醒（不念出來）：</a:t>
             </a:r>
@@ -3560,6 +3780,28 @@
               <a:t>BV 目前是唯一核准用在 post-auto consolidation 的藥，16 個 cycle 這個數字常出現在選項裡。</a:t>
             </a:r>
           </a:p>
+          <a:p>
+            <a:pPr>
+              <a:spcAft>
+                <a:spcPts val="600"/>
+              </a:spcAft>
+            </a:pPr>
+            <a:r>
+              <a:rPr lang="en-US" dirty="0"/>
+              <a:t>考題常常給一位第一線後 12 個月內就復發、或移植時仍有病灶的病人，問 auto 之後該做什麼，答案通常就是 BV consolidation。也要注意 AETHERA 的結果是 PFS，書上並沒有寫 OS 的差異。</a:t>
+            </a:r>
+          </a:p>
+          <a:p>
+            <a:pPr>
+              <a:spcAft>
+                <a:spcPts val="600"/>
+              </a:spcAft>
+            </a:pPr>
+            <a:r>
+              <a:rPr lang="en-US" dirty="0"/>
+              <a:t>第一線的角色也在改變。Echelon-1 用 BV 取代 ABVD 裡的 bleomycin，晚期 HL 的 OS 改善，可以預期之後走到移植時已經用過 BV 的病人會越來越多。</a:t>
+            </a:r>
+          </a:p>
         </p:txBody>
       </p:sp>
       <p:sp>
@@ -3685,6 +3927,28 @@
               <a:t>表上沒寫的數字放在 backup。Auto 後用 BV 的 ORR 75%，nivolumab 和 pembrolizumab 都是 69%。</a:t>
             </a:r>
           </a:p>
+          <a:p>
+            <a:pPr>
+              <a:spcAft>
+                <a:spcPts val="600"/>
+              </a:spcAft>
+            </a:pPr>
+            <a:r>
+              <a:rPr lang="en-US" dirty="0"/>
+              <a:t>書上把 allo 的條件寫得很具體，年輕、體能好、疾病有反應，而且有合適的 donor。四個條件少一個，觀察或繼續新藥都是可以接受的選擇，這就是原圖上灰色箭頭的意思，要和病人仔細討論利弊。</a:t>
+            </a:r>
+          </a:p>
+          <a:p>
+            <a:pPr>
+              <a:spcAft>
+                <a:spcPts val="600"/>
+              </a:spcAft>
+            </a:pPr>
+            <a:r>
+              <a:rPr lang="en-US" dirty="0"/>
+              <a:t>Backup 裡還有 bendamustine、gemcitabine-based 化療和 CAR-T 等選擇，反應率差異很大。</a:t>
+            </a:r>
+          </a:p>
         </p:txBody>
       </p:sp>
       <p:sp>
@@ -3810,6 +4074,17 @@
               <a:t>移植前的 disease status 是最重要的預後因子，chemosensitive 的三年 OS 60 到 70%，refractory 只剩 40 到 50%。不過 PET-negative CR 對 allo 的意義，不像 auto 那麼明確。</a:t>
             </a:r>
           </a:p>
+          <a:p>
+            <a:pPr>
+              <a:spcAft>
+                <a:spcPts val="600"/>
+              </a:spcAft>
+            </a:pPr>
+            <a:r>
+              <a:rPr lang="en-US" dirty="0"/>
+              <a:t>另外，refractory 那一列寫的是 developmental，不是 not recommended。意思是可以在臨床試驗或有經驗的中心做，但三年 PFS 只有 20 到 30%，NRM 也升到 20 到 30%。題目若描述一位對所有 salvage 都沒反應的病人，直接選 allo 通常不是最好的答案，先想辦法讓疾病有反應。</a:t>
+            </a:r>
+          </a:p>
         </p:txBody>
       </p:sp>
       <p:sp>
@@ -3933,6 +4208,17 @@
             <a:r>
               <a:rPr lang="en-US" dirty="0"/>
               <a:t>右邊是 donor 和 conditioning。PTCy haplo 的結果和 MSD、MUD 相近，GVHD 較少。超過一半用 RIC，NRM 降低但復發增加；含 low-dose TBI 的方案較差。現在 MAC 的 NRM 已大幅下降，可以個別考慮。</a:t>
+            </a:r>
+          </a:p>
+          <a:p>
+            <a:pPr>
+              <a:spcAft>
+                <a:spcPts val="600"/>
+              </a:spcAft>
+            </a:pPr>
+            <a:r>
+              <a:rPr lang="en-US" dirty="0"/>
+              <a:t>病房裡常見的情境是病人用 PD-1 達到很好的反應，大家急著排移植。這時候要先算好停藥的時間，並且提早跟移植團隊確認 PTCy 這個 GVHD prophylaxis 平台。</a:t>
             </a:r>
           </a:p>
         </p:txBody>

--- a/slides/decks/s29-hodgkin-indolent-cll.pptx
+++ b/slides/decks/s29-hodgkin-indolent-cll.pptx
@@ -34,10 +34,9 @@
     <p:sldId id="282" r:id="rId28"/>
     <p:sldId id="283" r:id="rId29"/>
     <p:sldId id="284" r:id="rId30"/>
-    <p:sldId id="285" r:id="rId31"/>
   </p:sldIdLst>
   <p:notesMasterIdLst>
-    <p:notesMasterId r:id="rId32"/>
+    <p:notesMasterId r:id="rId31"/>
   </p:notesMasterIdLst>
   <p:sldSz cx="12192000" cy="6858000"/>
   <p:notesSz cx="6858000" cy="12192000"/>
@@ -136,13 +135,13 @@
   <p:extLst>
     <p:ext uri="{521415D9-36F7-43E2-AB2F-B90AF26B5E84}">
       <p14:sectionLst xmlns:p14="http://schemas.microsoft.com/office/powerpoint/2010/main">
-        <p14:section name="Opening" id="{cb8a68f8-2008-d9c8-6125-f4dd775238ac}">
+        <p14:section name="Opening" id="{b2270a95-6c5c-32a4-b3fd-cd88404d9396}">
           <p14:sldIdLst>
             <p14:sldId id="256"/>
             <p14:sldId id="257"/>
           </p14:sldIdLst>
         </p14:section>
-        <p14:section name="Classical Hodgkin lymphoma" id="{b6c8deeb-c6bd-6d22-abac-15fd606d0229}">
+        <p14:section name="Classical Hodgkin lymphoma" id="{ad4675de-e7ad-4bcd-dc98-215c250c24bc}">
           <p14:sldIdLst>
             <p14:sldId id="258"/>
             <p14:sldId id="259"/>
@@ -153,7 +152,7 @@
             <p14:sldId id="264"/>
           </p14:sldIdLst>
         </p14:section>
-        <p14:section name="Indolent lymphoma" id="{c2b2417b-4339-0923-0fc1-e9103b692442}">
+        <p14:section name="Indolent lymphoma" id="{148be544-ff8d-d098-51ce-e5eabd33806e}">
           <p14:sldIdLst>
             <p14:sldId id="265"/>
             <p14:sldId id="266"/>
@@ -161,14 +160,14 @@
             <p14:sldId id="268"/>
           </p14:sldIdLst>
         </p14:section>
-        <p14:section name="Chronic lymphocytic leukaemia" id="{b973193a-5701-fa8d-90b2-0e78339c289b}">
+        <p14:section name="Chronic lymphocytic leukaemia" id="{c707154a-1033-9796-8434-2f2d9130f6ad}">
           <p14:sldIdLst>
             <p14:sldId id="269"/>
             <p14:sldId id="270"/>
             <p14:sldId id="271"/>
           </p14:sldIdLst>
         </p14:section>
-        <p14:section name="Board questions" id="{4391d867-4117-21b8-fd15-297edb26dab2}">
+        <p14:section name="Board questions" id="{35f755d8-a97f-1af8-8cbd-677d92e2c7b1}">
           <p14:sldIdLst>
             <p14:sldId id="272"/>
             <p14:sldId id="273"/>
@@ -178,7 +177,7 @@
             <p14:sldId id="277"/>
           </p14:sldIdLst>
         </p14:section>
-        <p14:section name="References" id="{02534260-6980-a72e-f966-c8d0f19aead5}">
+        <p14:section name="References" id="{40e7df54-f916-c970-250f-532c9e4da5be}">
           <p14:sldIdLst>
             <p14:sldId id="278"/>
             <p14:sldId id="279"/>
@@ -186,12 +185,11 @@
             <p14:sldId id="281"/>
           </p14:sldIdLst>
         </p14:section>
-        <p14:section name="Backup" id="{8d70d915-2a43-10fd-9e6e-af8858e23337}">
+        <p14:section name="Backup" id="{2f617ed7-d33f-5f4c-51f9-14790bcd3153}">
           <p14:sldIdLst>
             <p14:sldId id="282"/>
             <p14:sldId id="283"/>
             <p14:sldId id="284"/>
-            <p14:sldId id="285"/>
           </p14:sldIdLst>
         </p14:section>
       </p14:sectionLst>
@@ -596,26 +594,11 @@
           <a:bodyPr/>
           <a:lstStyle/>
           <a:p>
-            <a:pPr>
-              <a:spcAft>
-                <a:spcPts val="600"/>
-              </a:spcAft>
-            </a:pPr>
-            <a:r>
-              <a:rPr lang="en-US" b="1" dirty="0"/>
-              <a:t>[0:30 本頁 · 0:00 至 0:30]</a:t>
-            </a:r>
-          </a:p>
-          <a:p>
-            <a:pPr>
-              <a:spcAft>
-                <a:spcPts val="600"/>
-              </a:spcAft>
-            </a:pPr>
             <a:r>
               <a:rPr lang="en-US" dirty="0"/>
-              <a:t>各位好，今天是第 29 堂，主題是 Hodgkin lymphoma、indolent lymphoma 和 CLL 的移植，對應 EBMT Handbook 第 89、84、85 章。這三個病的病程都很長，新藥也多，移植的位置一直在被重新定義。今天每個疾病都回答同一組問題，什麼時候做 auto、什麼時候做 allo、什麼時候先用藥，最後一樣用三題 board-style 題目收尾。</a:t>
-            </a:r>
+              <a:t>[0:30 本頁 · 0:00 至 0:30]¶各位好，今天是第 29 堂，主題是 Hodgkin lymphoma、indolent lymphoma 和 CLL 的移植，對應 EBMT Handbook 第 89、84、85 章。這三個病的病程都很長，新藥也多，移植的位置一直在被重新定義。今天每個疾病都回答同一組問題，什麼時候做 auto、什麼時候做 allo、什麼時候先用藥，最後一樣用三題 board-style 題目收尾。</a:t>
+            </a:r>
+            <a:endParaRPr lang="en-US" dirty="0"/>
           </a:p>
         </p:txBody>
       </p:sp>
@@ -699,59 +682,11 @@
           <a:bodyPr/>
           <a:lstStyle/>
           <a:p>
-            <a:pPr>
-              <a:spcAft>
-                <a:spcPts val="600"/>
-              </a:spcAft>
-            </a:pPr>
-            <a:r>
-              <a:rPr lang="en-US" b="1" dirty="0"/>
-              <a:t>[1:30 本頁 · 12:00 至 13:30]</a:t>
-            </a:r>
-          </a:p>
-          <a:p>
-            <a:pPr>
-              <a:spcAft>
-                <a:spcPts val="600"/>
-              </a:spcAft>
-            </a:pPr>
             <a:r>
               <a:rPr lang="en-US" dirty="0"/>
-              <a:t>Indolent lymphoma 佔所有淋巴瘤的三分之一，包括 follicular、marginal zone 和 lymphoplasmacytic，最常見的是 follicular。最大型的 HCT 研究以 FL 為主，所以結論以 FL 來講，再外推到其他亞型。特色是反覆復發，而 auto 和 allo 是復發後唯一有治癒可能的選擇。</a:t>
-            </a:r>
-          </a:p>
-          <a:p>
-            <a:pPr>
-              <a:spcAft>
-                <a:spcPts val="600"/>
-              </a:spcAft>
-            </a:pPr>
-            <a:r>
-              <a:rPr lang="en-US" dirty="0"/>
-              <a:t>第一線是 chemoimmunotherapy，之後用 rituximab 或 obinutuzumab maintenance，first line 沒有任何移植的位置。值得考慮 HCT 的只有三種人，第一線後兩年內復發，也就是 POD24，high-grade transformation，以及多次復發。</a:t>
-            </a:r>
-          </a:p>
-          <a:p>
-            <a:pPr>
-              <a:spcAft>
-                <a:spcPts val="600"/>
-              </a:spcAft>
-            </a:pPr>
-            <a:r>
-              <a:rPr lang="en-US" dirty="0"/>
-              <a:t>前提是 reinduction 有反應。多數歐洲專家把 auto 當第一次移植，allo 留給 auto 後復發的人。CAR-T 和 bispecific antibody 的角色還在試驗中釐清。</a:t>
-            </a:r>
-          </a:p>
-          <a:p>
-            <a:pPr>
-              <a:spcAft>
-                <a:spcPts val="600"/>
-              </a:spcAft>
-            </a:pPr>
-            <a:r>
-              <a:rPr lang="en-US" dirty="0"/>
-              <a:t>診斷要靠手術或 excisional biopsy，分期和評估反應最好用 PET，不然用 CT。最常用的預後分數是 FLIPI，復發時 FLIPI 高的人同樣可以考慮移植。現在非移植的選擇很多，所以建議移植前，一定要把移植和非移植的選項都跟病人說清楚。</a:t>
-            </a:r>
+              <a:t>[1:30 本頁 · 12:00 至 13:30]¶Indolent lymphoma 佔所有淋巴瘤的三分之一，包括 follicular、marginal zone 和 lymphoplasmacytic，最常見的是 follicular。最大型的 HCT 研究以 FL 為主，所以結論以 FL 來講，再外推到其他亞型。特色是反覆復發，而 auto 和 allo 是復發後唯一有治癒可能的選擇。¶第一線是 chemoimmunotherapy，之後用 rituximab 或 obinutuzumab maintenance，first line 沒有任何移植的位置。值得考慮 HCT 的只有三種人，第一線後兩年內復發，也就是 POD24，high-grade transformation，以及多次復發。¶前提是 reinduction 有反應。多數歐洲專家把 auto 當第一次移植，allo 留給 auto 後復發的人。CAR-T 和 bispecific antibody 的角色還在試驗中釐清。¶診斷要靠手術或 excisional biopsy，分期和評估反應最好用 PET，不然用 CT。最常用的預後分數是 FLIPI，復發時 FLIPI 高的人同樣可以考慮移植。現在非移植的選擇很多，所以建議移植前，一定要把移植和非移植的選項都跟病人說清楚。</a:t>
+            </a:r>
+            <a:endParaRPr lang="en-US" dirty="0"/>
           </a:p>
         </p:txBody>
       </p:sp>
@@ -835,59 +770,11 @@
           <a:bodyPr/>
           <a:lstStyle/>
           <a:p>
-            <a:pPr>
-              <a:spcAft>
-                <a:spcPts val="600"/>
-              </a:spcAft>
-            </a:pPr>
-            <a:r>
-              <a:rPr lang="en-US" b="1" dirty="0"/>
-              <a:t>[1:30 本頁 · 13:30 至 15:00]</a:t>
-            </a:r>
-          </a:p>
-          <a:p>
-            <a:pPr>
-              <a:spcAft>
-                <a:spcPts val="600"/>
-              </a:spcAft>
-            </a:pPr>
             <a:r>
               <a:rPr lang="en-US" dirty="0"/>
-              <a:t>Auto 的適應症很單純，復發後對第二線或之後的 reinduction 有反應。CUP trial 是唯一的 randomized study，140 位 relapsed FL，比較單純化療和 auto。兩年 PFS 化療組 26%，移植組 purged 58%、unpurged 55%，OS 也較好。長期追蹤十年 PFS 31 到 50%，所以 auto 對一部分病人可能是治癒性的。</a:t>
-            </a:r>
-          </a:p>
-          <a:p>
-            <a:pPr>
-              <a:spcAft>
-                <a:spcPts val="600"/>
-              </a:spcAft>
-            </a:pPr>
-            <a:r>
-              <a:rPr lang="en-US" dirty="0"/>
-              <a:t>EBMT-LYM-1 在沒用過 rituximab 的病人顯示，移植前用 rituximab 做 in vivo purging 沒有好處，但移植後 rituximab maintenance 延長 PFS。只是現在的病人幾乎都用過 rituximab，能否外推並不清楚。</a:t>
-            </a:r>
-          </a:p>
-          <a:p>
-            <a:pPr>
-              <a:spcAft>
-                <a:spcPts val="600"/>
-              </a:spcAft>
-            </a:pPr>
-            <a:r>
-              <a:rPr lang="en-US" dirty="0"/>
-              <a:t>毒性要算進去。60 歲以上的 TRM 可能超過 10%，而 relapsed FL 的中位年齡是 69 歲。GOELAMS 用 TBI conditioning，第二癌和 MDS/AML 明顯增加，因此可以先查骨髓的 clonal hematopoiesis 和染色體。</a:t>
-            </a:r>
-          </a:p>
-          <a:p>
-            <a:pPr>
-              <a:spcAft>
-                <a:spcPts val="600"/>
-              </a:spcAft>
-            </a:pPr>
-            <a:r>
-              <a:rPr lang="en-US" dirty="0"/>
-              <a:t>Conditioning 方面，BEAM 最常用，也有人把 BCNU 換成 bendamustine，效果可能相近、毒性較低。年紀大，或骨髓有 clonal hematopoiesis、染色體異常的人，第二癌風險較高，也許其他復發治療更適合。</a:t>
-            </a:r>
+              <a:t>[1:30 本頁 · 13:30 至 15:00]¶Auto 的適應症很單純，復發後對第二線或之後的 reinduction 有反應。CUP trial 是唯一的 randomized study，140 位 relapsed FL，比較單純化療和 auto。兩年 PFS 化療組 26%，移植組 purged 58%、unpurged 55%，OS 也較好。長期追蹤十年 PFS 31 到 50%，所以 auto 對一部分病人可能是治癒性的。¶EBMT-LYM-1 在沒用過 rituximab 的病人顯示，移植前用 rituximab 做 in vivo purging 沒有好處，但移植後 rituximab maintenance 延長 PFS。只是現在的病人幾乎都用過 rituximab，能否外推並不清楚。¶毒性要算進去。60 歲以上的 TRM 可能超過 10%，而 relapsed FL 的中位年齡是 69 歲。GOELAMS 用 TBI conditioning，第二癌和 MDS/AML 明顯增加，因此可以先查骨髓的 clonal hematopoiesis 和染色體。¶Conditioning 方面，BEAM 最常用，也有人把 BCNU 換成 bendamustine，效果可能相近、毒性較低。年紀大，或骨髓有 clonal hematopoiesis、染色體異常的人，第二癌風險較高，也許其他復發治療更適合。</a:t>
+            </a:r>
+            <a:endParaRPr lang="en-US" dirty="0"/>
           </a:p>
         </p:txBody>
       </p:sp>
@@ -971,59 +858,11 @@
           <a:bodyPr/>
           <a:lstStyle/>
           <a:p>
-            <a:pPr>
-              <a:spcAft>
-                <a:spcPts val="600"/>
-              </a:spcAft>
-            </a:pPr>
-            <a:r>
-              <a:rPr lang="en-US" b="1" dirty="0"/>
-              <a:t>[1:30 本頁 · 15:00 至 16:30]</a:t>
-            </a:r>
-          </a:p>
-          <a:p>
-            <a:pPr>
-              <a:spcAft>
-                <a:spcPts val="600"/>
-              </a:spcAft>
-            </a:pPr>
             <a:r>
               <a:rPr lang="en-US" dirty="0"/>
-              <a:t>這是 EBMT 最新的兩個大系列。Auto 一年 TRM 只有 3%，五年復發 47%。Allo 五年 TRM 19%，復發降到 29%。結果 OS 是 auto 較高，72% 比 61%，PFS 則接近。Allo 的 GVL 效果確實存在，只是被 TRM 抵銷掉了。</a:t>
-            </a:r>
-          </a:p>
-          <a:p>
-            <a:pPr>
-              <a:spcAft>
-                <a:spcPts val="600"/>
-              </a:spcAft>
-            </a:pPr>
-            <a:r>
-              <a:rPr lang="en-US" dirty="0"/>
-              <a:t>Allo 的好處在於 graft 沒有淋巴瘤細胞污染、也沒接觸過 mutagenic agent，再加上 GVL。最大型的 auto 失敗後 RIC allo 系列來自 EBMT，兩年 NRM 27%，五年 PFS 48%、OS 51%，而且 allo 後的緩解期明顯比 auto 後長。</a:t>
-            </a:r>
-          </a:p>
-          <a:p>
-            <a:pPr>
-              <a:spcAft>
-                <a:spcPts val="600"/>
-              </a:spcAft>
-            </a:pPr>
-            <a:r>
-              <a:rPr lang="en-US" dirty="0"/>
-              <a:t>所以 auto 毒性較低、可能治癒一部分人，被當作第一次移植；RIC allo 是 auto 後復發的治癒選項。也有 EBMT 中心在特定病人直接以 allo 作為第一次移植。</a:t>
-            </a:r>
-          </a:p>
-          <a:p>
-            <a:pPr>
-              <a:spcAft>
-                <a:spcPts val="600"/>
-              </a:spcAft>
-            </a:pPr>
-            <a:r>
-              <a:rPr lang="en-US" dirty="0"/>
-              <a:t>看這張表要注意兩邊 TRM 的時間點不一樣，auto 是一年、allo 是五年，不能直接相減。早期的 retrospective 比較也一樣，MAC allo 復發較低、TRM 較高，OS 和 auto 相近，所以後來才發展出 RIC，讓年紀大、共病多或做過 auto 的病人也能接受 allo。</a:t>
-            </a:r>
+              <a:t>[1:30 本頁 · 15:00 至 16:30]¶這是 EBMT 最新的兩個大系列。Auto 一年 TRM 只有 3%，五年復發 47%。Allo 五年 TRM 19%，復發降到 29%。結果 OS 是 auto 較高，72% 比 61%，PFS 則接近。Allo 的 GVL 效果確實存在，只是被 TRM 抵銷掉了。¶Allo 的好處在於 graft 沒有淋巴瘤細胞污染、也沒接觸過 mutagenic agent，再加上 GVL。最大型的 auto 失敗後 RIC allo 系列來自 EBMT，兩年 NRM 27%，五年 PFS 48%、OS 51%，而且 allo 後的緩解期明顯比 auto 後長。¶所以 auto 毒性較低、可能治癒一部分人，被當作第一次移植；RIC allo 是 auto 後復發的治癒選項。也有 EBMT 中心在特定病人直接以 allo 作為第一次移植。¶看這張表要注意兩邊 TRM 的時間點不一樣，auto 是一年、allo 是五年，不能直接相減。早期的 retrospective 比較也一樣，MAC allo 復發較低、TRM 較高，OS 和 auto 相近，所以後來才發展出 RIC，讓年紀大、共病多或做過 auto 的病人也能接受 allo。</a:t>
+            </a:r>
+            <a:endParaRPr lang="en-US" dirty="0"/>
           </a:p>
         </p:txBody>
       </p:sp>
@@ -1107,70 +946,11 @@
           <a:bodyPr/>
           <a:lstStyle/>
           <a:p>
-            <a:pPr>
-              <a:spcAft>
-                <a:spcPts val="600"/>
-              </a:spcAft>
-            </a:pPr>
-            <a:r>
-              <a:rPr lang="en-US" b="1" dirty="0"/>
-              <a:t>[1:30 本頁 · 16:30 至 18:00]</a:t>
-            </a:r>
-          </a:p>
-          <a:p>
-            <a:pPr>
-              <a:spcAft>
-                <a:spcPts val="600"/>
-              </a:spcAft>
-            </a:pPr>
             <a:r>
               <a:rPr lang="en-US" dirty="0"/>
-              <a:t>Allo 只考慮給挑選過的復發病人，條件是淋巴瘤明顯會縮短存活。三線治療後復發，尤其 auto 後復發，是合理的適應症。病人端要看年齡、共病、體能、HCT-CI 和病人自己的意願。</a:t>
-            </a:r>
-          </a:p>
-          <a:p>
-            <a:pPr>
-              <a:spcAft>
-                <a:spcPts val="600"/>
-              </a:spcAft>
-            </a:pPr>
-            <a:r>
-              <a:rPr lang="en-US" dirty="0"/>
-              <a:t>Conditioning 沒有定論。Sibling donor 的 registry 顯示 MAC 和 RIC 三年 OS 71% 對 62%，P 值 0.15，沒有差異；unrelated donor 時，EBMT 的資料是 RIC 的 NRM 較低，PFS 和 OS 都較長。加上中位年齡 69 歲，多數專家建議 RIC。</a:t>
-            </a:r>
-          </a:p>
-          <a:p>
-            <a:pPr>
-              <a:spcAft>
-                <a:spcPts val="600"/>
-              </a:spcAft>
-            </a:pPr>
-            <a:r>
-              <a:rPr lang="en-US" dirty="0"/>
-              <a:t>MSD 和 MUD 結果相近，沒有的話 haplo 加 PTCy 或 cord blood 都可行。GVHD prophylaxis 沒有偏好；做 T-cell depletion 要搭配 chimerism-directed DLI，四年 PFS 76%。Allo 後不需要 maintenance。</a:t>
-            </a:r>
-          </a:p>
-          <a:p>
-            <a:pPr>
-              <a:spcAft>
-                <a:spcPts val="600"/>
-              </a:spcAft>
-            </a:pPr>
-            <a:r>
-              <a:rPr lang="en-US" dirty="0"/>
-              <a:t>TCD 和 DLI 要一起看。T-cell depletion 降低 GVHD，但也移除了負責 GVL 的 alloreactive T cell，復發會變多。依 chimerism 補 DLI，等於把 GVL 加回來，所以這個系列四年復發只有 24%，GVHD 也不多。</a:t>
-            </a:r>
-          </a:p>
-          <a:p>
-            <a:pPr>
-              <a:spcAft>
-                <a:spcPts val="600"/>
-              </a:spcAft>
-            </a:pPr>
-            <a:r>
-              <a:rPr lang="en-US" dirty="0"/>
-              <a:t>沒有 MSD 或 MUD 時，cord blood 和 PTCy haplo 在包括 FL 在內的 NHL 都已有可行性的報告。</a:t>
-            </a:r>
+              <a:t>[1:30 本頁 · 16:30 至 18:00]¶Allo 只考慮給挑選過的復發病人，條件是淋巴瘤明顯會縮短存活。三線治療後復發，尤其 auto 後復發，是合理的適應症。病人端要看年齡、共病、體能、HCT-CI 和病人自己的意願。¶Conditioning 沒有定論。Sibling donor 的 registry 顯示 MAC 和 RIC 三年 OS 71% 對 62%，P 值 0.15，沒有差異；unrelated donor 時，EBMT 的資料是 RIC 的 NRM 較低，PFS 和 OS 都較長。加上中位年齡 69 歲，多數專家建議 RIC。¶MSD 和 MUD 結果相近，沒有的話 haplo 加 PTCy 或 cord blood 都可行。GVHD prophylaxis 沒有偏好；做 T-cell depletion 要搭配 chimerism-directed DLI，四年 PFS 76%。Allo 後不需要 maintenance。¶TCD 和 DLI 要一起看。T-cell depletion 降低 GVHD，但也移除了負責 GVL 的 alloreactive T cell，復發會變多。依 chimerism 補 DLI，等於把 GVL 加回來，所以這個系列四年復發只有 24%，GVHD 也不多。¶沒有 MSD 或 MUD 時，cord blood 和 PTCy haplo 在包括 FL 在內的 NHL 都已有可行性的報告。</a:t>
+            </a:r>
+            <a:endParaRPr lang="en-US" dirty="0"/>
           </a:p>
         </p:txBody>
       </p:sp>
@@ -1254,59 +1034,11 @@
           <a:bodyPr/>
           <a:lstStyle/>
           <a:p>
-            <a:pPr>
-              <a:spcAft>
-                <a:spcPts val="600"/>
-              </a:spcAft>
-            </a:pPr>
-            <a:r>
-              <a:rPr lang="en-US" b="1" dirty="0"/>
-              <a:t>[1:30 本頁 · 18:00 至 19:30]</a:t>
-            </a:r>
-          </a:p>
-          <a:p>
-            <a:pPr>
-              <a:spcAft>
-                <a:spcPts val="600"/>
-              </a:spcAft>
-            </a:pPr>
             <a:r>
               <a:rPr lang="en-US" dirty="0"/>
-              <a:t>CLL 通常是 indolent，診斷本身不是治療的理由。開始治療的條件包括症狀、進行性貧血或血小板低下、lymphocyte doubling time 小於 6 個月、全身症狀、巨大脾臟或淋巴結，以及 Richter transformation。第一線是 covalent BTKi，或 venetoclax 加 obinutuzumab，或 ibrutinib 加 venetoclax；後兩者是 12 到 15 個月的 fixed duration。</a:t>
-            </a:r>
-          </a:p>
-          <a:p>
-            <a:pPr>
-              <a:spcAft>
-                <a:spcPts val="600"/>
-              </a:spcAft>
-            </a:pPr>
-            <a:r>
-              <a:rPr lang="en-US" dirty="0"/>
-              <a:t>第一線失敗就 class switch，BTKi 換 venetoclax，反之亦然。兩類都失敗叫 double refractory，預後很差。TP53 異常或 complex karyotype 的人，一類失敗就要考慮 allo。Richter 病史不論用過什麼藥都是適應症。</a:t>
-            </a:r>
-          </a:p>
-          <a:p>
-            <a:pPr>
-              <a:spcAft>
-                <a:spcPts val="600"/>
-              </a:spcAft>
-            </a:pPr>
-            <a:r>
-              <a:rPr lang="en-US" dirty="0"/>
-              <a:t>有個陷阱，第一線用 BTKi 加 venetoclax fixed duration，停藥後才失敗，不算 double refractory。書上也建議，只要一類 pathway inhibitor 失敗，就轉介移植中心諮詢。</a:t>
-            </a:r>
-          </a:p>
-          <a:p>
-            <a:pPr>
-              <a:spcAft>
-                <a:spcPts val="600"/>
-              </a:spcAft>
-            </a:pPr>
-            <a:r>
-              <a:rPr lang="en-US" dirty="0"/>
-              <a:t>Noncovalent BTKi 能不能改善 double refractory 的預後，目前還不清楚。移植時機要和病人個別討論，一邊是移植併發症的風險，一邊是還剩多少藥物選擇，可以用 HCT-CI 或 EBMT risk score 估計 NRM。</a:t>
-            </a:r>
+              <a:t>[1:30 本頁 · 18:00 至 19:30]¶CLL 通常是 indolent，診斷本身不是治療的理由。開始治療的條件包括症狀、進行性貧血或血小板低下、lymphocyte doubling time 小於 6 個月、全身症狀、巨大脾臟或淋巴結，以及 Richter transformation。第一線是 covalent BTKi，或 venetoclax 加 obinutuzumab，或 ibrutinib 加 venetoclax；後兩者是 12 到 15 個月的 fixed duration。¶第一線失敗就 class switch，BTKi 換 venetoclax，反之亦然。兩類都失敗叫 double refractory，預後很差。TP53 異常或 complex karyotype 的人，一類失敗就要考慮 allo。Richter 病史不論用過什麼藥都是適應症。¶有個陷阱，第一線用 BTKi 加 venetoclax fixed duration，停藥後才失敗，不算 double refractory。書上也建議，只要一類 pathway inhibitor 失敗，就轉介移植中心諮詢。¶Noncovalent BTKi 能不能改善 double refractory 的預後，目前還不清楚。移植時機要和病人個別討論，一邊是移植併發症的風險，一邊是還剩多少藥物選擇，可以用 HCT-CI 或 EBMT risk score 估計 NRM。</a:t>
+            </a:r>
+            <a:endParaRPr lang="en-US" dirty="0"/>
           </a:p>
         </p:txBody>
       </p:sp>
@@ -1390,59 +1122,11 @@
           <a:bodyPr/>
           <a:lstStyle/>
           <a:p>
-            <a:pPr>
-              <a:spcAft>
-                <a:spcPts val="600"/>
-              </a:spcAft>
-            </a:pPr>
-            <a:r>
-              <a:rPr lang="en-US" b="1" dirty="0"/>
-              <a:t>[1:30 本頁 · 19:30 至 21:00]</a:t>
-            </a:r>
-          </a:p>
-          <a:p>
-            <a:pPr>
-              <a:spcAft>
-                <a:spcPts val="600"/>
-              </a:spcAft>
-            </a:pPr>
             <a:r>
               <a:rPr lang="en-US" dirty="0"/>
-              <a:t>CLL 移植的核心機轉是 GVL。證據有三個，refractory 的病人也能受益，有 chronic GVHD 的人復發較少，以及免疫調控能清除 MRD。所以疾病沒控制時結果就變差，移植前要先誘導緩解，用 BTKi、venetoclax、CD20 抗體，idelalisib 也可以 bridge，但對 double refractory 效果有限。</a:t>
-            </a:r>
-          </a:p>
-          <a:p>
-            <a:pPr>
-              <a:spcAft>
-                <a:spcPts val="600"/>
-              </a:spcAft>
-            </a:pPr>
-            <a:r>
-              <a:rPr lang="en-US" dirty="0"/>
-              <a:t>Donor、graft 和 GVHD prophylaxis 沒有 CLL 特有的選擇。Conditioning 以 RIC 的證據最充分，MAC 沒有優勢；不過年輕、體能好但疾病控制差的人，可以考慮較高強度。</a:t>
-            </a:r>
-          </a:p>
-          <a:p>
-            <a:pPr>
-              <a:spcAft>
-                <a:spcPts val="600"/>
-              </a:spcAft>
-            </a:pPr>
-            <a:r>
-              <a:rPr lang="en-US" dirty="0"/>
-              <a:t>移植後的 MRD 用 PCR 或 flow，敏感度達到萬分之一。MRD 下降常常比較慢，和免疫重建有關，可用來決定 immunosuppression 減量和 DLI。Auto 只用在 Richter，CAR-T 目前只在臨床試驗。</a:t>
-            </a:r>
-          </a:p>
-          <a:p>
-            <a:pPr>
-              <a:spcAft>
-                <a:spcPts val="600"/>
-              </a:spcAft>
-            </a:pPr>
-            <a:r>
-              <a:rPr lang="en-US" dirty="0"/>
-              <a:t>最後兩列也是考點。NRM 的危險因子是年紀大、體能差或 HCT-CI 高、partially matched donor，以及不利的 donor 和病人性別組合。移植後復發也不必悲觀，書上說所有核准的 CLL 藥物都還能用，allo 的病史不會限制藥物選擇。</a:t>
-            </a:r>
+              <a:t>[1:30 本頁 · 19:30 至 21:00]¶CLL 移植的核心機轉是 GVL。證據有三個，refractory 的病人也能受益，有 chronic GVHD 的人復發較少，以及免疫調控能清除 MRD。所以疾病沒控制時結果就變差，移植前要先誘導緩解，用 BTKi、venetoclax、CD20 抗體，idelalisib 也可以 bridge，但對 double refractory 效果有限。¶Donor、graft 和 GVHD prophylaxis 沒有 CLL 特有的選擇。Conditioning 以 RIC 的證據最充分，MAC 沒有優勢；不過年輕、體能好但疾病控制差的人，可以考慮較高強度。¶移植後的 MRD 用 PCR 或 flow，敏感度達到萬分之一。MRD 下降常常比較慢，和免疫重建有關，可用來決定 immunosuppression 減量和 DLI。Auto 只用在 Richter，CAR-T 目前只在臨床試驗。¶最後兩列也是考點。NRM 的危險因子是年紀大、體能差或 HCT-CI 高、partially matched donor，以及不利的 donor 和病人性別組合。移植後復發也不必悲觀，書上說所有核准的 CLL 藥物都還能用，allo 的病史不會限制藥物選擇。</a:t>
+            </a:r>
+            <a:endParaRPr lang="en-US" dirty="0"/>
           </a:p>
         </p:txBody>
       </p:sp>
@@ -1526,48 +1210,11 @@
           <a:bodyPr/>
           <a:lstStyle/>
           <a:p>
-            <a:pPr>
-              <a:spcAft>
-                <a:spcPts val="600"/>
-              </a:spcAft>
-            </a:pPr>
-            <a:r>
-              <a:rPr lang="en-US" b="1" dirty="0"/>
-              <a:t>[1:00 本頁 · 21:00 至 22:00]</a:t>
-            </a:r>
-          </a:p>
-          <a:p>
-            <a:pPr>
-              <a:spcAft>
-                <a:spcPts val="600"/>
-              </a:spcAft>
-            </a:pPr>
             <a:r>
               <a:rPr lang="en-US" dirty="0"/>
-              <a:t>這三個數字來自 pathway inhibitor 之前的大型 EBMT registry。十年 EFS 28%、OS 35%、NRM 40%。五年時仍無事件的 394 位病人，接下來五年保持無事件的機率是 79%，這就是 allo 可能治癒 CLL 的主要證據。</a:t>
-            </a:r>
-          </a:p>
-          <a:p>
-            <a:pPr>
-              <a:spcAft>
-                <a:spcPts val="600"/>
-              </a:spcAft>
-            </a:pPr>
-            <a:r>
-              <a:rPr lang="en-US" dirty="0"/>
-              <a:t>晚期失敗由復發和 NRM 各佔一半。兩年 NRM 的危險因子是年紀大、體能差、unrelated donor 和不利的性別配對。進入 pathway inhibitor 時代後 NRM 已經下降，移植後復發也還能用所有核准的 CLL 藥物治療。</a:t>
-            </a:r>
-          </a:p>
-          <a:p>
-            <a:pPr>
-              <a:spcAft>
-                <a:spcPts val="600"/>
-              </a:spcAft>
-            </a:pPr>
-            <a:r>
-              <a:rPr lang="en-US" dirty="0"/>
-              <a:t>講者換算一下，十年 EFS 28%，大約每三到四位病人有一位長期無事件。這是年輕、高風險 CLL 仍值得考慮 allo 的理由；但短期死亡風險高於藥物治療的人，就不該推薦。</a:t>
-            </a:r>
+              <a:t>[1:00 本頁 · 21:00 至 22:00]¶這三個數字來自 pathway inhibitor 之前的大型 EBMT registry。十年 EFS 28%、OS 35%、NRM 40%。五年時仍無事件的 394 位病人，接下來五年保持無事件的機率是 79%，這就是 allo 可能治癒 CLL 的主要證據。¶晚期失敗由復發和 NRM 各佔一半。兩年 NRM 的危險因子是年紀大、體能差、unrelated donor 和不利的性別配對。進入 pathway inhibitor 時代後 NRM 已經下降，移植後復發也還能用所有核准的 CLL 藥物治療。¶講者換算一下，十年 EFS 28%，大約每三到四位病人有一位長期無事件。這是年輕、高風險 CLL 仍值得考慮 allo 的理由；但短期死亡風險高於藥物治療的人，就不該推薦。</a:t>
+            </a:r>
+            <a:endParaRPr lang="en-US" dirty="0"/>
           </a:p>
         </p:txBody>
       </p:sp>
@@ -1651,59 +1298,11 @@
           <a:bodyPr/>
           <a:lstStyle/>
           <a:p>
-            <a:pPr>
-              <a:spcAft>
-                <a:spcPts val="600"/>
-              </a:spcAft>
-            </a:pPr>
-            <a:r>
-              <a:rPr lang="en-US" b="1" dirty="0"/>
-              <a:t>[0:45 本頁 · 22:00 至 22:45]</a:t>
-            </a:r>
-          </a:p>
-          <a:p>
-            <a:pPr>
-              <a:spcAft>
-                <a:spcPts val="600"/>
-              </a:spcAft>
-            </a:pPr>
             <a:r>
               <a:rPr lang="en-US" dirty="0"/>
-              <a:t>第一題。27 歲女性，classical Hodgkin，BEAM auto 之後用過 BV consolidation，五個月就復發。四個 cycle 的 nivolumab 後達到 PET-negative CR，唯一的 donor 是半相合的哥哥。</a:t>
-            </a:r>
-          </a:p>
-          <a:p>
-            <a:pPr>
-              <a:spcAft>
-                <a:spcPts val="600"/>
-              </a:spcAft>
-            </a:pPr>
-            <a:r>
-              <a:rPr lang="en-US" dirty="0"/>
-              <a:t>A 是最後一劑 nivolumab 一週後就移植，B 是停藥至少 6 週、用 PTCy 做 haplo，C 是 TBI 的第二次 auto，D 是放棄 haplo、等 unrelated donor，E 是 low-dose TBI 的 RIC。</a:t>
-            </a:r>
-          </a:p>
-          <a:p>
-            <a:pPr>
-              <a:spcAft>
-                <a:spcPts val="600"/>
-              </a:spcAft>
-            </a:pPr>
-            <a:r>
-              <a:rPr lang="en-US" dirty="0"/>
-              <a:t>題目給的時間點和用藥順序都是線索，先想 auto 後多久復發、之前用過什麼藥。</a:t>
-            </a:r>
-          </a:p>
-          <a:p>
-            <a:pPr>
-              <a:spcAft>
-                <a:spcPts val="600"/>
-              </a:spcAft>
-            </a:pPr>
-            <a:r>
-              <a:rPr lang="en-US" b="1" dirty="0"/>
-              <a:t>[Pause for answers.]</a:t>
-            </a:r>
+              <a:t>[0:45 本頁 · 22:00 至 22:45]¶第一題。27 歲女性，classical Hodgkin，BEAM auto 之後用過 BV consolidation，五個月就復發。四個 cycle 的 nivolumab 後達到 PET-negative CR，唯一的 donor 是半相合的哥哥。¶A 是最後一劑 nivolumab 一週後就移植，B 是停藥至少 6 週、用 PTCy 做 haplo，C 是 TBI 的第二次 auto，D 是放棄 haplo、等 unrelated donor，E 是 low-dose TBI 的 RIC。¶題目給的時間點和用藥順序都是線索，先想 auto 後多久復發、之前用過什麼藥。¶[Pause for answers.]</a:t>
+            </a:r>
+            <a:endParaRPr lang="en-US" dirty="0"/>
           </a:p>
         </p:txBody>
       </p:sp>
@@ -1787,59 +1386,11 @@
           <a:bodyPr/>
           <a:lstStyle/>
           <a:p>
-            <a:pPr>
-              <a:spcAft>
-                <a:spcPts val="600"/>
-              </a:spcAft>
-            </a:pPr>
-            <a:r>
-              <a:rPr lang="en-US" b="1" dirty="0"/>
-              <a:t>[1:00 本頁 · 22:45 至 23:45]</a:t>
-            </a:r>
-          </a:p>
-          <a:p>
-            <a:pPr>
-              <a:spcAft>
-                <a:spcPts val="600"/>
-              </a:spcAft>
-            </a:pPr>
             <a:r>
               <a:rPr lang="en-US" dirty="0"/>
-              <a:t>答案是 B。Auto 失敗後的 cHL，allo 是治癒選項，而 sensitive relapse after auto 不論 donor 都是 standard。Checkpoint inhibitor 移植前使用，可能增加 acute GVHD、SOS/VOD 和 hyperacute febrile syndrome，所以停藥至少 6 週，並用 PTCy。</a:t>
-            </a:r>
-          </a:p>
-          <a:p>
-            <a:pPr>
-              <a:spcAft>
-                <a:spcPts val="600"/>
-              </a:spcAft>
-            </a:pPr>
-            <a:r>
-              <a:rPr lang="en-US" dirty="0"/>
-              <a:t>A 是主要陷阱，把 BV 的規則套到 PD-1 上；BV 不需要 washout，PD-1 需要。D 不對，haplo 加 PTCy 的結果和 MSD、MUD 相近，GVHD 甚至更少。C 和 E 都踩到 TBI，auto 不建議 TBI，low-dose TBI 的 RIC 復發較高、存活較差。</a:t>
-            </a:r>
-          </a:p>
-          <a:p>
-            <a:pPr>
-              <a:spcAft>
-                <a:spcPts val="600"/>
-              </a:spcAft>
-            </a:pPr>
-            <a:r>
-              <a:rPr lang="en-US" dirty="0"/>
-              <a:t>題目先講她用過 BV，這是為了對應演算法，用過 BV 才走 PD-1 那一支。</a:t>
-            </a:r>
-          </a:p>
-          <a:p>
-            <a:pPr>
-              <a:spcAft>
-                <a:spcPts val="600"/>
-              </a:spcAft>
-            </a:pPr>
-            <a:r>
-              <a:rPr lang="en-US" dirty="0"/>
-              <a:t>Auto 後五個月就復發屬於早期復發，預後較差，更需要 allo 來鞏固。</a:t>
-            </a:r>
+              <a:t>[1:00 本頁 · 22:45 至 23:45]¶答案是 B。Auto 失敗後的 cHL，allo 是治癒選項，而 sensitive relapse after auto 不論 donor 都是 standard。Checkpoint inhibitor 移植前使用，可能增加 acute GVHD、SOS/VOD 和 hyperacute febrile syndrome，所以停藥至少 6 週，並用 PTCy。¶A 是主要陷阱，把 BV 的規則套到 PD-1 上；BV 不需要 washout，PD-1 需要。D 不對，haplo 加 PTCy 的結果和 MSD、MUD 相近，GVHD 甚至更少。C 和 E 都踩到 TBI，auto 不建議 TBI，low-dose TBI 的 RIC 復發較高、存活較差。¶題目先講她用過 BV，這是為了對應演算法，用過 BV 才走 PD-1 那一支。¶Auto 後五個月就復發屬於早期復發，預後較差，更需要 allo 來鞏固。</a:t>
+            </a:r>
+            <a:endParaRPr lang="en-US" dirty="0"/>
           </a:p>
         </p:txBody>
       </p:sp>
@@ -1923,59 +1474,11 @@
           <a:bodyPr/>
           <a:lstStyle/>
           <a:p>
-            <a:pPr>
-              <a:spcAft>
-                <a:spcPts val="600"/>
-              </a:spcAft>
-            </a:pPr>
-            <a:r>
-              <a:rPr lang="en-US" b="1" dirty="0"/>
-              <a:t>[0:45 本頁 · 23:45 至 24:30]</a:t>
-            </a:r>
-          </a:p>
-          <a:p>
-            <a:pPr>
-              <a:spcAft>
-                <a:spcPts val="600"/>
-              </a:spcAft>
-            </a:pPr>
             <a:r>
               <a:rPr lang="en-US" dirty="0"/>
-              <a:t>第二題。54 歲男性，follicular lymphoma grade 1 到 2，bendamustine-rituximab 加 rituximab maintenance，開始治療後 15 個月復發，切片沒有轉化。第二線化學免疫治療達到 complete metabolic response，體能好，有 HLA 相合的姊姊。</a:t>
-            </a:r>
-          </a:p>
-          <a:p>
-            <a:pPr>
-              <a:spcAft>
-                <a:spcPts val="600"/>
-              </a:spcAft>
-            </a:pPr>
-            <a:r>
-              <a:rPr lang="en-US" dirty="0"/>
-              <a:t>選項是觀察、BEAM 的 auto、姊姊的 MAC allo、TBI 加 purging 的 auto，以及 allo 後 rituximab maintenance。</a:t>
-            </a:r>
-          </a:p>
-          <a:p>
-            <a:pPr>
-              <a:spcAft>
-                <a:spcPts val="600"/>
-              </a:spcAft>
-            </a:pPr>
-            <a:r>
-              <a:rPr lang="en-US" dirty="0"/>
-              <a:t>注意題目特別講了復發的時間點和沒有轉化，這兩件事決定他屬不屬於該移植的族群，也決定先做哪一種移植。</a:t>
-            </a:r>
-          </a:p>
-          <a:p>
-            <a:pPr>
-              <a:spcAft>
-                <a:spcPts val="600"/>
-              </a:spcAft>
-            </a:pPr>
-            <a:r>
-              <a:rPr lang="en-US" b="1" dirty="0"/>
-              <a:t>[Pause for answers.]</a:t>
-            </a:r>
+              <a:t>[0:45 本頁 · 23:45 至 24:30]¶第二題。54 歲男性，follicular lymphoma grade 1 到 2，bendamustine-rituximab 加 rituximab maintenance，開始治療後 15 個月復發，切片沒有轉化。第二線化學免疫治療達到 complete metabolic response，體能好，有 HLA 相合的姊姊。¶選項是觀察、BEAM 的 auto、姊姊的 MAC allo、TBI 加 purging 的 auto，以及 allo 後 rituximab maintenance。¶注意題目特別講了復發的時間點和沒有轉化，這兩件事決定他屬不屬於該移植的族群，也決定先做哪一種移植。¶[Pause for answers.]</a:t>
+            </a:r>
+            <a:endParaRPr lang="en-US" dirty="0"/>
           </a:p>
         </p:txBody>
       </p:sp>
@@ -2059,48 +1562,11 @@
           <a:bodyPr/>
           <a:lstStyle/>
           <a:p>
-            <a:pPr>
-              <a:spcAft>
-                <a:spcPts val="600"/>
-              </a:spcAft>
-            </a:pPr>
-            <a:r>
-              <a:rPr lang="en-US" b="1" dirty="0"/>
-              <a:t>[1:00 本頁 · 0:30 至 1:30]</a:t>
-            </a:r>
-          </a:p>
-          <a:p>
-            <a:pPr>
-              <a:spcAft>
-                <a:spcPts val="600"/>
-              </a:spcAft>
-            </a:pPr>
             <a:r>
               <a:rPr lang="en-US" dirty="0"/>
-              <a:t>今天分四段。第一段是 classical Hodgkin，大約十分鐘，從復發時的 salvage、BEAM auto-HCT、brentuximab vedotin consolidation，一路講到 auto 失敗之後的 allo。Hodgkin 的適應症表格和數字最多，也最常出題。</a:t>
-            </a:r>
-          </a:p>
-          <a:p>
-            <a:pPr>
-              <a:spcAft>
-                <a:spcPts val="600"/>
-              </a:spcAft>
-            </a:pPr>
-            <a:r>
-              <a:rPr lang="en-US" dirty="0"/>
-              <a:t>第二段是以 follicular lymphoma 為代表的 indolent lymphoma，重點是哪些病人值得移植，以及 auto 和 allo 怎麼取捨。第三段是 CLL，在 pathway inhibitor 的時代，allo 的適應症只剩三種情境，很好記。最後五分鐘做三題，剛好每一段各一題。</a:t>
-            </a:r>
-          </a:p>
-          <a:p>
-            <a:pPr>
-              <a:spcAft>
-                <a:spcPts val="600"/>
-              </a:spcAft>
-            </a:pPr>
-            <a:r>
-              <a:rPr lang="en-US" dirty="0"/>
-              <a:t>三個疾病有一條共同的線索。移植的時機都取決於疾病對前一線治療還敏不敏感，以及有沒有更安全的新藥可以先用，等一下 chemosensitivity 這個詞會反覆出現。</a:t>
-            </a:r>
+              <a:t>[1:00 本頁 · 0:30 至 1:30]¶今天分四段。第一段是 classical Hodgkin，大約十分鐘，從復發時的 salvage、BEAM auto-HCT、brentuximab vedotin consolidation，一路講到 auto 失敗之後的 allo。Hodgkin 的適應症表格和數字最多，也最常出題。¶第二段是以 follicular lymphoma 為代表的 indolent lymphoma，重點是哪些病人值得移植，以及 auto 和 allo 怎麼取捨。第三段是 CLL，在 pathway inhibitor 的時代，allo 的適應症只剩三種情境，很好記。最後五分鐘做三題，剛好每一段各一題。¶三個疾病有一條共同的線索。移植的時機都取決於疾病對前一線治療還敏不敏感，以及有沒有更安全的新藥可以先用，等一下 chemosensitivity 這個詞會反覆出現。</a:t>
+            </a:r>
+            <a:endParaRPr lang="en-US" dirty="0"/>
           </a:p>
         </p:txBody>
       </p:sp>
@@ -2184,59 +1650,11 @@
           <a:bodyPr/>
           <a:lstStyle/>
           <a:p>
-            <a:pPr>
-              <a:spcAft>
-                <a:spcPts val="600"/>
-              </a:spcAft>
-            </a:pPr>
-            <a:r>
-              <a:rPr lang="en-US" b="1" dirty="0"/>
-              <a:t>[1:00 本頁 · 24:30 至 25:30]</a:t>
-            </a:r>
-          </a:p>
-          <a:p>
-            <a:pPr>
-              <a:spcAft>
-                <a:spcPts val="600"/>
-              </a:spcAft>
-            </a:pPr>
             <a:r>
               <a:rPr lang="en-US" dirty="0"/>
-              <a:t>答案是 B。第一線後兩年內復發，也就是 POD24，存活較差，疾病控制後就應考慮 HCT，所以 A 錯。多數歐洲專家把 auto 當第一次移植，毒性低、能治癒一部分人，BEAM 是最常用的 conditioning。</a:t>
-            </a:r>
-          </a:p>
-          <a:p>
-            <a:pPr>
-              <a:spcAft>
-                <a:spcPts val="600"/>
-              </a:spcAft>
-            </a:pPr>
-            <a:r>
-              <a:rPr lang="en-US" dirty="0"/>
-              <a:t>C 是主要干擾項，有 sibling donor 不代表要先做 allo，allo 留給 auto 後復發；而且 FL 多數用 RIC。D 錯在 purging 沒有證實的好處，TBI 又增加 MDS/AML。E 錯在 allo 後的 indolent lymphoma 沒有 maintenance 的適應症。</a:t>
-            </a:r>
-          </a:p>
-          <a:p>
-            <a:pPr>
-              <a:spcAft>
-                <a:spcPts val="600"/>
-              </a:spcAft>
-            </a:pPr>
-            <a:r>
-              <a:rPr lang="en-US" dirty="0"/>
-              <a:t>如果題目改成 auto 後才復發，答案就會變成 RIC allo，這是同一個考點的另一面。</a:t>
-            </a:r>
-          </a:p>
-          <a:p>
-            <a:pPr>
-              <a:spcAft>
-                <a:spcPts val="600"/>
-              </a:spcAft>
-            </a:pPr>
-            <a:r>
-              <a:rPr lang="en-US" dirty="0"/>
-              <a:t>這位病人 54 歲，比 relapsed FL 的中位年齡 69 歲年輕很多，auto 的 TRM 也比較能接受。</a:t>
-            </a:r>
+              <a:t>[1:00 本頁 · 24:30 至 25:30]¶答案是 B。第一線後兩年內復發，也就是 POD24，存活較差，疾病控制後就應考慮 HCT，所以 A 錯。多數歐洲專家把 auto 當第一次移植，毒性低、能治癒一部分人，BEAM 是最常用的 conditioning。¶C 是主要干擾項，有 sibling donor 不代表要先做 allo，allo 留給 auto 後復發；而且 FL 多數用 RIC。D 錯在 purging 沒有證實的好處，TBI 又增加 MDS/AML。E 錯在 allo 後的 indolent lymphoma 沒有 maintenance 的適應症。¶如果題目改成 auto 後才復發，答案就會變成 RIC allo，這是同一個考點的另一面。¶這位病人 54 歲，比 relapsed FL 的中位年齡 69 歲年輕很多，auto 的 TRM 也比較能接受。</a:t>
+            </a:r>
+            <a:endParaRPr lang="en-US" dirty="0"/>
           </a:p>
         </p:txBody>
       </p:sp>
@@ -2320,70 +1738,11 @@
           <a:bodyPr/>
           <a:lstStyle/>
           <a:p>
-            <a:pPr>
-              <a:spcAft>
-                <a:spcPts val="600"/>
-              </a:spcAft>
-            </a:pPr>
-            <a:r>
-              <a:rPr lang="en-US" b="1" dirty="0"/>
-              <a:t>[0:45 本頁 · 25:30 至 26:15]</a:t>
-            </a:r>
-          </a:p>
-          <a:p>
-            <a:pPr>
-              <a:spcAft>
-                <a:spcPts val="600"/>
-              </a:spcAft>
-            </a:pPr>
             <a:r>
               <a:rPr lang="en-US" dirty="0"/>
-              <a:t>第三題。52 歲女性，CLL 帶 TP53 mutation，第一線持續吃 acalabrutinib 兩年後惡化。換成 venetoclax 加 rituximab，目前 partial response。HCT-CI 1 分，有 10/10 相合的 unrelated donor。</a:t>
-            </a:r>
-          </a:p>
-          <a:p>
-            <a:pPr>
-              <a:spcAft>
-                <a:spcPts val="600"/>
-              </a:spcAft>
-            </a:pPr>
-            <a:r>
-              <a:rPr lang="en-US" dirty="0"/>
-              <a:t>選項有繼續 venetoclax、等它也失敗再說，auto，現在就轉介做 RIC allo，商業 CAR-T，以及因為 TP53 而做 MAC allo。</a:t>
-            </a:r>
-          </a:p>
-          <a:p>
-            <a:pPr>
-              <a:spcAft>
-                <a:spcPts val="600"/>
-              </a:spcAft>
-            </a:pPr>
-            <a:r>
-              <a:rPr lang="en-US" dirty="0"/>
-              <a:t>這題要同時看三件事，遺傳學風險、用過幾類藥，以及現在疾病有沒有控制住。Donor 和 HCT-CI 都不是問題，重點在時機。</a:t>
-            </a:r>
-          </a:p>
-          <a:p>
-            <a:pPr>
-              <a:spcAft>
-                <a:spcPts val="600"/>
-              </a:spcAft>
-            </a:pPr>
-            <a:r>
-              <a:rPr lang="en-US" dirty="0"/>
-              <a:t>先決定該不該移植，再決定怎麼移植。</a:t>
-            </a:r>
-          </a:p>
-          <a:p>
-            <a:pPr>
-              <a:spcAft>
-                <a:spcPts val="600"/>
-              </a:spcAft>
-            </a:pPr>
-            <a:r>
-              <a:rPr lang="en-US" b="1" dirty="0"/>
-              <a:t>[Pause for answers.]</a:t>
-            </a:r>
+              <a:t>[0:45 本頁 · 25:30 至 26:15]¶第三題。52 歲女性，CLL 帶 TP53 mutation，第一線持續吃 acalabrutinib 兩年後惡化。換成 venetoclax 加 rituximab，目前 partial response。HCT-CI 1 分，有 10/10 相合的 unrelated donor。¶選項有繼續 venetoclax、等它也失敗再說，auto，現在就轉介做 RIC allo，商業 CAR-T，以及因為 TP53 而做 MAC allo。¶這題要同時看三件事，遺傳學風險、用過幾類藥，以及現在疾病有沒有控制住。Donor 和 HCT-CI 都不是問題，重點在時機。¶先決定該不該移植，再決定怎麼移植。¶[Pause for answers.]</a:t>
+            </a:r>
+            <a:endParaRPr lang="en-US" dirty="0"/>
           </a:p>
         </p:txBody>
       </p:sp>
@@ -2467,48 +1826,11 @@
           <a:bodyPr/>
           <a:lstStyle/>
           <a:p>
-            <a:pPr>
-              <a:spcAft>
-                <a:spcPts val="600"/>
-              </a:spcAft>
-            </a:pPr>
-            <a:r>
-              <a:rPr lang="en-US" b="1" dirty="0"/>
-              <a:t>[1:00 本頁 · 26:15 至 27:15]</a:t>
-            </a:r>
-          </a:p>
-          <a:p>
-            <a:pPr>
-              <a:spcAft>
-                <a:spcPts val="600"/>
-              </a:spcAft>
-            </a:pPr>
             <a:r>
               <a:rPr lang="en-US" dirty="0"/>
-              <a:t>答案是 C。TP53 異常或 complex karyotype 的病人，只要一類 pathway inhibitor 失敗就是 allo 的適應症，而且要趁有反應時移植，因為疾病未控制時結果明顯變差。</a:t>
-            </a:r>
-          </a:p>
-          <a:p>
-            <a:pPr>
-              <a:spcAft>
-                <a:spcPts val="600"/>
-              </a:spcAft>
-            </a:pPr>
-            <a:r>
-              <a:rPr lang="en-US" dirty="0"/>
-              <a:t>A 是主要陷阱，等到兩類都失敗才移植，只適用於沒有 TP53 或 complex karyotype 的人；書上也提醒，allo 應該在完全抗藥之前就考慮。B 錯，auto 除了 Richter 之外沒有角色。D 錯，CLL 目前沒有核准的 CAR-T 產品，只能在試驗中使用。E 錯，MAC 沒有優於 RIC，CLL 靠的是 GVL。</a:t>
-            </a:r>
-          </a:p>
-          <a:p>
-            <a:pPr>
-              <a:spcAft>
-                <a:spcPts val="600"/>
-              </a:spcAft>
-            </a:pPr>
-            <a:r>
-              <a:rPr lang="en-US" dirty="0"/>
-              <a:t>書上也建議，一類 pathway inhibitor 失敗就應轉介移植中心，這位病人現在正是轉介的時機。</a:t>
-            </a:r>
+              <a:t>[1:00 本頁 · 26:15 至 27:15]¶答案是 C。TP53 異常或 complex karyotype 的病人，只要一類 pathway inhibitor 失敗就是 allo 的適應症，而且要趁有反應時移植，因為疾病未控制時結果明顯變差。¶A 是主要陷阱，等到兩類都失敗才移植，只適用於沒有 TP53 或 complex karyotype 的人；書上也提醒，allo 應該在完全抗藥之前就考慮。B 錯，auto 除了 Richter 之外沒有角色。D 錯，CLL 目前沒有核准的 CAR-T 產品，只能在試驗中使用。E 錯，MAC 沒有優於 RIC，CLL 靠的是 GVL。¶書上也建議，一類 pathway inhibitor 失敗就應轉介移植中心，這位病人現在正是轉介的時機。</a:t>
+            </a:r>
+            <a:endParaRPr lang="en-US" dirty="0"/>
           </a:p>
         </p:txBody>
       </p:sp>
@@ -3208,59 +2530,11 @@
           <a:bodyPr/>
           <a:lstStyle/>
           <a:p>
-            <a:pPr>
-              <a:spcAft>
-                <a:spcPts val="600"/>
-              </a:spcAft>
-            </a:pPr>
-            <a:r>
-              <a:rPr lang="en-US" b="1" dirty="0"/>
-              <a:t>[1:30 本頁 · 1:30 至 3:00]</a:t>
-            </a:r>
-          </a:p>
-          <a:p>
-            <a:pPr>
-              <a:spcAft>
-                <a:spcPts val="600"/>
-              </a:spcAft>
-            </a:pPr>
             <a:r>
               <a:rPr lang="en-US" dirty="0"/>
-              <a:t>Hodgkin 第一次復發或 primary refractory，標準是 salvage 之後做 high-dose chemotherapy 加 auto-HCT。Salvage 前先做兩件事。距離第一線結束 12 個月以上的復發一定要重新切片，排除別的診斷，12 個月內也強烈建議。影像做 contrast CT 加 PET。</a:t>
-            </a:r>
-          </a:p>
-          <a:p>
-            <a:pPr>
-              <a:spcAft>
-                <a:spcPts val="600"/>
-              </a:spcAft>
-            </a:pPr>
-            <a:r>
-              <a:rPr lang="en-US" dirty="0"/>
-              <a:t>表上是 Table 89.2。DHAP 的 ORR 89%，CR 只有 21%；ICE 的 CR 67%；BeGEV 的 CR 73%。這些數字來自不同研究，沒有 trial 直接比較，所以選擇要看第一線用過什麼、累積毒性和能不能收集幹細胞。</a:t>
-            </a:r>
-          </a:p>
-          <a:p>
-            <a:pPr>
-              <a:spcAft>
-                <a:spcPts val="600"/>
-              </a:spcAft>
-            </a:pPr>
-            <a:r>
-              <a:rPr lang="en-US" dirty="0"/>
-              <a:t>Salvage 的目標是 chemosensitivity，書上把 PET-negative 當作 chemosensitive 的定義，它對 auto 後的結果影響最大。下面兩列不含化療，BV 單藥核准給不適合 auto、至少兩線化療失敗的人。</a:t>
-            </a:r>
-          </a:p>
-          <a:p>
-            <a:pPr>
-              <a:spcAft>
-                <a:spcPts val="600"/>
-              </a:spcAft>
-            </a:pPr>
-            <a:r>
-              <a:rPr lang="en-US" dirty="0"/>
-              <a:t>實務上，所有化療型 salvage 都有血液毒性，infection 和 neutropenic fever 約 10 到 24%，每一種方案動員幹細胞都沒有問題。治療前要評估心肺功能，有需要先做生育諮詢。新藥加化療的組合，例如 pembrolizumab 加 GVD，PET-negative rate 可到 95%，但這些組合都還沒有核准。</a:t>
-            </a:r>
+              <a:t>[1:30 本頁 · 1:30 至 3:00]¶Hodgkin 第一次復發或 primary refractory，標準是 salvage 之後做 high-dose chemotherapy 加 auto-HCT。Salvage 前先做兩件事。距離第一線結束 12 個月以上的復發一定要重新切片，排除別的診斷，12 個月內也強烈建議。影像做 contrast CT 加 PET。¶表上是 Table 89.2。DHAP 的 ORR 89%，CR 只有 21%；ICE 的 CR 67%；BeGEV 的 CR 73%。這些數字來自不同研究，沒有 trial 直接比較，所以選擇要看第一線用過什麼、累積毒性和能不能收集幹細胞。¶Salvage 的目標是 chemosensitivity，書上把 PET-negative 當作 chemosensitive 的定義，它對 auto 後的結果影響最大。下面兩列不含化療，BV 單藥核准給不適合 auto、至少兩線化療失敗的人。¶實務上，所有化療型 salvage 都有血液毒性，infection 和 neutropenic fever 約 10 到 24%，每一種方案動員幹細胞都沒有問題。治療前要評估心肺功能，有需要先做生育諮詢。新藥加化療的組合，例如 pembrolizumab 加 GVD，PET-negative rate 可到 95%，但這些組合都還沒有核准。</a:t>
+            </a:r>
+            <a:endParaRPr lang="en-US" dirty="0"/>
           </a:p>
         </p:txBody>
       </p:sp>
@@ -3282,94 +2556,6 @@
             <a:fld id="{F7021451-1387-4CA6-816F-3879F97B5CBC}" type="slidenum">
               <a:rPr lang="en-US"/>
               <a:t>3</a:t>
-            </a:fld>
-            <a:endParaRPr lang="en-US"/>
-          </a:p>
-        </p:txBody>
-      </p:sp>
-    </p:spTree>
-    <p:extLst>
-      <p:ext uri="{BB962C8B-B14F-4D97-AF65-F5344CB8AC3E}">
-        <p14:creationId xmlns:p14="http://schemas.microsoft.com/office/powerpoint/2010/main" val="1024086991"/>
-      </p:ext>
-    </p:extLst>
-  </p:cSld>
-  <p:clrMapOvr>
-    <a:masterClrMapping/>
-  </p:clrMapOvr>
-</p:notes>
-</file>
-
-<file path=ppt/notesSlides/notesSlide30.xml><?xml version="1.0" encoding="utf-8"?>
-<p:notes xmlns:a="http://schemas.openxmlformats.org/drawingml/2006/main" xmlns:r="http://schemas.openxmlformats.org/officeDocument/2006/relationships" xmlns:p="http://schemas.openxmlformats.org/presentationml/2006/main">
-  <p:cSld>
-    <p:spTree>
-      <p:nvGrpSpPr>
-        <p:cNvPr id="1" name=""/>
-        <p:cNvGrpSpPr/>
-        <p:nvPr/>
-      </p:nvGrpSpPr>
-      <p:grpSpPr>
-        <a:xfrm>
-          <a:off x="0" y="0"/>
-          <a:ext cx="0" cy="0"/>
-          <a:chOff x="0" y="0"/>
-          <a:chExt cx="0" cy="0"/>
-        </a:xfrm>
-      </p:grpSpPr>
-      <p:sp>
-        <p:nvSpPr>
-          <p:cNvPr id="2" name="Slide Image Placeholder 1"/>
-          <p:cNvSpPr>
-            <a:spLocks noGrp="1" noRot="1" noChangeAspect="1"/>
-          </p:cNvSpPr>
-          <p:nvPr>
-            <p:ph type="sldImg"/>
-          </p:nvPr>
-        </p:nvSpPr>
-        <p:spPr/>
-      </p:sp>
-      <p:sp>
-        <p:nvSpPr>
-          <p:cNvPr id="3" name="Notes Placeholder 2"/>
-          <p:cNvSpPr>
-            <a:spLocks noGrp="1"/>
-          </p:cNvSpPr>
-          <p:nvPr>
-            <p:ph type="body" idx="1"/>
-          </p:nvPr>
-        </p:nvSpPr>
-        <p:spPr/>
-        <p:txBody>
-          <a:bodyPr/>
-          <a:lstStyle/>
-          <a:p>
-            <a:r>
-              <a:rPr lang="en-US" dirty="0"/>
-              <a:t>這是第 89 章的原圖，主線的 tree 由它簡化。灰色箭頭代表觀察和 allo 兩者都可以接受，要和病人仔細討論。</a:t>
-            </a:r>
-            <a:endParaRPr lang="en-US" dirty="0"/>
-          </a:p>
-        </p:txBody>
-      </p:sp>
-      <p:sp>
-        <p:nvSpPr>
-          <p:cNvPr id="4" name="Slide Number Placeholder 3"/>
-          <p:cNvSpPr>
-            <a:spLocks noGrp="1"/>
-          </p:cNvSpPr>
-          <p:nvPr>
-            <p:ph type="sldNum" sz="quarter" idx="10"/>
-          </p:nvPr>
-        </p:nvSpPr>
-        <p:spPr/>
-        <p:txBody>
-          <a:bodyPr/>
-          <a:lstStyle/>
-          <a:p>
-            <a:fld id="{F7021451-1387-4CA6-816F-3879F97B5CBC}" type="slidenum">
-              <a:rPr lang="en-US"/>
-              <a:t>30</a:t>
             </a:fld>
             <a:endParaRPr lang="en-US"/>
           </a:p>
@@ -3432,59 +2618,11 @@
           <a:bodyPr/>
           <a:lstStyle/>
           <a:p>
-            <a:pPr>
-              <a:spcAft>
-                <a:spcPts val="600"/>
-              </a:spcAft>
-            </a:pPr>
-            <a:r>
-              <a:rPr lang="en-US" b="1" dirty="0"/>
-              <a:t>[1:30 本頁 · 3:00 至 4:30]</a:t>
-            </a:r>
-          </a:p>
-          <a:p>
-            <a:pPr>
-              <a:spcAft>
-                <a:spcPts val="600"/>
-              </a:spcAft>
-            </a:pPr>
             <a:r>
               <a:rPr lang="en-US" dirty="0"/>
-              <a:t>兩個 landmark randomized trial，1993 年的 BNLI 和 2002 年的 GHSG/EBMT HD-R1，都把 high-dose chemotherapy 加 auto 跟一般 salvage chemotherapy 比，EFS 和 FFTF 顯著較好，但 OS 沒有顯著差異。這句很常被拿來出是非題。</a:t>
-            </a:r>
-          </a:p>
-          <a:p>
-            <a:pPr>
-              <a:spcAft>
-                <a:spcPts val="600"/>
-              </a:spcAft>
-            </a:pPr>
-            <a:r>
-              <a:rPr lang="en-US" dirty="0"/>
-              <a:t>EBMT 2022 的適應症在表上。CR1 不建議做 auto，evidence level I。Chemosensitive relapse 而沒做過 auto 是 standard of care，五年 OS 75%、PFS 50%。Primary refractory 只是 clinical option，五年 OS 剩 30 到 36%。</a:t>
-            </a:r>
-          </a:p>
-          <a:p>
-            <a:pPr>
-              <a:spcAft>
-                <a:spcPts val="600"/>
-              </a:spcAft>
-            </a:pPr>
-            <a:r>
-              <a:rPr lang="en-US" dirty="0"/>
-              <a:t>做過 auto 再復發，第二次 auto 是 clinical option，NRM 15%，五年 OS 和 PFS 都是 30%。Tandem auto 給 poor-risk 病人，NRM 0 到 5%，現在有了 BV 和 checkpoint inhibitor，要不要做第二次 auto 需要重新評估。</a:t>
-            </a:r>
-          </a:p>
-          <a:p>
-            <a:pPr>
-              <a:spcAft>
-                <a:spcPts val="600"/>
-              </a:spcAft>
-            </a:pPr>
-            <a:r>
-              <a:rPr lang="en-US" dirty="0"/>
-              <a:t>臨床上判斷 chemosensitive 的工具就是 PET。Salvage 後 PET 陰性，直接走 auto；PET 仍陽性，就要考慮換 salvage，或把 tandem、BV consolidation 這些加強手段一起納入討論。Primary refractory 的人結果雖然差，仍有大約三成長期存活，所以不是放棄移植的理由。</a:t>
-            </a:r>
+              <a:t>[1:30 本頁 · 3:00 至 4:30]¶兩個 landmark randomized trial，1993 年的 BNLI 和 2002 年的 GHSG/EBMT HD-R1，都把 high-dose chemotherapy 加 auto 跟一般 salvage chemotherapy 比，EFS 和 FFTF 顯著較好，但 OS 沒有顯著差異。這句很常被拿來出是非題。¶EBMT 2022 的適應症在表上。CR1 不建議做 auto，evidence level I。Chemosensitive relapse 而沒做過 auto 是 standard of care，五年 OS 75%、PFS 50%。Primary refractory 只是 clinical option，五年 OS 剩 30 到 36%。¶做過 auto 再復發，第二次 auto 是 clinical option，NRM 15%，五年 OS 和 PFS 都是 30%。Tandem auto 給 poor-risk 病人，NRM 0 到 5%，現在有了 BV 和 checkpoint inhibitor，要不要做第二次 auto 需要重新評估。¶臨床上判斷 chemosensitive 的工具就是 PET。Salvage 後 PET 陰性，直接走 auto；PET 仍陽性，就要考慮換 salvage，或把 tandem、BV consolidation 這些加強手段一起納入討論。Primary refractory 的人結果雖然差，仍有大約三成長期存活，所以不是放棄移植的理由。</a:t>
+            </a:r>
+            <a:endParaRPr lang="en-US" dirty="0"/>
           </a:p>
         </p:txBody>
       </p:sp>
@@ -3568,92 +2706,11 @@
           <a:bodyPr/>
           <a:lstStyle/>
           <a:p>
-            <a:pPr>
-              <a:spcAft>
-                <a:spcPts val="600"/>
-              </a:spcAft>
-            </a:pPr>
-            <a:r>
-              <a:rPr lang="en-US" b="1" dirty="0"/>
-              <a:t>[1:30 本頁 · 4:30 至 6:00]</a:t>
-            </a:r>
-          </a:p>
-          <a:p>
-            <a:pPr>
-              <a:spcAft>
-                <a:spcPts val="600"/>
-              </a:spcAft>
-            </a:pPr>
             <a:r>
               <a:rPr lang="en-US" dirty="0"/>
-              <a:t>Auto 的幹細胞來源首選 mobilized peripheral blood。Conditioning 沒有 randomized 比較，但 BEAM 是首選。BCNU 300 mg/m² 在 day −6 給一次，etoposide 200 mg/m² 和 cytarabine 200 mg/m² 一天兩次，都從 day −5 給到 −2，melphalan 140 在 day −1。北美常用 CBV。TBI-based regimen 不建議，因為第二癌風險較高。</a:t>
-            </a:r>
-          </a:p>
-          <a:p>
-            <a:pPr>
-              <a:spcAft>
-                <a:spcPts val="600"/>
-              </a:spcAft>
-            </a:pPr>
-            <a:r>
-              <a:rPr lang="en-US" dirty="0"/>
-              <a:t>Melphalan 的單位，書上印的是 140 mg/kg，這顯然是 mg/m² 的筆誤，上課前會再確認。</a:t>
-            </a:r>
-          </a:p>
-          <a:p>
-            <a:pPr>
-              <a:spcAft>
-                <a:spcPts val="600"/>
-              </a:spcAft>
-            </a:pPr>
-            <a:r>
-              <a:rPr lang="en-US" dirty="0"/>
-              <a:t>Caption 是 BEAM 的晚期毒性。肺部的 chronic interstitial fibrosis 和 DLCO 下降 21%，第二腫瘤 20%。NRM 最常見的原因就是第二癌，風險是一般人的 12 倍，追蹤門診要記得篩檢。</a:t>
-            </a:r>
-          </a:p>
-          <a:p>
-            <a:pPr>
-              <a:spcAft>
-                <a:spcPts val="600"/>
-              </a:spcAft>
-            </a:pPr>
-            <a:r>
-              <a:rPr lang="en-US" dirty="0"/>
-              <a:t>BEAM 四個藥的順序和天數容易出配對題。BCNU 只給一次而且最早給，melphalan 也只給一次、放在最後一天，中間四天是 etoposide 和 cytarabine。肺部是 BEAM 最常見的晚期問題之一，追蹤時有咳嗽、喘或 DLCO 下降，要想到 chronic interstitial fibrosis。</a:t>
-            </a:r>
-          </a:p>
-          <a:p>
-            <a:pPr>
-              <a:spcAft>
-                <a:spcPts val="600"/>
-              </a:spcAft>
-            </a:pPr>
-            <a:r>
-              <a:rPr lang="en-US" dirty="0"/>
-              <a:t>第二腫瘤加上 metabolic syndrome 和心血管問題，代表 auto 後的長期追蹤不只是看復發。</a:t>
-            </a:r>
-          </a:p>
-          <a:p>
-            <a:pPr>
-              <a:spcAft>
-                <a:spcPts val="600"/>
-              </a:spcAft>
-            </a:pPr>
-            <a:r>
-              <a:rPr lang="en-US" b="1" dirty="0"/>
-              <a:t>講者提醒（不念出來）：</a:t>
-            </a:r>
-          </a:p>
-          <a:p>
-            <a:pPr>
-              <a:spcAft>
-                <a:spcPts val="600"/>
-              </a:spcAft>
-            </a:pPr>
-            <a:r>
-              <a:rPr lang="en-US" dirty="0"/>
-              <a:t>- TO CONFIRM BEFORE PRESENTING: Ch. 89 prints melphalan 140 mg/kg/day; standard BEAM is 140 mg/m². Confirm against the printed book or another BEAM source.</a:t>
-            </a:r>
+              <a:t>[1:30 本頁 · 4:30 至 6:00]¶Auto 的幹細胞來源首選 mobilized peripheral blood。Conditioning 沒有 randomized 比較，但 BEAM 是首選。BCNU 300 mg/m² 在 day −6 給一次，etoposide 200 mg/m² 和 cytarabine 200 mg/m² 一天兩次，都從 day −5 給到 −2，melphalan 140 在 day −1。北美常用 CBV。TBI-based regimen 不建議，因為第二癌風險較高。¶Melphalan 的單位，書上印的是 140 mg/kg，這顯然是 mg/m² 的筆誤，上課前會再確認。¶Caption 是 BEAM 的晚期毒性。肺部的 chronic interstitial fibrosis 和 DLCO 下降 21%，第二腫瘤 20%。NRM 最常見的原因就是第二癌，風險是一般人的 12 倍，追蹤門診要記得篩檢。¶BEAM 四個藥的順序和天數容易出配對題。BCNU 只給一次而且最早給，melphalan 也只給一次、放在最後一天，中間四天是 etoposide 和 cytarabine。肺部是 BEAM 最常見的晚期問題之一，追蹤時有咳嗽、喘或 DLCO 下降，要想到 chronic interstitial fibrosis。¶第二腫瘤加上 metabolic syndrome 和心血管問題，代表 auto 後的長期追蹤不只是看復發。¶講者提醒（不念出來）：¶- TO CONFIRM BEFORE PRESENTING: Ch. 89 prints melphalan 140 mg/kg/day; standard BEAM is 140 mg/m². Confirm against the printed book or another BEAM source.</a:t>
+            </a:r>
+            <a:endParaRPr lang="en-US" dirty="0"/>
           </a:p>
         </p:txBody>
       </p:sp>
@@ -3737,70 +2794,11 @@
           <a:bodyPr/>
           <a:lstStyle/>
           <a:p>
-            <a:pPr>
-              <a:spcAft>
-                <a:spcPts val="600"/>
-              </a:spcAft>
-            </a:pPr>
-            <a:r>
-              <a:rPr lang="en-US" b="1" dirty="0"/>
-              <a:t>[1:30 本頁 · 6:00 至 7:30]</a:t>
-            </a:r>
-          </a:p>
-          <a:p>
-            <a:pPr>
-              <a:spcAft>
-                <a:spcPts val="600"/>
-              </a:spcAft>
-            </a:pPr>
             <a:r>
               <a:rPr lang="en-US" dirty="0"/>
-              <a:t>Auto 之後會不會復發，第 89 章列了一串一致的不良預後因子：primary induction failure、第一次緩解短於 3 個月、第一線後 12 個月內復發、extranodal disease、B symptoms、復發時 advanced stage、salvage 抗藥，以及移植時仍有病灶。</a:t>
-            </a:r>
-          </a:p>
-          <a:p>
-            <a:pPr>
-              <a:spcAft>
-                <a:spcPts val="600"/>
-              </a:spcAft>
-            </a:pPr>
-            <a:r>
-              <a:rPr lang="en-US" dirty="0"/>
-              <a:t>有這些因子的病人，auto 之後給 brentuximab vedotin consolidation。依據是 phase III 的 AETHERA，329 位 relapsed 或 refractory 病人，auto 後隨機分到最多 16 個 cycle 的 BV 或 placebo。中位 PFS 43 個月對 24 個月，P 值 0.0013，risk factor 越多，受益越明顯。</a:t>
-            </a:r>
-          </a:p>
-          <a:p>
-            <a:pPr>
-              <a:spcAft>
-                <a:spcPts val="600"/>
-              </a:spcAft>
-            </a:pPr>
-            <a:r>
-              <a:rPr lang="en-US" dirty="0"/>
-              <a:t>BV 目前是唯一核准用在 post-auto consolidation 的藥，16 個 cycle 這個數字常出現在選項裡。</a:t>
-            </a:r>
-          </a:p>
-          <a:p>
-            <a:pPr>
-              <a:spcAft>
-                <a:spcPts val="600"/>
-              </a:spcAft>
-            </a:pPr>
-            <a:r>
-              <a:rPr lang="en-US" dirty="0"/>
-              <a:t>考題常常給一位第一線後 12 個月內就復發、或移植時仍有病灶的病人，問 auto 之後該做什麼，答案通常就是 BV consolidation。也要注意 AETHERA 的結果是 PFS，書上並沒有寫 OS 的差異。</a:t>
-            </a:r>
-          </a:p>
-          <a:p>
-            <a:pPr>
-              <a:spcAft>
-                <a:spcPts val="600"/>
-              </a:spcAft>
-            </a:pPr>
-            <a:r>
-              <a:rPr lang="en-US" dirty="0"/>
-              <a:t>第一線的角色也在改變。Echelon-1 用 BV 取代 ABVD 裡的 bleomycin，晚期 HL 的 OS 改善，可以預期之後走到移植時已經用過 BV 的病人會越來越多。</a:t>
-            </a:r>
+              <a:t>[1:30 本頁 · 6:00 至 7:30]¶Auto 之後會不會復發，第 89 章列了一串一致的不良預後因子：primary induction failure、第一次緩解短於 3 個月、第一線後 12 個月內復發、extranodal disease、B symptoms、復發時 advanced stage、salvage 抗藥，以及移植時仍有病灶。¶有這些因子的病人，auto 之後給 brentuximab vedotin consolidation。依據是 phase III 的 AETHERA，329 位 relapsed 或 refractory 病人，auto 後隨機分到最多 16 個 cycle 的 BV 或 placebo。中位 PFS 43 個月對 24 個月，P 值 0.0013，risk factor 越多，受益越明顯。¶BV 目前是唯一核准用在 post-auto consolidation 的藥，16 個 cycle 這個數字常出現在選項裡。¶考題常常給一位第一線後 12 個月內就復發、或移植時仍有病灶的病人，問 auto 之後該做什麼，答案通常就是 BV consolidation。也要注意 AETHERA 的結果是 PFS，書上並沒有寫 OS 的差異。¶第一線的角色也在改變。Echelon-1 用 BV 取代 ABVD 裡的 bleomycin，晚期 HL 的 OS 改善，可以預期之後走到移植時已經用過 BV 的病人會越來越多。</a:t>
+            </a:r>
+            <a:endParaRPr lang="en-US" dirty="0"/>
           </a:p>
         </p:txBody>
       </p:sp>
@@ -3884,70 +2882,11 @@
           <a:bodyPr/>
           <a:lstStyle/>
           <a:p>
-            <a:pPr>
-              <a:spcAft>
-                <a:spcPts val="600"/>
-              </a:spcAft>
-            </a:pPr>
-            <a:r>
-              <a:rPr lang="en-US" b="1" dirty="0"/>
-              <a:t>[1:30 本頁 · 7:30 至 9:00]</a:t>
-            </a:r>
-          </a:p>
-          <a:p>
-            <a:pPr>
-              <a:spcAft>
-                <a:spcPts val="600"/>
-              </a:spcAft>
-            </a:pPr>
             <a:r>
               <a:rPr lang="en-US" dirty="0"/>
-              <a:t>這是作者建議的演算法，簡化自 89.11 節的圖。Auto 之後復發，先問有沒有用過 BV，或是否對 BV 抗藥。沒用過就先給 BV；用過或沒有反應，就換 nivolumab、pembrolizumab 或臨床試驗。有反應的人可以觀察，或在年輕、體能好、有合適 donor 時考慮 allo。兩條路都沒反應，才回到傳統 salvage。</a:t>
-            </a:r>
-          </a:p>
-          <a:p>
-            <a:pPr>
-              <a:spcAft>
-                <a:spcPts val="600"/>
-              </a:spcAft>
-            </a:pPr>
-            <a:r>
-              <a:rPr lang="en-US" dirty="0"/>
-              <a:t>預後的改善很明顯。EBMT 分析 1781 位 auto 後復發的成人，四年 OS 從 2006 到 2008 年的 32%，進步到 2015 到 2017 年的 63%。距離 auto 越久才復發越好；年紀大、體能差、bulky、extranodal 和 B symptoms 則較差。</a:t>
-            </a:r>
-          </a:p>
-          <a:p>
-            <a:pPr>
-              <a:spcAft>
-                <a:spcPts val="600"/>
-              </a:spcAft>
-            </a:pPr>
-            <a:r>
-              <a:rPr lang="en-US" dirty="0"/>
-              <a:t>表上沒寫的數字放在 backup。Auto 後用 BV 的 ORR 75%，nivolumab 和 pembrolizumab 都是 69%。</a:t>
-            </a:r>
-          </a:p>
-          <a:p>
-            <a:pPr>
-              <a:spcAft>
-                <a:spcPts val="600"/>
-              </a:spcAft>
-            </a:pPr>
-            <a:r>
-              <a:rPr lang="en-US" dirty="0"/>
-              <a:t>書上把 allo 的條件寫得很具體，年輕、體能好、疾病有反應，而且有合適的 donor。四個條件少一個，觀察或繼續新藥都是可以接受的選擇，這就是原圖上灰色箭頭的意思，要和病人仔細討論利弊。</a:t>
-            </a:r>
-          </a:p>
-          <a:p>
-            <a:pPr>
-              <a:spcAft>
-                <a:spcPts val="600"/>
-              </a:spcAft>
-            </a:pPr>
-            <a:r>
-              <a:rPr lang="en-US" dirty="0"/>
-              <a:t>Backup 裡還有 bendamustine、gemcitabine-based 化療和 CAR-T 等選擇，反應率差異很大。</a:t>
-            </a:r>
+              <a:t>[1:30 本頁 · 7:30 至 9:00]¶這是作者建議的演算法，簡化自 89.11 節的圖。Auto 之後復發，先問有沒有用過 BV，或是否對 BV 抗藥。沒用過就先給 BV；用過或沒有反應，就換 nivolumab、pembrolizumab 或臨床試驗。有反應的人可以觀察，或在年輕、體能好、有合適 donor 時考慮 allo。兩條路都沒反應，才回到傳統 salvage。¶預後的改善很明顯。EBMT 分析 1781 位 auto 後復發的成人，四年 OS 從 2006 到 2008 年的 32%，進步到 2015 到 2017 年的 63%。距離 auto 越久才復發越好；年紀大、體能差、bulky、extranodal 和 B symptoms 則較差。¶表上沒寫的數字放在 backup。Auto 後用 BV 的 ORR 75%，nivolumab 和 pembrolizumab 都是 69%。¶書上把 allo 的條件寫得很具體，年輕、體能好、疾病有反應，而且有合適的 donor。四個條件少一個，觀察或繼續新藥都是可以接受的選擇，這就是原圖上灰色箭頭的意思，要和病人仔細討論利弊。¶Backup 裡還有 bendamustine、gemcitabine-based 化療和 CAR-T 等選擇，反應率差異很大。</a:t>
+            </a:r>
+            <a:endParaRPr lang="en-US" dirty="0"/>
           </a:p>
         </p:txBody>
       </p:sp>
@@ -4031,59 +2970,11 @@
           <a:bodyPr/>
           <a:lstStyle/>
           <a:p>
-            <a:pPr>
-              <a:spcAft>
-                <a:spcPts val="600"/>
-              </a:spcAft>
-            </a:pPr>
-            <a:r>
-              <a:rPr lang="en-US" b="1" dirty="0"/>
-              <a:t>[1:30 本頁 · 9:00 至 10:30]</a:t>
-            </a:r>
-          </a:p>
-          <a:p>
-            <a:pPr>
-              <a:spcAft>
-                <a:spcPts val="600"/>
-              </a:spcAft>
-            </a:pPr>
             <a:r>
               <a:rPr lang="en-US" dirty="0"/>
-              <a:t>Allo 仍被視為 auto 後復發或進展的 cHL 唯一的治癒選擇。證據主要是 registry 分析、小型 phase II，以及 donor-versus-no-donor 的比較，PFS 和 OS 都有好處。</a:t>
-            </a:r>
-          </a:p>
-          <a:p>
-            <a:pPr>
-              <a:spcAft>
-                <a:spcPts val="600"/>
-              </a:spcAft>
-            </a:pPr>
-            <a:r>
-              <a:rPr lang="en-US" dirty="0"/>
-              <a:t>Table 89.5 的重點在第三列。Chemosensitive relapse 而且做過 auto，不論 MSD、MUD 或 alternative donor，都是 standard，evidence level II。Alternative donor 指 mismatched unrelated、haplo 和 cord blood。CR1 一律 generally not recommended；沒做過 auto 的 sensitive relapse 只是 developmental，alternative donor 甚至不建議。</a:t>
-            </a:r>
-          </a:p>
-          <a:p>
-            <a:pPr>
-              <a:spcAft>
-                <a:spcPts val="600"/>
-              </a:spcAft>
-            </a:pPr>
-            <a:r>
-              <a:rPr lang="en-US" dirty="0"/>
-              <a:t>移植前的 disease status 是最重要的預後因子，chemosensitive 的三年 OS 60 到 70%，refractory 只剩 40 到 50%。不過 PET-negative CR 對 allo 的意義，不像 auto 那麼明確。</a:t>
-            </a:r>
-          </a:p>
-          <a:p>
-            <a:pPr>
-              <a:spcAft>
-                <a:spcPts val="600"/>
-              </a:spcAft>
-            </a:pPr>
-            <a:r>
-              <a:rPr lang="en-US" dirty="0"/>
-              <a:t>另外，refractory 那一列寫的是 developmental，不是 not recommended。意思是可以在臨床試驗或有經驗的中心做，但三年 PFS 只有 20 到 30%，NRM 也升到 20 到 30%。題目若描述一位對所有 salvage 都沒反應的病人，直接選 allo 通常不是最好的答案，先想辦法讓疾病有反應。</a:t>
-            </a:r>
+              <a:t>[1:30 本頁 · 9:00 至 10:30]¶Allo 仍被視為 auto 後復發或進展的 cHL 唯一的治癒選擇。證據主要是 registry 分析、小型 phase II，以及 donor-versus-no-donor 的比較，PFS 和 OS 都有好處。¶Table 89.5 的重點在第三列。Chemosensitive relapse 而且做過 auto，不論 MSD、MUD 或 alternative donor，都是 standard，evidence level II。Alternative donor 指 mismatched unrelated、haplo 和 cord blood。CR1 一律 generally not recommended；沒做過 auto 的 sensitive relapse 只是 developmental，alternative donor 甚至不建議。¶移植前的 disease status 是最重要的預後因子，chemosensitive 的三年 OS 60 到 70%，refractory 只剩 40 到 50%。不過 PET-negative CR 對 allo 的意義，不像 auto 那麼明確。¶另外，refractory 那一列寫的是 developmental，不是 not recommended。意思是可以在臨床試驗或有經驗的中心做，但三年 PFS 只有 20 到 30%，NRM 也升到 20 到 30%。題目若描述一位對所有 salvage 都沒反應的病人，直接選 allo 通常不是最好的答案，先想辦法讓疾病有反應。</a:t>
+            </a:r>
+            <a:endParaRPr lang="en-US" dirty="0"/>
           </a:p>
         </p:txBody>
       </p:sp>
@@ -4167,59 +3058,11 @@
           <a:bodyPr/>
           <a:lstStyle/>
           <a:p>
-            <a:pPr>
-              <a:spcAft>
-                <a:spcPts val="600"/>
-              </a:spcAft>
-            </a:pPr>
-            <a:r>
-              <a:rPr lang="en-US" b="1" dirty="0"/>
-              <a:t>[1:30 本頁 · 10:30 至 12:00]</a:t>
-            </a:r>
-          </a:p>
-          <a:p>
-            <a:pPr>
-              <a:spcAft>
-                <a:spcPts val="600"/>
-              </a:spcAft>
-            </a:pPr>
             <a:r>
               <a:rPr lang="en-US" dirty="0"/>
-              <a:t>新藥讓 allo 的時機變得不清楚，近兩年這個適應症的移植數量也在下降。BV 常被當作 bridge，通常給 4 到 6 個 cycle，最後一劑到 day 0 不需要 washout。它不增加移植相關毒性，還可能改善體能和疾病狀態，甚至減少 chronic GVHD。</a:t>
-            </a:r>
-          </a:p>
-          <a:p>
-            <a:pPr>
-              <a:spcAft>
-                <a:spcPts val="600"/>
-              </a:spcAft>
-            </a:pPr>
-            <a:r>
-              <a:rPr lang="en-US" dirty="0"/>
-              <a:t>Checkpoint inhibitor 就不一樣。Nivolumab、pembrolizumab 在移植前效果很好，但可能增加 acute GVHD、SOS/VOD 和 post-transplant hyperacute febrile syndrome。建議停藥至少 6 週再移植，GVHD prophylaxis 用 PTCy。BV 不用 washout、PD-1 要停 6 週，這組對比是典型考題。</a:t>
-            </a:r>
-          </a:p>
-          <a:p>
-            <a:pPr>
-              <a:spcAft>
-                <a:spcPts val="600"/>
-              </a:spcAft>
-            </a:pPr>
-            <a:r>
-              <a:rPr lang="en-US" dirty="0"/>
-              <a:t>右邊是 donor 和 conditioning。PTCy haplo 的結果和 MSD、MUD 相近，GVHD 較少。超過一半用 RIC，NRM 降低但復發增加；含 low-dose TBI 的方案較差。現在 MAC 的 NRM 已大幅下降，可以個別考慮。</a:t>
-            </a:r>
-          </a:p>
-          <a:p>
-            <a:pPr>
-              <a:spcAft>
-                <a:spcPts val="600"/>
-              </a:spcAft>
-            </a:pPr>
-            <a:r>
-              <a:rPr lang="en-US" dirty="0"/>
-              <a:t>病房裡常見的情境是病人用 PD-1 達到很好的反應，大家急著排移植。這時候要先算好停藥的時間，並且提早跟移植團隊確認 PTCy 這個 GVHD prophylaxis 平台。</a:t>
-            </a:r>
+              <a:t>[1:30 本頁 · 10:30 至 12:00]¶新藥讓 allo 的時機變得不清楚，近兩年這個適應症的移植數量也在下降。BV 常被當作 bridge，通常給 4 到 6 個 cycle，最後一劑到 day 0 不需要 washout。它不增加移植相關毒性，還可能改善體能和疾病狀態，甚至減少 chronic GVHD。¶Checkpoint inhibitor 就不一樣。Nivolumab、pembrolizumab 在移植前效果很好，但可能增加 acute GVHD、SOS/VOD 和 post-transplant hyperacute febrile syndrome。建議停藥至少 6 週再移植，GVHD prophylaxis 用 PTCy。BV 不用 washout、PD-1 要停 6 週，這組對比是典型考題。¶右邊是 donor 和 conditioning。PTCy haplo 的結果和 MSD、MUD 相近，GVHD 較少。超過一半用 RIC，NRM 降低但復發增加；含 low-dose TBI 的方案較差。現在 MAC 的 NRM 已大幅下降，可以個別考慮。¶病房裡常見的情境是病人用 PD-1 達到很好的反應，大家急著排移植。這時候要先算好停藥的時間，並且提早跟移植團隊確認 PTCy 這個 GVHD prophylaxis 平台。</a:t>
+            </a:r>
+            <a:endParaRPr lang="en-US" dirty="0"/>
           </a:p>
         </p:txBody>
       </p:sp>
@@ -6905,7 +5748,7 @@
         </p:nvSpPr>
         <p:spPr>
           <a:xfrm>
-            <a:off x="685800" y="5120640"/>
+            <a:off x="685800" y="5257800"/>
             <a:ext cx="10817352" cy="411480"/>
           </a:xfrm>
           <a:prstGeom prst="rect">
@@ -17331,7 +16174,7 @@
         </p:nvSpPr>
         <p:spPr>
           <a:xfrm>
-            <a:off x="685800" y="4846320"/>
+            <a:off x="685800" y="4709160"/>
             <a:ext cx="10817352" cy="411480"/>
           </a:xfrm>
           <a:prstGeom prst="rect">
@@ -18903,7 +17746,7 @@
         </p:nvSpPr>
         <p:spPr>
           <a:xfrm>
-            <a:off x="685800" y="5074920"/>
+            <a:off x="685800" y="5303520"/>
             <a:ext cx="10817352" cy="411480"/>
           </a:xfrm>
           <a:prstGeom prst="rect">
@@ -18971,250 +17814,6 @@
             <a:fld id="{F7021451-1387-4CA6-816F-3879F97B5CBC}" type="slidenum">
               <a:rPr b="0" lang="en-US"/>
               <a:t>3</a:t>
-            </a:fld>
-            <a:endParaRPr lang="en-US"/>
-          </a:p>
-        </p:txBody>
-      </p:sp>
-    </p:spTree>
-  </p:cSld>
-  <p:clrMapOvr>
-    <a:masterClrMapping/>
-  </p:clrMapOvr>
-</p:sld>
-</file>
-
-<file path=ppt/slides/slide30.xml><?xml version="1.0" encoding="utf-8"?>
-<p:sld xmlns:a="http://schemas.openxmlformats.org/drawingml/2006/main" xmlns:r="http://schemas.openxmlformats.org/officeDocument/2006/relationships" xmlns:p="http://schemas.openxmlformats.org/presentationml/2006/main">
-  <p:cSld name="Slide 30">
-    <p:spTree>
-      <p:nvGrpSpPr>
-        <p:cNvPr id="1" name=""/>
-        <p:cNvGrpSpPr/>
-        <p:nvPr/>
-      </p:nvGrpSpPr>
-      <p:grpSpPr>
-        <a:xfrm>
-          <a:off x="0" y="0"/>
-          <a:ext cx="0" cy="0"/>
-          <a:chOff x="0" y="0"/>
-          <a:chExt cx="0" cy="0"/>
-        </a:xfrm>
-      </p:grpSpPr>
-      <p:sp>
-        <p:nvSpPr>
-          <p:cNvPr id="2" name="Text 0"/>
-          <p:cNvSpPr/>
-          <p:nvPr>
-            <p:ph idx="100" type="body" hasCustomPrompt="1"/>
-          </p:nvPr>
-        </p:nvSpPr>
-        <p:spPr>
-          <a:xfrm>
-            <a:off x="685800" y="502920"/>
-            <a:ext cx="10817352" cy="274320"/>
-          </a:xfrm>
-          <a:prstGeom prst="rect">
-            <a:avLst/>
-          </a:prstGeom>
-          <a:noFill/>
-          <a:ln/>
-        </p:spPr>
-        <p:txBody>
-          <a:bodyPr wrap="square" lIns="0" tIns="0" rIns="0" bIns="0" rtlCol="0" anchor="t"/>
-          <a:lstStyle/>
-          <a:p>
-            <a:pPr algn="l" indent="0" marL="0">
-              <a:buNone/>
-            </a:pPr>
-            <a:r>
-              <a:rPr lang="en-US" sz="1100" spc="300" kern="0" dirty="0">
-                <a:solidFill>
-                  <a:schemeClr val="tx1"/>
-                </a:solidFill>
-              </a:rPr>
-              <a:t>BACKUP · CHL · AUTHORS' ALGORITHM</a:t>
-            </a:r>
-            <a:endParaRPr lang="en-US" sz="1100" dirty="0"/>
-          </a:p>
-        </p:txBody>
-      </p:sp>
-      <p:sp>
-        <p:nvSpPr>
-          <p:cNvPr id="3" name="Text 0"/>
-          <p:cNvSpPr/>
-          <p:nvPr>
-            <p:ph idx="101" type="title" hasCustomPrompt="1"/>
-          </p:nvPr>
-        </p:nvSpPr>
-        <p:spPr>
-          <a:xfrm>
-            <a:off x="685800" y="822960"/>
-            <a:ext cx="10817352" cy="1143000"/>
-          </a:xfrm>
-          <a:prstGeom prst="rect">
-            <a:avLst/>
-          </a:prstGeom>
-          <a:noFill/>
-          <a:ln/>
-        </p:spPr>
-        <p:txBody>
-          <a:bodyPr wrap="square" lIns="0" tIns="0" rIns="0" bIns="0" rtlCol="0" anchor="t"/>
-          <a:lstStyle/>
-          <a:p>
-            <a:pPr algn="l" indent="0" marL="0">
-              <a:buNone/>
-            </a:pPr>
-            <a:r>
-              <a:rPr lang="en-US" sz="3600" b="1" dirty="0">
-                <a:solidFill>
-                  <a:schemeClr val="tx1"/>
-                </a:solidFill>
-              </a:rPr>
-              <a:t>The Ch. 89 algorithm runs from salvage to auto, BV and allo-HCT</a:t>
-            </a:r>
-            <a:endParaRPr lang="en-US" sz="3600" dirty="0"/>
-          </a:p>
-        </p:txBody>
-      </p:sp>
-      <p:sp>
-        <p:nvSpPr>
-          <p:cNvPr id="4" name="Text 0"/>
-          <p:cNvSpPr/>
-          <p:nvPr>
-            <p:ph idx="102" type="body" hasCustomPrompt="1"/>
-          </p:nvPr>
-        </p:nvSpPr>
-        <p:spPr>
-          <a:xfrm>
-            <a:off x="685800" y="6080760"/>
-            <a:ext cx="9966960" cy="457200"/>
-          </a:xfrm>
-          <a:prstGeom prst="rect">
-            <a:avLst/>
-          </a:prstGeom>
-          <a:noFill/>
-          <a:ln/>
-        </p:spPr>
-        <p:txBody>
-          <a:bodyPr wrap="square" lIns="0" tIns="0" rIns="0" bIns="0" rtlCol="0" anchor="t"/>
-          <a:lstStyle/>
-          <a:p>
-            <a:pPr algn="l" indent="0" marL="0">
-              <a:buNone/>
-            </a:pPr>
-            <a:r>
-              <a:rPr lang="en-US" sz="1000" dirty="0">
-                <a:solidFill>
-                  <a:schemeClr val="tx1"/>
-                </a:solidFill>
-              </a:rPr>
-              <a:t>Martínez C, et al. EBMT Handbook 8th ed. 2024; Ch. 89 (Sect. 89.11, modified from Jethava et al.)</a:t>
-            </a:r>
-            <a:endParaRPr lang="en-US" sz="1000" dirty="0"/>
-          </a:p>
-        </p:txBody>
-      </p:sp>
-      <p:pic>
-        <p:nvPicPr>
-          <p:cNvPr id="6" name="Figure ch89-figa" descr="Flowchart: primary refractory or first-relapse cHL, second- or third-line chemotherapy, auto-HCT with BV consolidation if high risk; at relapse, BV if BV-naive, otherwise nivolumab, pembrolizumab or trial; responders observe or consider allo-HCT; non-responders receive conventional salvage then consider allo-HCT.">    </p:cNvPr>
-          <p:cNvPicPr>
-            <a:picLocks noChangeAspect="1"/>
-          </p:cNvPicPr>
-          <p:nvPr/>
-        </p:nvPicPr>
-        <p:blipFill>
-          <a:blip r:embed="rId1"/>
-          <a:stretch>
-            <a:fillRect/>
-          </a:stretch>
-        </p:blipFill>
-        <p:spPr>
-          <a:xfrm>
-            <a:off x="685800" y="2148840"/>
-            <a:ext cx="2731724" cy="3749040"/>
-          </a:xfrm>
-          <a:prstGeom prst="rect">
-            <a:avLst/>
-          </a:prstGeom>
-        </p:spPr>
-      </p:pic>
-      <p:sp>
-        <p:nvSpPr>
-          <p:cNvPr id="7" name="Text 100"/>
-          <p:cNvSpPr txBox="1"/>
-          <p:nvPr/>
-        </p:nvSpPr>
-        <p:spPr>
-          <a:xfrm>
-            <a:off x="7825252" y="2240280"/>
-            <a:ext cx="3677900" cy="3657600"/>
-          </a:xfrm>
-          <a:prstGeom prst="rect">
-            <a:avLst/>
-          </a:prstGeom>
-          <a:noFill/>
-          <a:ln/>
-        </p:spPr>
-        <p:txBody>
-          <a:bodyPr wrap="square" lIns="0" tIns="0" rIns="0" bIns="0" rtlCol="0" anchor="t"/>
-          <a:lstStyle/>
-          <a:p>
-            <a:pPr indent="0" marL="0">
-              <a:buNone/>
-            </a:pPr>
-            <a:r>
-              <a:rPr lang="en-US" sz="1600" dirty="0">
-                <a:solidFill>
-                  <a:schemeClr val="tx1"/>
-                </a:solidFill>
-              </a:rPr>
-              <a:t>PCT, prospective clinical trial. Allo-HCT in young, fit patients with responding disease and a donor. Grey arrows: either option acceptable after weighing patient and transplant risks.</a:t>
-            </a:r>
-            <a:endParaRPr lang="en-US" sz="1600" dirty="0"/>
-          </a:p>
-        </p:txBody>
-      </p:sp>
-      <p:sp>
-        <p:nvSpPr>
-          <p:cNvPr id="25" name="Slide Number Placeholder 0"/>
-          <p:cNvSpPr>
-            <a:spLocks noGrp="1"/>
-          </p:cNvSpPr>
-          <p:nvPr>
-            <p:ph type="sldNum" sz="quarter" idx="4294967295"/>
-          </p:nvPr>
-        </p:nvSpPr>
-        <p:spPr>
-          <a:xfrm>
-            <a:off x="10972800" y="6080760"/>
-            <a:ext cx="530352" cy="274320"/>
-          </a:xfrm>
-          <a:prstGeom prst="rect">
-            <a:avLst/>
-          </a:prstGeom>
-          <a:extLst>
-            <a:ext uri="{C572A759-6A51-4108-AA02-DFA0A04FC94B}">
-              <ma14:wrappingTextBoxFlag xmlns:ma14="http://schemas.microsoft.com/office/mac/drawingml/2011/main" val="0"/>
-            </a:ext>
-          </a:extLst>
-        </p:spPr>
-        <p:txBody>
-          <a:bodyPr/>
-          <a:lstStyle>
-            <a:lvl1pPr>
-              <a:defRPr sz="1000">
-                <a:solidFill>
-                  <a:schemeClr val="tx1"/>
-                </a:solidFill>
-              </a:defRPr>
-            </a:lvl1pPr>
-          </a:lstStyle>
-          <a:p>
-            <a:pPr algn="r"/>
-            <a:fld id="{F7021451-1387-4CA6-816F-3879F97B5CBC}" type="slidenum">
-              <a:rPr b="0" lang="en-US"/>
-              <a:t>30</a:t>
             </a:fld>
             <a:endParaRPr lang="en-US"/>
           </a:p>
@@ -20656,7 +19255,7 @@
         </p:nvSpPr>
         <p:spPr>
           <a:xfrm>
-            <a:off x="685800" y="5120640"/>
+            <a:off x="685800" y="4754880"/>
             <a:ext cx="10817352" cy="411480"/>
           </a:xfrm>
           <a:prstGeom prst="rect">
@@ -24129,7 +22728,7 @@
                   <a:schemeClr val="tx1"/>
                 </a:solidFill>
               </a:rPr>
-              <a:t>3-y results: chemosensitive NRM 15–20%, OS 60–70%, PFS 40–50%; refractory NRM 20–30%, OS 40–50%, PFS 20–30%.</a:t>
+              <a:t>3-y OS 60–70% if chemosensitive vs 40–50% if refractory; NRM 15–20% vs 20–30%.</a:t>
             </a:r>
             <a:endParaRPr lang="en-US" sz="1600" dirty="0"/>
           </a:p>
@@ -24509,7 +23108,7 @@
                   <a:schemeClr val="tx1"/>
                 </a:solidFill>
               </a:rPr>
-              <a:t>PB preferred. Haplo PTCy ≈ MSD/MUD with less GVHD. &gt; 50% get RIC: less NRM, more relapse.</a:t>
+              <a:t>PB preferred. Haplo PTCy ≈ MSD/MUD with less GVHD. Over half get RIC: less NRM, more relapse.</a:t>
             </a:r>
             <a:endParaRPr lang="en-US" sz="1800" dirty="0"/>
           </a:p>

--- a/slides/decks/s29-hodgkin-indolent-cll.pptx
+++ b/slides/decks/s29-hodgkin-indolent-cll.pptx
@@ -594,11 +594,26 @@
           <a:bodyPr/>
           <a:lstStyle/>
           <a:p>
+            <a:pPr>
+              <a:spcAft>
+                <a:spcPts val="600"/>
+              </a:spcAft>
+            </a:pPr>
+            <a:r>
+              <a:rPr lang="en-US" b="1" dirty="0"/>
+              <a:t>[0:30 本頁 · 0:00 至 0:30]</a:t>
+            </a:r>
+          </a:p>
+          <a:p>
+            <a:pPr>
+              <a:spcAft>
+                <a:spcPts val="600"/>
+              </a:spcAft>
+            </a:pPr>
             <a:r>
               <a:rPr lang="en-US" dirty="0"/>
-              <a:t>[0:30 本頁 · 0:00 至 0:30]¶各位好，今天是第 29 堂，主題是 Hodgkin lymphoma、indolent lymphoma 和 CLL 的移植，對應 EBMT Handbook 第 89、84、85 章。這三個病的病程都很長，新藥也多，移植的位置一直在被重新定義。今天每個疾病都回答同一組問題，什麼時候做 auto、什麼時候做 allo、什麼時候先用藥，最後一樣用三題 board-style 題目收尾。</a:t>
-            </a:r>
-            <a:endParaRPr lang="en-US" dirty="0"/>
+              <a:t>各位好，今天是第 29 堂，主題是 Hodgkin lymphoma、indolent lymphoma 和 CLL 的移植，對應 EBMT Handbook 第 89、84、85 章。這三個病的病程都很長，新藥也多，移植的位置一直在被重新定義。今天每個疾病都回答同一組問題，什麼時候做 auto、什麼時候做 allo、什麼時候先用藥，最後一樣用三題 board-style 題目收尾。</a:t>
+            </a:r>
           </a:p>
         </p:txBody>
       </p:sp>
@@ -682,11 +697,59 @@
           <a:bodyPr/>
           <a:lstStyle/>
           <a:p>
+            <a:pPr>
+              <a:spcAft>
+                <a:spcPts val="600"/>
+              </a:spcAft>
+            </a:pPr>
+            <a:r>
+              <a:rPr lang="en-US" b="1" dirty="0"/>
+              <a:t>[1:30 本頁 · 12:00 至 13:30]</a:t>
+            </a:r>
+          </a:p>
+          <a:p>
+            <a:pPr>
+              <a:spcAft>
+                <a:spcPts val="600"/>
+              </a:spcAft>
+            </a:pPr>
             <a:r>
               <a:rPr lang="en-US" dirty="0"/>
-              <a:t>[1:30 本頁 · 12:00 至 13:30]¶Indolent lymphoma 佔所有淋巴瘤的三分之一，包括 follicular、marginal zone 和 lymphoplasmacytic，最常見的是 follicular。最大型的 HCT 研究以 FL 為主，所以結論以 FL 來講，再外推到其他亞型。特色是反覆復發，而 auto 和 allo 是復發後唯一有治癒可能的選擇。¶第一線是 chemoimmunotherapy，之後用 rituximab 或 obinutuzumab maintenance，first line 沒有任何移植的位置。值得考慮 HCT 的只有三種人，第一線後兩年內復發，也就是 POD24，high-grade transformation，以及多次復發。¶前提是 reinduction 有反應。多數歐洲專家把 auto 當第一次移植，allo 留給 auto 後復發的人。CAR-T 和 bispecific antibody 的角色還在試驗中釐清。¶診斷要靠手術或 excisional biopsy，分期和評估反應最好用 PET，不然用 CT。最常用的預後分數是 FLIPI，復發時 FLIPI 高的人同樣可以考慮移植。現在非移植的選擇很多，所以建議移植前，一定要把移植和非移植的選項都跟病人說清楚。</a:t>
-            </a:r>
-            <a:endParaRPr lang="en-US" dirty="0"/>
+              <a:t>Indolent lymphoma 佔所有淋巴瘤的三分之一，包括 follicular、marginal zone 和 lymphoplasmacytic，最常見的是 follicular。最大型的 HCT 研究以 FL 為主，所以結論以 FL 來講，再外推到其他亞型。特色是反覆復發，而 auto 和 allo 是復發後唯一有治癒可能的選擇。</a:t>
+            </a:r>
+          </a:p>
+          <a:p>
+            <a:pPr>
+              <a:spcAft>
+                <a:spcPts val="600"/>
+              </a:spcAft>
+            </a:pPr>
+            <a:r>
+              <a:rPr lang="en-US" dirty="0"/>
+              <a:t>第一線是 chemoimmunotherapy，之後用 rituximab 或 obinutuzumab maintenance，first line 沒有任何移植的位置。值得考慮 HCT 的只有三種人，第一線後兩年內復發，也就是 POD24，high-grade transformation，以及多次復發。</a:t>
+            </a:r>
+          </a:p>
+          <a:p>
+            <a:pPr>
+              <a:spcAft>
+                <a:spcPts val="600"/>
+              </a:spcAft>
+            </a:pPr>
+            <a:r>
+              <a:rPr lang="en-US" dirty="0"/>
+              <a:t>前提是 reinduction 有反應。多數歐洲專家把 auto 當第一次移植，allo 留給 auto 後復發的人。CAR-T 和 bispecific antibody 的角色還在試驗中釐清。</a:t>
+            </a:r>
+          </a:p>
+          <a:p>
+            <a:pPr>
+              <a:spcAft>
+                <a:spcPts val="600"/>
+              </a:spcAft>
+            </a:pPr>
+            <a:r>
+              <a:rPr lang="en-US" dirty="0"/>
+              <a:t>診斷要靠手術或 excisional biopsy，分期和評估反應最好用 PET，不然用 CT。最常用的預後分數是 FLIPI，復發時 FLIPI 高的人同樣可以考慮移植。現在非移植的選擇很多，所以建議移植前，一定要把移植和非移植的選項都跟病人說清楚。</a:t>
+            </a:r>
           </a:p>
         </p:txBody>
       </p:sp>
@@ -770,11 +833,59 @@
           <a:bodyPr/>
           <a:lstStyle/>
           <a:p>
+            <a:pPr>
+              <a:spcAft>
+                <a:spcPts val="600"/>
+              </a:spcAft>
+            </a:pPr>
+            <a:r>
+              <a:rPr lang="en-US" b="1" dirty="0"/>
+              <a:t>[1:30 本頁 · 13:30 至 15:00]</a:t>
+            </a:r>
+          </a:p>
+          <a:p>
+            <a:pPr>
+              <a:spcAft>
+                <a:spcPts val="600"/>
+              </a:spcAft>
+            </a:pPr>
             <a:r>
               <a:rPr lang="en-US" dirty="0"/>
-              <a:t>[1:30 本頁 · 13:30 至 15:00]¶Auto 的適應症很單純，復發後對第二線或之後的 reinduction 有反應。CUP trial 是唯一的 randomized study，140 位 relapsed FL，比較單純化療和 auto。兩年 PFS 化療組 26%，移植組 purged 58%、unpurged 55%，OS 也較好。長期追蹤十年 PFS 31 到 50%，所以 auto 對一部分病人可能是治癒性的。¶EBMT-LYM-1 在沒用過 rituximab 的病人顯示，移植前用 rituximab 做 in vivo purging 沒有好處，但移植後 rituximab maintenance 延長 PFS。只是現在的病人幾乎都用過 rituximab，能否外推並不清楚。¶毒性要算進去。60 歲以上的 TRM 可能超過 10%，而 relapsed FL 的中位年齡是 69 歲。GOELAMS 用 TBI conditioning，第二癌和 MDS/AML 明顯增加，因此可以先查骨髓的 clonal hematopoiesis 和染色體。¶Conditioning 方面，BEAM 最常用，也有人把 BCNU 換成 bendamustine，效果可能相近、毒性較低。年紀大，或骨髓有 clonal hematopoiesis、染色體異常的人，第二癌風險較高，也許其他復發治療更適合。</a:t>
-            </a:r>
-            <a:endParaRPr lang="en-US" dirty="0"/>
+              <a:t>Auto 的適應症很單純，復發後對第二線或之後的 reinduction 有反應。CUP trial 是唯一的 randomized study，140 位 relapsed FL，比較單純化療和 auto。兩年 PFS 化療組 26%，移植組 purged 58%、unpurged 55%，OS 也較好。長期追蹤十年 PFS 31 到 50%，所以 auto 對一部分病人可能是治癒性的。</a:t>
+            </a:r>
+          </a:p>
+          <a:p>
+            <a:pPr>
+              <a:spcAft>
+                <a:spcPts val="600"/>
+              </a:spcAft>
+            </a:pPr>
+            <a:r>
+              <a:rPr lang="en-US" dirty="0"/>
+              <a:t>EBMT-LYM-1 在沒用過 rituximab 的病人顯示，移植前用 rituximab 做 in vivo purging 沒有好處，但移植後 rituximab maintenance 延長 PFS。只是現在的病人幾乎都用過 rituximab，能否外推並不清楚。</a:t>
+            </a:r>
+          </a:p>
+          <a:p>
+            <a:pPr>
+              <a:spcAft>
+                <a:spcPts val="600"/>
+              </a:spcAft>
+            </a:pPr>
+            <a:r>
+              <a:rPr lang="en-US" dirty="0"/>
+              <a:t>毒性要算進去。60 歲以上的 TRM 可能超過 10%，而 relapsed FL 的中位年齡是 69 歲。GOELAMS 用 TBI conditioning，第二癌和 MDS/AML 明顯增加，因此可以先查骨髓的 clonal hematopoiesis 和染色體。</a:t>
+            </a:r>
+          </a:p>
+          <a:p>
+            <a:pPr>
+              <a:spcAft>
+                <a:spcPts val="600"/>
+              </a:spcAft>
+            </a:pPr>
+            <a:r>
+              <a:rPr lang="en-US" dirty="0"/>
+              <a:t>Conditioning 方面，BEAM 最常用，也有人把 BCNU 換成 bendamustine，效果可能相近、毒性較低。年紀大，或骨髓有 clonal hematopoiesis、染色體異常的人，第二癌風險較高，也許其他復發治療更適合。</a:t>
+            </a:r>
           </a:p>
         </p:txBody>
       </p:sp>
@@ -858,11 +969,59 @@
           <a:bodyPr/>
           <a:lstStyle/>
           <a:p>
+            <a:pPr>
+              <a:spcAft>
+                <a:spcPts val="600"/>
+              </a:spcAft>
+            </a:pPr>
+            <a:r>
+              <a:rPr lang="en-US" b="1" dirty="0"/>
+              <a:t>[1:30 本頁 · 15:00 至 16:30]</a:t>
+            </a:r>
+          </a:p>
+          <a:p>
+            <a:pPr>
+              <a:spcAft>
+                <a:spcPts val="600"/>
+              </a:spcAft>
+            </a:pPr>
             <a:r>
               <a:rPr lang="en-US" dirty="0"/>
-              <a:t>[1:30 本頁 · 15:00 至 16:30]¶這是 EBMT 最新的兩個大系列。Auto 一年 TRM 只有 3%，五年復發 47%。Allo 五年 TRM 19%，復發降到 29%。結果 OS 是 auto 較高，72% 比 61%，PFS 則接近。Allo 的 GVL 效果確實存在，只是被 TRM 抵銷掉了。¶Allo 的好處在於 graft 沒有淋巴瘤細胞污染、也沒接觸過 mutagenic agent，再加上 GVL。最大型的 auto 失敗後 RIC allo 系列來自 EBMT，兩年 NRM 27%，五年 PFS 48%、OS 51%，而且 allo 後的緩解期明顯比 auto 後長。¶所以 auto 毒性較低、可能治癒一部分人，被當作第一次移植；RIC allo 是 auto 後復發的治癒選項。也有 EBMT 中心在特定病人直接以 allo 作為第一次移植。¶看這張表要注意兩邊 TRM 的時間點不一樣，auto 是一年、allo 是五年，不能直接相減。早期的 retrospective 比較也一樣，MAC allo 復發較低、TRM 較高，OS 和 auto 相近，所以後來才發展出 RIC，讓年紀大、共病多或做過 auto 的病人也能接受 allo。</a:t>
-            </a:r>
-            <a:endParaRPr lang="en-US" dirty="0"/>
+              <a:t>這是 EBMT 最新的兩個大系列。Auto 一年 TRM 只有 3%，五年復發 47%。Allo 五年 TRM 19%，復發降到 29%。結果 OS 是 auto 較高，72% 比 61%，PFS 則接近。Allo 的 GVL 效果確實存在，只是被 TRM 抵銷掉了。</a:t>
+            </a:r>
+          </a:p>
+          <a:p>
+            <a:pPr>
+              <a:spcAft>
+                <a:spcPts val="600"/>
+              </a:spcAft>
+            </a:pPr>
+            <a:r>
+              <a:rPr lang="en-US" dirty="0"/>
+              <a:t>Allo 的好處在於 graft 沒有淋巴瘤細胞污染、也沒接觸過 mutagenic agent，再加上 GVL。最大型的 auto 失敗後 RIC allo 系列來自 EBMT，兩年 NRM 27%，五年 PFS 48%、OS 51%，而且 allo 後的緩解期明顯比 auto 後長。</a:t>
+            </a:r>
+          </a:p>
+          <a:p>
+            <a:pPr>
+              <a:spcAft>
+                <a:spcPts val="600"/>
+              </a:spcAft>
+            </a:pPr>
+            <a:r>
+              <a:rPr lang="en-US" dirty="0"/>
+              <a:t>所以 auto 毒性較低、可能治癒一部分人，被當作第一次移植；RIC allo 是 auto 後復發的治癒選項。也有 EBMT 中心在特定病人直接以 allo 作為第一次移植。</a:t>
+            </a:r>
+          </a:p>
+          <a:p>
+            <a:pPr>
+              <a:spcAft>
+                <a:spcPts val="600"/>
+              </a:spcAft>
+            </a:pPr>
+            <a:r>
+              <a:rPr lang="en-US" dirty="0"/>
+              <a:t>看這張表要注意兩邊 TRM 的時間點不一樣，auto 是一年、allo 是五年，不能直接相減。早期的 retrospective 比較也一樣，MAC allo 復發較低、TRM 較高，OS 和 auto 相近，所以後來才發展出 RIC，讓年紀大、共病多或做過 auto 的病人也能接受 allo。</a:t>
+            </a:r>
           </a:p>
         </p:txBody>
       </p:sp>
@@ -946,11 +1105,70 @@
           <a:bodyPr/>
           <a:lstStyle/>
           <a:p>
+            <a:pPr>
+              <a:spcAft>
+                <a:spcPts val="600"/>
+              </a:spcAft>
+            </a:pPr>
+            <a:r>
+              <a:rPr lang="en-US" b="1" dirty="0"/>
+              <a:t>[1:30 本頁 · 16:30 至 18:00]</a:t>
+            </a:r>
+          </a:p>
+          <a:p>
+            <a:pPr>
+              <a:spcAft>
+                <a:spcPts val="600"/>
+              </a:spcAft>
+            </a:pPr>
             <a:r>
               <a:rPr lang="en-US" dirty="0"/>
-              <a:t>[1:30 本頁 · 16:30 至 18:00]¶Allo 只考慮給挑選過的復發病人，條件是淋巴瘤明顯會縮短存活。三線治療後復發，尤其 auto 後復發，是合理的適應症。病人端要看年齡、共病、體能、HCT-CI 和病人自己的意願。¶Conditioning 沒有定論。Sibling donor 的 registry 顯示 MAC 和 RIC 三年 OS 71% 對 62%，P 值 0.15，沒有差異；unrelated donor 時，EBMT 的資料是 RIC 的 NRM 較低，PFS 和 OS 都較長。加上中位年齡 69 歲，多數專家建議 RIC。¶MSD 和 MUD 結果相近，沒有的話 haplo 加 PTCy 或 cord blood 都可行。GVHD prophylaxis 沒有偏好；做 T-cell depletion 要搭配 chimerism-directed DLI，四年 PFS 76%。Allo 後不需要 maintenance。¶TCD 和 DLI 要一起看。T-cell depletion 降低 GVHD，但也移除了負責 GVL 的 alloreactive T cell，復發會變多。依 chimerism 補 DLI，等於把 GVL 加回來，所以這個系列四年復發只有 24%，GVHD 也不多。¶沒有 MSD 或 MUD 時，cord blood 和 PTCy haplo 在包括 FL 在內的 NHL 都已有可行性的報告。</a:t>
-            </a:r>
-            <a:endParaRPr lang="en-US" dirty="0"/>
+              <a:t>Allo 只考慮給挑選過的復發病人，條件是淋巴瘤明顯會縮短存活。三線治療後復發，尤其 auto 後復發，是合理的適應症。病人端要看年齡、共病、體能、HCT-CI 和病人自己的意願。</a:t>
+            </a:r>
+          </a:p>
+          <a:p>
+            <a:pPr>
+              <a:spcAft>
+                <a:spcPts val="600"/>
+              </a:spcAft>
+            </a:pPr>
+            <a:r>
+              <a:rPr lang="en-US" dirty="0"/>
+              <a:t>Conditioning 沒有定論。Sibling donor 的 registry 顯示 MAC 和 RIC 三年 OS 71% 對 62%，P 值 0.15，沒有差異；unrelated donor 時，EBMT 的資料是 RIC 的 NRM 較低，PFS 和 OS 都較長。加上中位年齡 69 歲，多數專家建議 RIC。</a:t>
+            </a:r>
+          </a:p>
+          <a:p>
+            <a:pPr>
+              <a:spcAft>
+                <a:spcPts val="600"/>
+              </a:spcAft>
+            </a:pPr>
+            <a:r>
+              <a:rPr lang="en-US" dirty="0"/>
+              <a:t>MSD 和 MUD 結果相近，沒有的話 haplo 加 PTCy 或 cord blood 都可行。GVHD prophylaxis 沒有偏好；做 T-cell depletion 要搭配 chimerism-directed DLI，四年 PFS 76%。Allo 後不需要 maintenance。</a:t>
+            </a:r>
+          </a:p>
+          <a:p>
+            <a:pPr>
+              <a:spcAft>
+                <a:spcPts val="600"/>
+              </a:spcAft>
+            </a:pPr>
+            <a:r>
+              <a:rPr lang="en-US" dirty="0"/>
+              <a:t>TCD 和 DLI 要一起看。T-cell depletion 降低 GVHD，但也移除了負責 GVL 的 alloreactive T cell，復發會變多。依 chimerism 補 DLI，等於把 GVL 加回來，所以這個系列四年復發只有 24%，GVHD 也不多。</a:t>
+            </a:r>
+          </a:p>
+          <a:p>
+            <a:pPr>
+              <a:spcAft>
+                <a:spcPts val="600"/>
+              </a:spcAft>
+            </a:pPr>
+            <a:r>
+              <a:rPr lang="en-US" dirty="0"/>
+              <a:t>沒有 MSD 或 MUD 時，cord blood 和 PTCy haplo 在包括 FL 在內的 NHL 都已有可行性的報告。</a:t>
+            </a:r>
           </a:p>
         </p:txBody>
       </p:sp>
@@ -1034,11 +1252,59 @@
           <a:bodyPr/>
           <a:lstStyle/>
           <a:p>
+            <a:pPr>
+              <a:spcAft>
+                <a:spcPts val="600"/>
+              </a:spcAft>
+            </a:pPr>
+            <a:r>
+              <a:rPr lang="en-US" b="1" dirty="0"/>
+              <a:t>[1:30 本頁 · 18:00 至 19:30]</a:t>
+            </a:r>
+          </a:p>
+          <a:p>
+            <a:pPr>
+              <a:spcAft>
+                <a:spcPts val="600"/>
+              </a:spcAft>
+            </a:pPr>
             <a:r>
               <a:rPr lang="en-US" dirty="0"/>
-              <a:t>[1:30 本頁 · 18:00 至 19:30]¶CLL 通常是 indolent，診斷本身不是治療的理由。開始治療的條件包括症狀、進行性貧血或血小板低下、lymphocyte doubling time 小於 6 個月、全身症狀、巨大脾臟或淋巴結，以及 Richter transformation。第一線是 covalent BTKi，或 venetoclax 加 obinutuzumab，或 ibrutinib 加 venetoclax；後兩者是 12 到 15 個月的 fixed duration。¶第一線失敗就 class switch，BTKi 換 venetoclax，反之亦然。兩類都失敗叫 double refractory，預後很差。TP53 異常或 complex karyotype 的人，一類失敗就要考慮 allo。Richter 病史不論用過什麼藥都是適應症。¶有個陷阱，第一線用 BTKi 加 venetoclax fixed duration，停藥後才失敗，不算 double refractory。書上也建議，只要一類 pathway inhibitor 失敗，就轉介移植中心諮詢。¶Noncovalent BTKi 能不能改善 double refractory 的預後，目前還不清楚。移植時機要和病人個別討論，一邊是移植併發症的風險，一邊是還剩多少藥物選擇，可以用 HCT-CI 或 EBMT risk score 估計 NRM。</a:t>
-            </a:r>
-            <a:endParaRPr lang="en-US" dirty="0"/>
+              <a:t>CLL 通常是 indolent，診斷本身不是治療的理由。開始治療的條件包括症狀、進行性貧血或血小板低下、lymphocyte doubling time 小於 6 個月、全身症狀、巨大脾臟或淋巴結，以及 Richter transformation。第一線是 covalent BTKi，或 venetoclax 加 obinutuzumab，或 ibrutinib 加 venetoclax；後兩者是 12 到 15 個月的 fixed duration。</a:t>
+            </a:r>
+          </a:p>
+          <a:p>
+            <a:pPr>
+              <a:spcAft>
+                <a:spcPts val="600"/>
+              </a:spcAft>
+            </a:pPr>
+            <a:r>
+              <a:rPr lang="en-US" dirty="0"/>
+              <a:t>第一線失敗就 class switch，BTKi 換 venetoclax，反之亦然。兩類都失敗叫 double refractory，預後很差。TP53 異常或 complex karyotype 的人，一類失敗就要考慮 allo。Richter 病史不論用過什麼藥都是適應症。</a:t>
+            </a:r>
+          </a:p>
+          <a:p>
+            <a:pPr>
+              <a:spcAft>
+                <a:spcPts val="600"/>
+              </a:spcAft>
+            </a:pPr>
+            <a:r>
+              <a:rPr lang="en-US" dirty="0"/>
+              <a:t>有個陷阱，第一線用 BTKi 加 venetoclax fixed duration，停藥後才失敗，不算 double refractory。書上也建議，只要一類 pathway inhibitor 失敗，就轉介移植中心諮詢。</a:t>
+            </a:r>
+          </a:p>
+          <a:p>
+            <a:pPr>
+              <a:spcAft>
+                <a:spcPts val="600"/>
+              </a:spcAft>
+            </a:pPr>
+            <a:r>
+              <a:rPr lang="en-US" dirty="0"/>
+              <a:t>Noncovalent BTKi 能不能改善 double refractory 的預後，目前還不清楚。移植時機要和病人個別討論，一邊是移植併發症的風險，一邊是還剩多少藥物選擇，可以用 HCT-CI 或 EBMT risk score 估計 NRM。</a:t>
+            </a:r>
           </a:p>
         </p:txBody>
       </p:sp>
@@ -1122,11 +1388,59 @@
           <a:bodyPr/>
           <a:lstStyle/>
           <a:p>
+            <a:pPr>
+              <a:spcAft>
+                <a:spcPts val="600"/>
+              </a:spcAft>
+            </a:pPr>
+            <a:r>
+              <a:rPr lang="en-US" b="1" dirty="0"/>
+              <a:t>[1:30 本頁 · 19:30 至 21:00]</a:t>
+            </a:r>
+          </a:p>
+          <a:p>
+            <a:pPr>
+              <a:spcAft>
+                <a:spcPts val="600"/>
+              </a:spcAft>
+            </a:pPr>
             <a:r>
               <a:rPr lang="en-US" dirty="0"/>
-              <a:t>[1:30 本頁 · 19:30 至 21:00]¶CLL 移植的核心機轉是 GVL。證據有三個，refractory 的病人也能受益，有 chronic GVHD 的人復發較少，以及免疫調控能清除 MRD。所以疾病沒控制時結果就變差，移植前要先誘導緩解，用 BTKi、venetoclax、CD20 抗體，idelalisib 也可以 bridge，但對 double refractory 效果有限。¶Donor、graft 和 GVHD prophylaxis 沒有 CLL 特有的選擇。Conditioning 以 RIC 的證據最充分，MAC 沒有優勢；不過年輕、體能好但疾病控制差的人，可以考慮較高強度。¶移植後的 MRD 用 PCR 或 flow，敏感度達到萬分之一。MRD 下降常常比較慢，和免疫重建有關，可用來決定 immunosuppression 減量和 DLI。Auto 只用在 Richter，CAR-T 目前只在臨床試驗。¶最後兩列也是考點。NRM 的危險因子是年紀大、體能差或 HCT-CI 高、partially matched donor，以及不利的 donor 和病人性別組合。移植後復發也不必悲觀，書上說所有核准的 CLL 藥物都還能用，allo 的病史不會限制藥物選擇。</a:t>
-            </a:r>
-            <a:endParaRPr lang="en-US" dirty="0"/>
+              <a:t>CLL 移植的核心機轉是 GVL。證據有三個，refractory 的病人也能受益，有 chronic GVHD 的人復發較少，以及免疫調控能清除 MRD。所以疾病沒控制時結果就變差，移植前要先誘導緩解，用 BTKi、venetoclax、CD20 抗體，idelalisib 也可以 bridge，但對 double refractory 效果有限。</a:t>
+            </a:r>
+          </a:p>
+          <a:p>
+            <a:pPr>
+              <a:spcAft>
+                <a:spcPts val="600"/>
+              </a:spcAft>
+            </a:pPr>
+            <a:r>
+              <a:rPr lang="en-US" dirty="0"/>
+              <a:t>Donor、graft 和 GVHD prophylaxis 沒有 CLL 特有的選擇。Conditioning 以 RIC 的證據最充分，MAC 沒有優勢；不過年輕、體能好但疾病控制差的人，可以考慮較高強度。</a:t>
+            </a:r>
+          </a:p>
+          <a:p>
+            <a:pPr>
+              <a:spcAft>
+                <a:spcPts val="600"/>
+              </a:spcAft>
+            </a:pPr>
+            <a:r>
+              <a:rPr lang="en-US" dirty="0"/>
+              <a:t>移植後的 MRD 用 PCR 或 flow，敏感度達到萬分之一。MRD 下降常常比較慢，和免疫重建有關，可用來決定 immunosuppression 減量和 DLI。Auto 只用在 Richter，CAR-T 目前只在臨床試驗。</a:t>
+            </a:r>
+          </a:p>
+          <a:p>
+            <a:pPr>
+              <a:spcAft>
+                <a:spcPts val="600"/>
+              </a:spcAft>
+            </a:pPr>
+            <a:r>
+              <a:rPr lang="en-US" dirty="0"/>
+              <a:t>最後兩列也是考點。NRM 的危險因子是年紀大、體能差或 HCT-CI 高、partially matched donor，以及不利的 donor 和病人性別組合。移植後復發也不必悲觀，書上說所有核准的 CLL 藥物都還能用，allo 的病史不會限制藥物選擇。</a:t>
+            </a:r>
           </a:p>
         </p:txBody>
       </p:sp>
@@ -1210,11 +1524,48 @@
           <a:bodyPr/>
           <a:lstStyle/>
           <a:p>
+            <a:pPr>
+              <a:spcAft>
+                <a:spcPts val="600"/>
+              </a:spcAft>
+            </a:pPr>
+            <a:r>
+              <a:rPr lang="en-US" b="1" dirty="0"/>
+              <a:t>[1:00 本頁 · 21:00 至 22:00]</a:t>
+            </a:r>
+          </a:p>
+          <a:p>
+            <a:pPr>
+              <a:spcAft>
+                <a:spcPts val="600"/>
+              </a:spcAft>
+            </a:pPr>
             <a:r>
               <a:rPr lang="en-US" dirty="0"/>
-              <a:t>[1:00 本頁 · 21:00 至 22:00]¶這三個數字來自 pathway inhibitor 之前的大型 EBMT registry。十年 EFS 28%、OS 35%、NRM 40%。五年時仍無事件的 394 位病人，接下來五年保持無事件的機率是 79%，這就是 allo 可能治癒 CLL 的主要證據。¶晚期失敗由復發和 NRM 各佔一半。兩年 NRM 的危險因子是年紀大、體能差、unrelated donor 和不利的性別配對。進入 pathway inhibitor 時代後 NRM 已經下降，移植後復發也還能用所有核准的 CLL 藥物治療。¶講者換算一下，十年 EFS 28%，大約每三到四位病人有一位長期無事件。這是年輕、高風險 CLL 仍值得考慮 allo 的理由；但短期死亡風險高於藥物治療的人，就不該推薦。</a:t>
-            </a:r>
-            <a:endParaRPr lang="en-US" dirty="0"/>
+              <a:t>這三個數字來自 pathway inhibitor 之前的大型 EBMT registry。十年 EFS 28%、OS 35%、NRM 40%。五年時仍無事件的 394 位病人，接下來五年保持無事件的機率是 79%，這就是 allo 可能治癒 CLL 的主要證據。</a:t>
+            </a:r>
+          </a:p>
+          <a:p>
+            <a:pPr>
+              <a:spcAft>
+                <a:spcPts val="600"/>
+              </a:spcAft>
+            </a:pPr>
+            <a:r>
+              <a:rPr lang="en-US" dirty="0"/>
+              <a:t>晚期失敗由復發和 NRM 各佔一半。兩年 NRM 的危險因子是年紀大、體能差、unrelated donor 和不利的性別配對。進入 pathway inhibitor 時代後 NRM 已經下降，移植後復發也還能用所有核准的 CLL 藥物治療。</a:t>
+            </a:r>
+          </a:p>
+          <a:p>
+            <a:pPr>
+              <a:spcAft>
+                <a:spcPts val="600"/>
+              </a:spcAft>
+            </a:pPr>
+            <a:r>
+              <a:rPr lang="en-US" dirty="0"/>
+              <a:t>講者換算一下，十年 EFS 28%，大約每三到四位病人有一位長期無事件。這是年輕、高風險 CLL 仍值得考慮 allo 的理由；但短期死亡風險高於藥物治療的人，就不該推薦。</a:t>
+            </a:r>
           </a:p>
         </p:txBody>
       </p:sp>
@@ -1298,11 +1649,59 @@
           <a:bodyPr/>
           <a:lstStyle/>
           <a:p>
+            <a:pPr>
+              <a:spcAft>
+                <a:spcPts val="600"/>
+              </a:spcAft>
+            </a:pPr>
+            <a:r>
+              <a:rPr lang="en-US" b="1" dirty="0"/>
+              <a:t>[0:45 本頁 · 22:00 至 22:45]</a:t>
+            </a:r>
+          </a:p>
+          <a:p>
+            <a:pPr>
+              <a:spcAft>
+                <a:spcPts val="600"/>
+              </a:spcAft>
+            </a:pPr>
             <a:r>
               <a:rPr lang="en-US" dirty="0"/>
-              <a:t>[0:45 本頁 · 22:00 至 22:45]¶第一題。27 歲女性，classical Hodgkin，BEAM auto 之後用過 BV consolidation，五個月就復發。四個 cycle 的 nivolumab 後達到 PET-negative CR，唯一的 donor 是半相合的哥哥。¶A 是最後一劑 nivolumab 一週後就移植，B 是停藥至少 6 週、用 PTCy 做 haplo，C 是 TBI 的第二次 auto，D 是放棄 haplo、等 unrelated donor，E 是 low-dose TBI 的 RIC。¶題目給的時間點和用藥順序都是線索，先想 auto 後多久復發、之前用過什麼藥。¶[Pause for answers.]</a:t>
-            </a:r>
-            <a:endParaRPr lang="en-US" dirty="0"/>
+              <a:t>第一題。27 歲女性，classical Hodgkin，BEAM auto 之後用過 BV consolidation，五個月就復發。四個 cycle 的 nivolumab 後達到 PET-negative CR，唯一的 donor 是半相合的哥哥。</a:t>
+            </a:r>
+          </a:p>
+          <a:p>
+            <a:pPr>
+              <a:spcAft>
+                <a:spcPts val="600"/>
+              </a:spcAft>
+            </a:pPr>
+            <a:r>
+              <a:rPr lang="en-US" dirty="0"/>
+              <a:t>A 是最後一劑 nivolumab 一週後就移植，B 是停藥至少 6 週、用 PTCy 做 haplo，C 是 TBI 的第二次 auto，D 是放棄 haplo、等 unrelated donor，E 是 low-dose TBI 的 RIC。</a:t>
+            </a:r>
+          </a:p>
+          <a:p>
+            <a:pPr>
+              <a:spcAft>
+                <a:spcPts val="600"/>
+              </a:spcAft>
+            </a:pPr>
+            <a:r>
+              <a:rPr lang="en-US" dirty="0"/>
+              <a:t>題目給的時間點和用藥順序都是線索，先想 auto 後多久復發、之前用過什麼藥。</a:t>
+            </a:r>
+          </a:p>
+          <a:p>
+            <a:pPr>
+              <a:spcAft>
+                <a:spcPts val="600"/>
+              </a:spcAft>
+            </a:pPr>
+            <a:r>
+              <a:rPr lang="en-US" b="1" dirty="0"/>
+              <a:t>[Pause for answers.]</a:t>
+            </a:r>
           </a:p>
         </p:txBody>
       </p:sp>
@@ -1386,11 +1785,59 @@
           <a:bodyPr/>
           <a:lstStyle/>
           <a:p>
+            <a:pPr>
+              <a:spcAft>
+                <a:spcPts val="600"/>
+              </a:spcAft>
+            </a:pPr>
+            <a:r>
+              <a:rPr lang="en-US" b="1" dirty="0"/>
+              <a:t>[1:00 本頁 · 22:45 至 23:45]</a:t>
+            </a:r>
+          </a:p>
+          <a:p>
+            <a:pPr>
+              <a:spcAft>
+                <a:spcPts val="600"/>
+              </a:spcAft>
+            </a:pPr>
             <a:r>
               <a:rPr lang="en-US" dirty="0"/>
-              <a:t>[1:00 本頁 · 22:45 至 23:45]¶答案是 B。Auto 失敗後的 cHL，allo 是治癒選項，而 sensitive relapse after auto 不論 donor 都是 standard。Checkpoint inhibitor 移植前使用，可能增加 acute GVHD、SOS/VOD 和 hyperacute febrile syndrome，所以停藥至少 6 週，並用 PTCy。¶A 是主要陷阱，把 BV 的規則套到 PD-1 上；BV 不需要 washout，PD-1 需要。D 不對，haplo 加 PTCy 的結果和 MSD、MUD 相近，GVHD 甚至更少。C 和 E 都踩到 TBI，auto 不建議 TBI，low-dose TBI 的 RIC 復發較高、存活較差。¶題目先講她用過 BV，這是為了對應演算法，用過 BV 才走 PD-1 那一支。¶Auto 後五個月就復發屬於早期復發，預後較差，更需要 allo 來鞏固。</a:t>
-            </a:r>
-            <a:endParaRPr lang="en-US" dirty="0"/>
+              <a:t>答案是 B。Auto 失敗後的 cHL，allo 是治癒選項，而 sensitive relapse after auto 不論 donor 都是 standard。Checkpoint inhibitor 移植前使用，可能增加 acute GVHD、SOS/VOD 和 hyperacute febrile syndrome，所以停藥至少 6 週，並用 PTCy。</a:t>
+            </a:r>
+          </a:p>
+          <a:p>
+            <a:pPr>
+              <a:spcAft>
+                <a:spcPts val="600"/>
+              </a:spcAft>
+            </a:pPr>
+            <a:r>
+              <a:rPr lang="en-US" dirty="0"/>
+              <a:t>A 是主要陷阱，把 BV 的規則套到 PD-1 上；BV 不需要 washout，PD-1 需要。D 不對，haplo 加 PTCy 的結果和 MSD、MUD 相近，GVHD 甚至更少。C 和 E 都踩到 TBI，auto 不建議 TBI，low-dose TBI 的 RIC 復發較高、存活較差。</a:t>
+            </a:r>
+          </a:p>
+          <a:p>
+            <a:pPr>
+              <a:spcAft>
+                <a:spcPts val="600"/>
+              </a:spcAft>
+            </a:pPr>
+            <a:r>
+              <a:rPr lang="en-US" dirty="0"/>
+              <a:t>題目先講她用過 BV，這是為了對應演算法，用過 BV 才走 PD-1 那一支。</a:t>
+            </a:r>
+          </a:p>
+          <a:p>
+            <a:pPr>
+              <a:spcAft>
+                <a:spcPts val="600"/>
+              </a:spcAft>
+            </a:pPr>
+            <a:r>
+              <a:rPr lang="en-US" dirty="0"/>
+              <a:t>Auto 後五個月就復發屬於早期復發，預後較差，更需要 allo 來鞏固。</a:t>
+            </a:r>
           </a:p>
         </p:txBody>
       </p:sp>
@@ -1474,11 +1921,59 @@
           <a:bodyPr/>
           <a:lstStyle/>
           <a:p>
+            <a:pPr>
+              <a:spcAft>
+                <a:spcPts val="600"/>
+              </a:spcAft>
+            </a:pPr>
+            <a:r>
+              <a:rPr lang="en-US" b="1" dirty="0"/>
+              <a:t>[0:45 本頁 · 23:45 至 24:30]</a:t>
+            </a:r>
+          </a:p>
+          <a:p>
+            <a:pPr>
+              <a:spcAft>
+                <a:spcPts val="600"/>
+              </a:spcAft>
+            </a:pPr>
             <a:r>
               <a:rPr lang="en-US" dirty="0"/>
-              <a:t>[0:45 本頁 · 23:45 至 24:30]¶第二題。54 歲男性，follicular lymphoma grade 1 到 2，bendamustine-rituximab 加 rituximab maintenance，開始治療後 15 個月復發，切片沒有轉化。第二線化學免疫治療達到 complete metabolic response，體能好，有 HLA 相合的姊姊。¶選項是觀察、BEAM 的 auto、姊姊的 MAC allo、TBI 加 purging 的 auto，以及 allo 後 rituximab maintenance。¶注意題目特別講了復發的時間點和沒有轉化，這兩件事決定他屬不屬於該移植的族群，也決定先做哪一種移植。¶[Pause for answers.]</a:t>
-            </a:r>
-            <a:endParaRPr lang="en-US" dirty="0"/>
+              <a:t>第二題。54 歲男性，follicular lymphoma grade 1 到 2，bendamustine-rituximab 加 rituximab maintenance，開始治療後 15 個月復發，切片沒有轉化。第二線化學免疫治療達到 complete metabolic response，體能好，有 HLA 相合的姊姊。</a:t>
+            </a:r>
+          </a:p>
+          <a:p>
+            <a:pPr>
+              <a:spcAft>
+                <a:spcPts val="600"/>
+              </a:spcAft>
+            </a:pPr>
+            <a:r>
+              <a:rPr lang="en-US" dirty="0"/>
+              <a:t>選項是觀察、BEAM 的 auto、姊姊的 MAC allo、TBI 加 purging 的 auto，以及 allo 後 rituximab maintenance。</a:t>
+            </a:r>
+          </a:p>
+          <a:p>
+            <a:pPr>
+              <a:spcAft>
+                <a:spcPts val="600"/>
+              </a:spcAft>
+            </a:pPr>
+            <a:r>
+              <a:rPr lang="en-US" dirty="0"/>
+              <a:t>注意題目特別講了復發的時間點和沒有轉化，這兩件事決定他屬不屬於該移植的族群，也決定先做哪一種移植。</a:t>
+            </a:r>
+          </a:p>
+          <a:p>
+            <a:pPr>
+              <a:spcAft>
+                <a:spcPts val="600"/>
+              </a:spcAft>
+            </a:pPr>
+            <a:r>
+              <a:rPr lang="en-US" b="1" dirty="0"/>
+              <a:t>[Pause for answers.]</a:t>
+            </a:r>
           </a:p>
         </p:txBody>
       </p:sp>
@@ -1562,11 +2057,48 @@
           <a:bodyPr/>
           <a:lstStyle/>
           <a:p>
+            <a:pPr>
+              <a:spcAft>
+                <a:spcPts val="600"/>
+              </a:spcAft>
+            </a:pPr>
+            <a:r>
+              <a:rPr lang="en-US" b="1" dirty="0"/>
+              <a:t>[1:00 本頁 · 0:30 至 1:30]</a:t>
+            </a:r>
+          </a:p>
+          <a:p>
+            <a:pPr>
+              <a:spcAft>
+                <a:spcPts val="600"/>
+              </a:spcAft>
+            </a:pPr>
             <a:r>
               <a:rPr lang="en-US" dirty="0"/>
-              <a:t>[1:00 本頁 · 0:30 至 1:30]¶今天分四段。第一段是 classical Hodgkin，大約十分鐘，從復發時的 salvage、BEAM auto-HCT、brentuximab vedotin consolidation，一路講到 auto 失敗之後的 allo。Hodgkin 的適應症表格和數字最多，也最常出題。¶第二段是以 follicular lymphoma 為代表的 indolent lymphoma，重點是哪些病人值得移植，以及 auto 和 allo 怎麼取捨。第三段是 CLL，在 pathway inhibitor 的時代，allo 的適應症只剩三種情境，很好記。最後五分鐘做三題，剛好每一段各一題。¶三個疾病有一條共同的線索。移植的時機都取決於疾病對前一線治療還敏不敏感，以及有沒有更安全的新藥可以先用，等一下 chemosensitivity 這個詞會反覆出現。</a:t>
-            </a:r>
-            <a:endParaRPr lang="en-US" dirty="0"/>
+              <a:t>今天分四段。第一段是 classical Hodgkin，大約十分鐘，從復發時的 salvage、BEAM auto-HCT、brentuximab vedotin consolidation，一路講到 auto 失敗之後的 allo。Hodgkin 的適應症表格和數字最多，也最常出題。</a:t>
+            </a:r>
+          </a:p>
+          <a:p>
+            <a:pPr>
+              <a:spcAft>
+                <a:spcPts val="600"/>
+              </a:spcAft>
+            </a:pPr>
+            <a:r>
+              <a:rPr lang="en-US" dirty="0"/>
+              <a:t>第二段是以 follicular lymphoma 為代表的 indolent lymphoma，重點是哪些病人值得移植，以及 auto 和 allo 怎麼取捨。第三段是 CLL，在 pathway inhibitor 的時代，allo 的適應症只剩三種情境，很好記。最後五分鐘做三題，剛好每一段各一題。</a:t>
+            </a:r>
+          </a:p>
+          <a:p>
+            <a:pPr>
+              <a:spcAft>
+                <a:spcPts val="600"/>
+              </a:spcAft>
+            </a:pPr>
+            <a:r>
+              <a:rPr lang="en-US" dirty="0"/>
+              <a:t>三個疾病有一條共同的線索。移植的時機都取決於疾病對前一線治療還敏不敏感，以及有沒有更安全的新藥可以先用，等一下 chemosensitivity 這個詞會反覆出現。</a:t>
+            </a:r>
           </a:p>
         </p:txBody>
       </p:sp>
@@ -1650,11 +2182,59 @@
           <a:bodyPr/>
           <a:lstStyle/>
           <a:p>
+            <a:pPr>
+              <a:spcAft>
+                <a:spcPts val="600"/>
+              </a:spcAft>
+            </a:pPr>
+            <a:r>
+              <a:rPr lang="en-US" b="1" dirty="0"/>
+              <a:t>[1:00 本頁 · 24:30 至 25:30]</a:t>
+            </a:r>
+          </a:p>
+          <a:p>
+            <a:pPr>
+              <a:spcAft>
+                <a:spcPts val="600"/>
+              </a:spcAft>
+            </a:pPr>
             <a:r>
               <a:rPr lang="en-US" dirty="0"/>
-              <a:t>[1:00 本頁 · 24:30 至 25:30]¶答案是 B。第一線後兩年內復發，也就是 POD24，存活較差，疾病控制後就應考慮 HCT，所以 A 錯。多數歐洲專家把 auto 當第一次移植，毒性低、能治癒一部分人，BEAM 是最常用的 conditioning。¶C 是主要干擾項，有 sibling donor 不代表要先做 allo，allo 留給 auto 後復發；而且 FL 多數用 RIC。D 錯在 purging 沒有證實的好處，TBI 又增加 MDS/AML。E 錯在 allo 後的 indolent lymphoma 沒有 maintenance 的適應症。¶如果題目改成 auto 後才復發，答案就會變成 RIC allo，這是同一個考點的另一面。¶這位病人 54 歲，比 relapsed FL 的中位年齡 69 歲年輕很多，auto 的 TRM 也比較能接受。</a:t>
-            </a:r>
-            <a:endParaRPr lang="en-US" dirty="0"/>
+              <a:t>答案是 B。第一線後兩年內復發，也就是 POD24，存活較差，疾病控制後就應考慮 HCT，所以 A 錯。多數歐洲專家把 auto 當第一次移植，毒性低、能治癒一部分人，BEAM 是最常用的 conditioning。</a:t>
+            </a:r>
+          </a:p>
+          <a:p>
+            <a:pPr>
+              <a:spcAft>
+                <a:spcPts val="600"/>
+              </a:spcAft>
+            </a:pPr>
+            <a:r>
+              <a:rPr lang="en-US" dirty="0"/>
+              <a:t>C 是主要干擾項，有 sibling donor 不代表要先做 allo，allo 留給 auto 後復發；而且 FL 多數用 RIC。D 錯在 purging 沒有證實的好處，TBI 又增加 MDS/AML。E 錯在 allo 後的 indolent lymphoma 沒有 maintenance 的適應症。</a:t>
+            </a:r>
+          </a:p>
+          <a:p>
+            <a:pPr>
+              <a:spcAft>
+                <a:spcPts val="600"/>
+              </a:spcAft>
+            </a:pPr>
+            <a:r>
+              <a:rPr lang="en-US" dirty="0"/>
+              <a:t>如果題目改成 auto 後才復發，答案就會變成 RIC allo，這是同一個考點的另一面。</a:t>
+            </a:r>
+          </a:p>
+          <a:p>
+            <a:pPr>
+              <a:spcAft>
+                <a:spcPts val="600"/>
+              </a:spcAft>
+            </a:pPr>
+            <a:r>
+              <a:rPr lang="en-US" dirty="0"/>
+              <a:t>這位病人 54 歲，比 relapsed FL 的中位年齡 69 歲年輕很多，auto 的 TRM 也比較能接受。</a:t>
+            </a:r>
           </a:p>
         </p:txBody>
       </p:sp>
@@ -1738,11 +2318,70 @@
           <a:bodyPr/>
           <a:lstStyle/>
           <a:p>
+            <a:pPr>
+              <a:spcAft>
+                <a:spcPts val="600"/>
+              </a:spcAft>
+            </a:pPr>
+            <a:r>
+              <a:rPr lang="en-US" b="1" dirty="0"/>
+              <a:t>[0:45 本頁 · 25:30 至 26:15]</a:t>
+            </a:r>
+          </a:p>
+          <a:p>
+            <a:pPr>
+              <a:spcAft>
+                <a:spcPts val="600"/>
+              </a:spcAft>
+            </a:pPr>
             <a:r>
               <a:rPr lang="en-US" dirty="0"/>
-              <a:t>[0:45 本頁 · 25:30 至 26:15]¶第三題。52 歲女性，CLL 帶 TP53 mutation，第一線持續吃 acalabrutinib 兩年後惡化。換成 venetoclax 加 rituximab，目前 partial response。HCT-CI 1 分，有 10/10 相合的 unrelated donor。¶選項有繼續 venetoclax、等它也失敗再說，auto，現在就轉介做 RIC allo，商業 CAR-T，以及因為 TP53 而做 MAC allo。¶這題要同時看三件事，遺傳學風險、用過幾類藥，以及現在疾病有沒有控制住。Donor 和 HCT-CI 都不是問題，重點在時機。¶先決定該不該移植，再決定怎麼移植。¶[Pause for answers.]</a:t>
-            </a:r>
-            <a:endParaRPr lang="en-US" dirty="0"/>
+              <a:t>第三題。52 歲女性，CLL 帶 TP53 mutation，第一線持續吃 acalabrutinib 兩年後惡化。換成 venetoclax 加 rituximab，目前 partial response。HCT-CI 1 分，有 10/10 相合的 unrelated donor。</a:t>
+            </a:r>
+          </a:p>
+          <a:p>
+            <a:pPr>
+              <a:spcAft>
+                <a:spcPts val="600"/>
+              </a:spcAft>
+            </a:pPr>
+            <a:r>
+              <a:rPr lang="en-US" dirty="0"/>
+              <a:t>選項有繼續 venetoclax、等它也失敗再說，auto，現在就轉介做 RIC allo，商業 CAR-T，以及因為 TP53 而做 MAC allo。</a:t>
+            </a:r>
+          </a:p>
+          <a:p>
+            <a:pPr>
+              <a:spcAft>
+                <a:spcPts val="600"/>
+              </a:spcAft>
+            </a:pPr>
+            <a:r>
+              <a:rPr lang="en-US" dirty="0"/>
+              <a:t>這題要同時看三件事，遺傳學風險、用過幾類藥，以及現在疾病有沒有控制住。Donor 和 HCT-CI 都不是問題，重點在時機。</a:t>
+            </a:r>
+          </a:p>
+          <a:p>
+            <a:pPr>
+              <a:spcAft>
+                <a:spcPts val="600"/>
+              </a:spcAft>
+            </a:pPr>
+            <a:r>
+              <a:rPr lang="en-US" dirty="0"/>
+              <a:t>先決定該不該移植，再決定怎麼移植。</a:t>
+            </a:r>
+          </a:p>
+          <a:p>
+            <a:pPr>
+              <a:spcAft>
+                <a:spcPts val="600"/>
+              </a:spcAft>
+            </a:pPr>
+            <a:r>
+              <a:rPr lang="en-US" b="1" dirty="0"/>
+              <a:t>[Pause for answers.]</a:t>
+            </a:r>
           </a:p>
         </p:txBody>
       </p:sp>
@@ -1826,11 +2465,48 @@
           <a:bodyPr/>
           <a:lstStyle/>
           <a:p>
+            <a:pPr>
+              <a:spcAft>
+                <a:spcPts val="600"/>
+              </a:spcAft>
+            </a:pPr>
+            <a:r>
+              <a:rPr lang="en-US" b="1" dirty="0"/>
+              <a:t>[1:00 本頁 · 26:15 至 27:15]</a:t>
+            </a:r>
+          </a:p>
+          <a:p>
+            <a:pPr>
+              <a:spcAft>
+                <a:spcPts val="600"/>
+              </a:spcAft>
+            </a:pPr>
             <a:r>
               <a:rPr lang="en-US" dirty="0"/>
-              <a:t>[1:00 本頁 · 26:15 至 27:15]¶答案是 C。TP53 異常或 complex karyotype 的病人，只要一類 pathway inhibitor 失敗就是 allo 的適應症，而且要趁有反應時移植，因為疾病未控制時結果明顯變差。¶A 是主要陷阱，等到兩類都失敗才移植，只適用於沒有 TP53 或 complex karyotype 的人；書上也提醒，allo 應該在完全抗藥之前就考慮。B 錯，auto 除了 Richter 之外沒有角色。D 錯，CLL 目前沒有核准的 CAR-T 產品，只能在試驗中使用。E 錯，MAC 沒有優於 RIC，CLL 靠的是 GVL。¶書上也建議，一類 pathway inhibitor 失敗就應轉介移植中心，這位病人現在正是轉介的時機。</a:t>
-            </a:r>
-            <a:endParaRPr lang="en-US" dirty="0"/>
+              <a:t>答案是 C。TP53 異常或 complex karyotype 的病人，只要一類 pathway inhibitor 失敗就是 allo 的適應症，而且要趁有反應時移植，因為疾病未控制時結果明顯變差。</a:t>
+            </a:r>
+          </a:p>
+          <a:p>
+            <a:pPr>
+              <a:spcAft>
+                <a:spcPts val="600"/>
+              </a:spcAft>
+            </a:pPr>
+            <a:r>
+              <a:rPr lang="en-US" dirty="0"/>
+              <a:t>A 是主要陷阱，等到兩類都失敗才移植，只適用於沒有 TP53 或 complex karyotype 的人；書上也提醒，allo 應該在完全抗藥之前就考慮。B 錯，auto 除了 Richter 之外沒有角色。D 錯，CLL 目前沒有核准的 CAR-T 產品，只能在試驗中使用。E 錯，MAC 沒有優於 RIC，CLL 靠的是 GVL。</a:t>
+            </a:r>
+          </a:p>
+          <a:p>
+            <a:pPr>
+              <a:spcAft>
+                <a:spcPts val="600"/>
+              </a:spcAft>
+            </a:pPr>
+            <a:r>
+              <a:rPr lang="en-US" dirty="0"/>
+              <a:t>書上也建議，一類 pathway inhibitor 失敗就應轉介移植中心，這位病人現在正是轉介的時機。</a:t>
+            </a:r>
           </a:p>
         </p:txBody>
       </p:sp>
@@ -2530,11 +3206,59 @@
           <a:bodyPr/>
           <a:lstStyle/>
           <a:p>
+            <a:pPr>
+              <a:spcAft>
+                <a:spcPts val="600"/>
+              </a:spcAft>
+            </a:pPr>
+            <a:r>
+              <a:rPr lang="en-US" b="1" dirty="0"/>
+              <a:t>[1:30 本頁 · 1:30 至 3:00]</a:t>
+            </a:r>
+          </a:p>
+          <a:p>
+            <a:pPr>
+              <a:spcAft>
+                <a:spcPts val="600"/>
+              </a:spcAft>
+            </a:pPr>
             <a:r>
               <a:rPr lang="en-US" dirty="0"/>
-              <a:t>[1:30 本頁 · 1:30 至 3:00]¶Hodgkin 第一次復發或 primary refractory，標準是 salvage 之後做 high-dose chemotherapy 加 auto-HCT。Salvage 前先做兩件事。距離第一線結束 12 個月以上的復發一定要重新切片，排除別的診斷，12 個月內也強烈建議。影像做 contrast CT 加 PET。¶表上是 Table 89.2。DHAP 的 ORR 89%，CR 只有 21%；ICE 的 CR 67%；BeGEV 的 CR 73%。這些數字來自不同研究，沒有 trial 直接比較，所以選擇要看第一線用過什麼、累積毒性和能不能收集幹細胞。¶Salvage 的目標是 chemosensitivity，書上把 PET-negative 當作 chemosensitive 的定義，它對 auto 後的結果影響最大。下面兩列不含化療，BV 單藥核准給不適合 auto、至少兩線化療失敗的人。¶實務上，所有化療型 salvage 都有血液毒性，infection 和 neutropenic fever 約 10 到 24%，每一種方案動員幹細胞都沒有問題。治療前要評估心肺功能，有需要先做生育諮詢。新藥加化療的組合，例如 pembrolizumab 加 GVD，PET-negative rate 可到 95%，但這些組合都還沒有核准。</a:t>
-            </a:r>
-            <a:endParaRPr lang="en-US" dirty="0"/>
+              <a:t>Hodgkin 第一次復發或 primary refractory，標準是 salvage 之後做 high-dose chemotherapy 加 auto-HCT。Salvage 前先做兩件事。距離第一線結束 12 個月以上的復發一定要重新切片，排除別的診斷，12 個月內也強烈建議。影像做 contrast CT 加 PET。</a:t>
+            </a:r>
+          </a:p>
+          <a:p>
+            <a:pPr>
+              <a:spcAft>
+                <a:spcPts val="600"/>
+              </a:spcAft>
+            </a:pPr>
+            <a:r>
+              <a:rPr lang="en-US" dirty="0"/>
+              <a:t>表上是 Table 89.2。DHAP 的 ORR 89%，CR 只有 21%；ICE 的 CR 67%；BeGEV 的 CR 73%。這些數字來自不同研究，沒有 trial 直接比較，所以選擇要看第一線用過什麼、累積毒性和能不能收集幹細胞。</a:t>
+            </a:r>
+          </a:p>
+          <a:p>
+            <a:pPr>
+              <a:spcAft>
+                <a:spcPts val="600"/>
+              </a:spcAft>
+            </a:pPr>
+            <a:r>
+              <a:rPr lang="en-US" dirty="0"/>
+              <a:t>Salvage 的目標是 chemosensitivity，書上把 PET-negative 當作 chemosensitive 的定義，它對 auto 後的結果影響最大。下面兩列不含化療，BV 單藥核准給不適合 auto、至少兩線化療失敗的人。</a:t>
+            </a:r>
+          </a:p>
+          <a:p>
+            <a:pPr>
+              <a:spcAft>
+                <a:spcPts val="600"/>
+              </a:spcAft>
+            </a:pPr>
+            <a:r>
+              <a:rPr lang="en-US" dirty="0"/>
+              <a:t>實務上，所有化療型 salvage 都有血液毒性，infection 和 neutropenic fever 約 10 到 24%，每一種方案動員幹細胞都沒有問題。治療前要評估心肺功能，有需要先做生育諮詢。新藥加化療的組合，例如 pembrolizumab 加 GVD，PET-negative rate 可到 95%，但這些組合都還沒有核准。</a:t>
+            </a:r>
           </a:p>
         </p:txBody>
       </p:sp>
@@ -2618,11 +3342,59 @@
           <a:bodyPr/>
           <a:lstStyle/>
           <a:p>
+            <a:pPr>
+              <a:spcAft>
+                <a:spcPts val="600"/>
+              </a:spcAft>
+            </a:pPr>
+            <a:r>
+              <a:rPr lang="en-US" b="1" dirty="0"/>
+              <a:t>[1:30 本頁 · 3:00 至 4:30]</a:t>
+            </a:r>
+          </a:p>
+          <a:p>
+            <a:pPr>
+              <a:spcAft>
+                <a:spcPts val="600"/>
+              </a:spcAft>
+            </a:pPr>
             <a:r>
               <a:rPr lang="en-US" dirty="0"/>
-              <a:t>[1:30 本頁 · 3:00 至 4:30]¶兩個 landmark randomized trial，1993 年的 BNLI 和 2002 年的 GHSG/EBMT HD-R1，都把 high-dose chemotherapy 加 auto 跟一般 salvage chemotherapy 比，EFS 和 FFTF 顯著較好，但 OS 沒有顯著差異。這句很常被拿來出是非題。¶EBMT 2022 的適應症在表上。CR1 不建議做 auto，evidence level I。Chemosensitive relapse 而沒做過 auto 是 standard of care，五年 OS 75%、PFS 50%。Primary refractory 只是 clinical option，五年 OS 剩 30 到 36%。¶做過 auto 再復發，第二次 auto 是 clinical option，NRM 15%，五年 OS 和 PFS 都是 30%。Tandem auto 給 poor-risk 病人，NRM 0 到 5%，現在有了 BV 和 checkpoint inhibitor，要不要做第二次 auto 需要重新評估。¶臨床上判斷 chemosensitive 的工具就是 PET。Salvage 後 PET 陰性，直接走 auto；PET 仍陽性，就要考慮換 salvage，或把 tandem、BV consolidation 這些加強手段一起納入討論。Primary refractory 的人結果雖然差，仍有大約三成長期存活，所以不是放棄移植的理由。</a:t>
-            </a:r>
-            <a:endParaRPr lang="en-US" dirty="0"/>
+              <a:t>兩個 landmark randomized trial，1993 年的 BNLI 和 2002 年的 GHSG/EBMT HD-R1，都把 high-dose chemotherapy 加 auto 跟一般 salvage chemotherapy 比，EFS 和 FFTF 顯著較好，但 OS 沒有顯著差異。這句很常被拿來出是非題。</a:t>
+            </a:r>
+          </a:p>
+          <a:p>
+            <a:pPr>
+              <a:spcAft>
+                <a:spcPts val="600"/>
+              </a:spcAft>
+            </a:pPr>
+            <a:r>
+              <a:rPr lang="en-US" dirty="0"/>
+              <a:t>EBMT 2022 的適應症在表上。CR1 不建議做 auto，evidence level I。Chemosensitive relapse 而沒做過 auto 是 standard of care，五年 OS 75%、PFS 50%。Primary refractory 只是 clinical option，五年 OS 剩 30 到 36%。</a:t>
+            </a:r>
+          </a:p>
+          <a:p>
+            <a:pPr>
+              <a:spcAft>
+                <a:spcPts val="600"/>
+              </a:spcAft>
+            </a:pPr>
+            <a:r>
+              <a:rPr lang="en-US" dirty="0"/>
+              <a:t>做過 auto 再復發，第二次 auto 是 clinical option，NRM 15%，五年 OS 和 PFS 都是 30%。Tandem auto 給 poor-risk 病人，NRM 0 到 5%，現在有了 BV 和 checkpoint inhibitor，要不要做第二次 auto 需要重新評估。</a:t>
+            </a:r>
+          </a:p>
+          <a:p>
+            <a:pPr>
+              <a:spcAft>
+                <a:spcPts val="600"/>
+              </a:spcAft>
+            </a:pPr>
+            <a:r>
+              <a:rPr lang="en-US" dirty="0"/>
+              <a:t>臨床上判斷 chemosensitive 的工具就是 PET。Salvage 後 PET 陰性，直接走 auto；PET 仍陽性，就要考慮換 salvage，或把 tandem、BV consolidation 這些加強手段一起納入討論。Primary refractory 的人結果雖然差，仍有大約三成長期存活，所以不是放棄移植的理由。</a:t>
+            </a:r>
           </a:p>
         </p:txBody>
       </p:sp>
@@ -2706,11 +3478,92 @@
           <a:bodyPr/>
           <a:lstStyle/>
           <a:p>
+            <a:pPr>
+              <a:spcAft>
+                <a:spcPts val="600"/>
+              </a:spcAft>
+            </a:pPr>
+            <a:r>
+              <a:rPr lang="en-US" b="1" dirty="0"/>
+              <a:t>[1:30 本頁 · 4:30 至 6:00]</a:t>
+            </a:r>
+          </a:p>
+          <a:p>
+            <a:pPr>
+              <a:spcAft>
+                <a:spcPts val="600"/>
+              </a:spcAft>
+            </a:pPr>
             <a:r>
               <a:rPr lang="en-US" dirty="0"/>
-              <a:t>[1:30 本頁 · 4:30 至 6:00]¶Auto 的幹細胞來源首選 mobilized peripheral blood。Conditioning 沒有 randomized 比較，但 BEAM 是首選。BCNU 300 mg/m² 在 day −6 給一次，etoposide 200 mg/m² 和 cytarabine 200 mg/m² 一天兩次，都從 day −5 給到 −2，melphalan 140 在 day −1。北美常用 CBV。TBI-based regimen 不建議，因為第二癌風險較高。¶Melphalan 的單位，書上印的是 140 mg/kg，這顯然是 mg/m² 的筆誤，上課前會再確認。¶Caption 是 BEAM 的晚期毒性。肺部的 chronic interstitial fibrosis 和 DLCO 下降 21%，第二腫瘤 20%。NRM 最常見的原因就是第二癌，風險是一般人的 12 倍，追蹤門診要記得篩檢。¶BEAM 四個藥的順序和天數容易出配對題。BCNU 只給一次而且最早給，melphalan 也只給一次、放在最後一天，中間四天是 etoposide 和 cytarabine。肺部是 BEAM 最常見的晚期問題之一，追蹤時有咳嗽、喘或 DLCO 下降，要想到 chronic interstitial fibrosis。¶第二腫瘤加上 metabolic syndrome 和心血管問題，代表 auto 後的長期追蹤不只是看復發。¶講者提醒（不念出來）：¶- TO CONFIRM BEFORE PRESENTING: Ch. 89 prints melphalan 140 mg/kg/day; standard BEAM is 140 mg/m². Confirm against the printed book or another BEAM source.</a:t>
-            </a:r>
-            <a:endParaRPr lang="en-US" dirty="0"/>
+              <a:t>Auto 的幹細胞來源首選 mobilized peripheral blood。Conditioning 沒有 randomized 比較，但 BEAM 是首選。BCNU 300 mg/m² 在 day −6 給一次，etoposide 200 mg/m² 和 cytarabine 200 mg/m² 一天兩次，都從 day −5 給到 −2，melphalan 140 在 day −1。北美常用 CBV。TBI-based regimen 不建議，因為第二癌風險較高。</a:t>
+            </a:r>
+          </a:p>
+          <a:p>
+            <a:pPr>
+              <a:spcAft>
+                <a:spcPts val="600"/>
+              </a:spcAft>
+            </a:pPr>
+            <a:r>
+              <a:rPr lang="en-US" dirty="0"/>
+              <a:t>Melphalan 的單位，書上印的是 140 mg/kg，這顯然是 mg/m² 的筆誤，上課前會再確認。</a:t>
+            </a:r>
+          </a:p>
+          <a:p>
+            <a:pPr>
+              <a:spcAft>
+                <a:spcPts val="600"/>
+              </a:spcAft>
+            </a:pPr>
+            <a:r>
+              <a:rPr lang="en-US" dirty="0"/>
+              <a:t>Caption 是 BEAM 的晚期毒性。肺部的 chronic interstitial fibrosis 和 DLCO 下降 21%，第二腫瘤 20%。NRM 最常見的原因就是第二癌，風險是一般人的 12 倍，追蹤門診要記得篩檢。</a:t>
+            </a:r>
+          </a:p>
+          <a:p>
+            <a:pPr>
+              <a:spcAft>
+                <a:spcPts val="600"/>
+              </a:spcAft>
+            </a:pPr>
+            <a:r>
+              <a:rPr lang="en-US" dirty="0"/>
+              <a:t>BEAM 四個藥的順序和天數容易出配對題。BCNU 只給一次而且最早給，melphalan 也只給一次、放在最後一天，中間四天是 etoposide 和 cytarabine。肺部是 BEAM 最常見的晚期問題之一，追蹤時有咳嗽、喘或 DLCO 下降，要想到 chronic interstitial fibrosis。</a:t>
+            </a:r>
+          </a:p>
+          <a:p>
+            <a:pPr>
+              <a:spcAft>
+                <a:spcPts val="600"/>
+              </a:spcAft>
+            </a:pPr>
+            <a:r>
+              <a:rPr lang="en-US" dirty="0"/>
+              <a:t>第二腫瘤加上 metabolic syndrome 和心血管問題，代表 auto 後的長期追蹤不只是看復發。</a:t>
+            </a:r>
+          </a:p>
+          <a:p>
+            <a:pPr>
+              <a:spcAft>
+                <a:spcPts val="600"/>
+              </a:spcAft>
+            </a:pPr>
+            <a:r>
+              <a:rPr lang="en-US" b="1" dirty="0"/>
+              <a:t>講者提醒（不念出來）：</a:t>
+            </a:r>
+          </a:p>
+          <a:p>
+            <a:pPr>
+              <a:spcAft>
+                <a:spcPts val="600"/>
+              </a:spcAft>
+            </a:pPr>
+            <a:r>
+              <a:rPr lang="en-US" dirty="0"/>
+              <a:t>- TO CONFIRM BEFORE PRESENTING: Ch. 89 prints melphalan 140 mg/kg/day; standard BEAM is 140 mg/m². Confirm against the printed book or another BEAM source.</a:t>
+            </a:r>
           </a:p>
         </p:txBody>
       </p:sp>
@@ -2794,11 +3647,70 @@
           <a:bodyPr/>
           <a:lstStyle/>
           <a:p>
+            <a:pPr>
+              <a:spcAft>
+                <a:spcPts val="600"/>
+              </a:spcAft>
+            </a:pPr>
+            <a:r>
+              <a:rPr lang="en-US" b="1" dirty="0"/>
+              <a:t>[1:30 本頁 · 6:00 至 7:30]</a:t>
+            </a:r>
+          </a:p>
+          <a:p>
+            <a:pPr>
+              <a:spcAft>
+                <a:spcPts val="600"/>
+              </a:spcAft>
+            </a:pPr>
             <a:r>
               <a:rPr lang="en-US" dirty="0"/>
-              <a:t>[1:30 本頁 · 6:00 至 7:30]¶Auto 之後會不會復發，第 89 章列了一串一致的不良預後因子：primary induction failure、第一次緩解短於 3 個月、第一線後 12 個月內復發、extranodal disease、B symptoms、復發時 advanced stage、salvage 抗藥，以及移植時仍有病灶。¶有這些因子的病人，auto 之後給 brentuximab vedotin consolidation。依據是 phase III 的 AETHERA，329 位 relapsed 或 refractory 病人，auto 後隨機分到最多 16 個 cycle 的 BV 或 placebo。中位 PFS 43 個月對 24 個月，P 值 0.0013，risk factor 越多，受益越明顯。¶BV 目前是唯一核准用在 post-auto consolidation 的藥，16 個 cycle 這個數字常出現在選項裡。¶考題常常給一位第一線後 12 個月內就復發、或移植時仍有病灶的病人，問 auto 之後該做什麼，答案通常就是 BV consolidation。也要注意 AETHERA 的結果是 PFS，書上並沒有寫 OS 的差異。¶第一線的角色也在改變。Echelon-1 用 BV 取代 ABVD 裡的 bleomycin，晚期 HL 的 OS 改善，可以預期之後走到移植時已經用過 BV 的病人會越來越多。</a:t>
-            </a:r>
-            <a:endParaRPr lang="en-US" dirty="0"/>
+              <a:t>Auto 之後會不會復發，第 89 章列了一串一致的不良預後因子：primary induction failure、第一次緩解短於 3 個月、第一線後 12 個月內復發、extranodal disease、B symptoms、復發時 advanced stage、salvage 抗藥，以及移植時仍有病灶。</a:t>
+            </a:r>
+          </a:p>
+          <a:p>
+            <a:pPr>
+              <a:spcAft>
+                <a:spcPts val="600"/>
+              </a:spcAft>
+            </a:pPr>
+            <a:r>
+              <a:rPr lang="en-US" dirty="0"/>
+              <a:t>有這些因子的病人，auto 之後給 brentuximab vedotin consolidation。依據是 phase III 的 AETHERA，329 位 relapsed 或 refractory 病人，auto 後隨機分到最多 16 個 cycle 的 BV 或 placebo。中位 PFS 43 個月對 24 個月，P 值 0.0013，risk factor 越多，受益越明顯。</a:t>
+            </a:r>
+          </a:p>
+          <a:p>
+            <a:pPr>
+              <a:spcAft>
+                <a:spcPts val="600"/>
+              </a:spcAft>
+            </a:pPr>
+            <a:r>
+              <a:rPr lang="en-US" dirty="0"/>
+              <a:t>BV 目前是唯一核准用在 post-auto consolidation 的藥，16 個 cycle 這個數字常出現在選項裡。</a:t>
+            </a:r>
+          </a:p>
+          <a:p>
+            <a:pPr>
+              <a:spcAft>
+                <a:spcPts val="600"/>
+              </a:spcAft>
+            </a:pPr>
+            <a:r>
+              <a:rPr lang="en-US" dirty="0"/>
+              <a:t>考題常常給一位第一線後 12 個月內就復發、或移植時仍有病灶的病人，問 auto 之後該做什麼，答案通常就是 BV consolidation。也要注意 AETHERA 的結果是 PFS，書上並沒有寫 OS 的差異。</a:t>
+            </a:r>
+          </a:p>
+          <a:p>
+            <a:pPr>
+              <a:spcAft>
+                <a:spcPts val="600"/>
+              </a:spcAft>
+            </a:pPr>
+            <a:r>
+              <a:rPr lang="en-US" dirty="0"/>
+              <a:t>第一線的角色也在改變。Echelon-1 用 BV 取代 ABVD 裡的 bleomycin，晚期 HL 的 OS 改善，可以預期之後走到移植時已經用過 BV 的病人會越來越多。</a:t>
+            </a:r>
           </a:p>
         </p:txBody>
       </p:sp>
@@ -2882,11 +3794,70 @@
           <a:bodyPr/>
           <a:lstStyle/>
           <a:p>
+            <a:pPr>
+              <a:spcAft>
+                <a:spcPts val="600"/>
+              </a:spcAft>
+            </a:pPr>
+            <a:r>
+              <a:rPr lang="en-US" b="1" dirty="0"/>
+              <a:t>[1:30 本頁 · 7:30 至 9:00]</a:t>
+            </a:r>
+          </a:p>
+          <a:p>
+            <a:pPr>
+              <a:spcAft>
+                <a:spcPts val="600"/>
+              </a:spcAft>
+            </a:pPr>
             <a:r>
               <a:rPr lang="en-US" dirty="0"/>
-              <a:t>[1:30 本頁 · 7:30 至 9:00]¶這是作者建議的演算法，簡化自 89.11 節的圖。Auto 之後復發，先問有沒有用過 BV，或是否對 BV 抗藥。沒用過就先給 BV；用過或沒有反應，就換 nivolumab、pembrolizumab 或臨床試驗。有反應的人可以觀察，或在年輕、體能好、有合適 donor 時考慮 allo。兩條路都沒反應，才回到傳統 salvage。¶預後的改善很明顯。EBMT 分析 1781 位 auto 後復發的成人，四年 OS 從 2006 到 2008 年的 32%，進步到 2015 到 2017 年的 63%。距離 auto 越久才復發越好；年紀大、體能差、bulky、extranodal 和 B symptoms 則較差。¶表上沒寫的數字放在 backup。Auto 後用 BV 的 ORR 75%，nivolumab 和 pembrolizumab 都是 69%。¶書上把 allo 的條件寫得很具體，年輕、體能好、疾病有反應，而且有合適的 donor。四個條件少一個，觀察或繼續新藥都是可以接受的選擇，這就是原圖上灰色箭頭的意思，要和病人仔細討論利弊。¶Backup 裡還有 bendamustine、gemcitabine-based 化療和 CAR-T 等選擇，反應率差異很大。</a:t>
-            </a:r>
-            <a:endParaRPr lang="en-US" dirty="0"/>
+              <a:t>這是作者建議的演算法，簡化自 89.11 節的圖。Auto 之後復發，先問有沒有用過 BV，或是否對 BV 抗藥。沒用過就先給 BV；用過或沒有反應，就換 nivolumab、pembrolizumab 或臨床試驗。有反應的人可以觀察，或在年輕、體能好、有合適 donor 時考慮 allo。兩條路都沒反應，才回到傳統 salvage。</a:t>
+            </a:r>
+          </a:p>
+          <a:p>
+            <a:pPr>
+              <a:spcAft>
+                <a:spcPts val="600"/>
+              </a:spcAft>
+            </a:pPr>
+            <a:r>
+              <a:rPr lang="en-US" dirty="0"/>
+              <a:t>預後的改善很明顯。EBMT 分析 1781 位 auto 後復發的成人，四年 OS 從 2006 到 2008 年的 32%，進步到 2015 到 2017 年的 63%。距離 auto 越久才復發越好；年紀大、體能差、bulky、extranodal 和 B symptoms 則較差。</a:t>
+            </a:r>
+          </a:p>
+          <a:p>
+            <a:pPr>
+              <a:spcAft>
+                <a:spcPts val="600"/>
+              </a:spcAft>
+            </a:pPr>
+            <a:r>
+              <a:rPr lang="en-US" dirty="0"/>
+              <a:t>表上沒寫的數字放在 backup。Auto 後用 BV 的 ORR 75%，nivolumab 和 pembrolizumab 都是 69%。</a:t>
+            </a:r>
+          </a:p>
+          <a:p>
+            <a:pPr>
+              <a:spcAft>
+                <a:spcPts val="600"/>
+              </a:spcAft>
+            </a:pPr>
+            <a:r>
+              <a:rPr lang="en-US" dirty="0"/>
+              <a:t>書上把 allo 的條件寫得很具體，年輕、體能好、疾病有反應，而且有合適的 donor。四個條件少一個，觀察或繼續新藥都是可以接受的選擇，這就是原圖上灰色箭頭的意思，要和病人仔細討論利弊。</a:t>
+            </a:r>
+          </a:p>
+          <a:p>
+            <a:pPr>
+              <a:spcAft>
+                <a:spcPts val="600"/>
+              </a:spcAft>
+            </a:pPr>
+            <a:r>
+              <a:rPr lang="en-US" dirty="0"/>
+              <a:t>Backup 裡還有 bendamustine、gemcitabine-based 化療和 CAR-T 等選擇，反應率差異很大。</a:t>
+            </a:r>
           </a:p>
         </p:txBody>
       </p:sp>
@@ -2970,11 +3941,59 @@
           <a:bodyPr/>
           <a:lstStyle/>
           <a:p>
+            <a:pPr>
+              <a:spcAft>
+                <a:spcPts val="600"/>
+              </a:spcAft>
+            </a:pPr>
+            <a:r>
+              <a:rPr lang="en-US" b="1" dirty="0"/>
+              <a:t>[1:30 本頁 · 9:00 至 10:30]</a:t>
+            </a:r>
+          </a:p>
+          <a:p>
+            <a:pPr>
+              <a:spcAft>
+                <a:spcPts val="600"/>
+              </a:spcAft>
+            </a:pPr>
             <a:r>
               <a:rPr lang="en-US" dirty="0"/>
-              <a:t>[1:30 本頁 · 9:00 至 10:30]¶Allo 仍被視為 auto 後復發或進展的 cHL 唯一的治癒選擇。證據主要是 registry 分析、小型 phase II，以及 donor-versus-no-donor 的比較，PFS 和 OS 都有好處。¶Table 89.5 的重點在第三列。Chemosensitive relapse 而且做過 auto，不論 MSD、MUD 或 alternative donor，都是 standard，evidence level II。Alternative donor 指 mismatched unrelated、haplo 和 cord blood。CR1 一律 generally not recommended；沒做過 auto 的 sensitive relapse 只是 developmental，alternative donor 甚至不建議。¶移植前的 disease status 是最重要的預後因子，chemosensitive 的三年 OS 60 到 70%，refractory 只剩 40 到 50%。不過 PET-negative CR 對 allo 的意義，不像 auto 那麼明確。¶另外，refractory 那一列寫的是 developmental，不是 not recommended。意思是可以在臨床試驗或有經驗的中心做，但三年 PFS 只有 20 到 30%，NRM 也升到 20 到 30%。題目若描述一位對所有 salvage 都沒反應的病人，直接選 allo 通常不是最好的答案，先想辦法讓疾病有反應。</a:t>
-            </a:r>
-            <a:endParaRPr lang="en-US" dirty="0"/>
+              <a:t>Allo 仍被視為 auto 後復發或進展的 cHL 唯一的治癒選擇。證據主要是 registry 分析、小型 phase II，以及 donor-versus-no-donor 的比較，PFS 和 OS 都有好處。</a:t>
+            </a:r>
+          </a:p>
+          <a:p>
+            <a:pPr>
+              <a:spcAft>
+                <a:spcPts val="600"/>
+              </a:spcAft>
+            </a:pPr>
+            <a:r>
+              <a:rPr lang="en-US" dirty="0"/>
+              <a:t>Table 89.5 的重點在第三列。Chemosensitive relapse 而且做過 auto，不論 MSD、MUD 或 alternative donor，都是 standard，evidence level II。Alternative donor 指 mismatched unrelated、haplo 和 cord blood。CR1 一律 generally not recommended；沒做過 auto 的 sensitive relapse 只是 developmental，alternative donor 甚至不建議。</a:t>
+            </a:r>
+          </a:p>
+          <a:p>
+            <a:pPr>
+              <a:spcAft>
+                <a:spcPts val="600"/>
+              </a:spcAft>
+            </a:pPr>
+            <a:r>
+              <a:rPr lang="en-US" dirty="0"/>
+              <a:t>移植前的 disease status 是最重要的預後因子，chemosensitive 的三年 OS 60 到 70%，refractory 只剩 40 到 50%。不過 PET-negative CR 對 allo 的意義，不像 auto 那麼明確。</a:t>
+            </a:r>
+          </a:p>
+          <a:p>
+            <a:pPr>
+              <a:spcAft>
+                <a:spcPts val="600"/>
+              </a:spcAft>
+            </a:pPr>
+            <a:r>
+              <a:rPr lang="en-US" dirty="0"/>
+              <a:t>另外，refractory 那一列寫的是 developmental，不是 not recommended。意思是可以在臨床試驗或有經驗的中心做，但三年 PFS 只有 20 到 30%，NRM 也升到 20 到 30%。題目若描述一位對所有 salvage 都沒反應的病人，直接選 allo 通常不是最好的答案，先想辦法讓疾病有反應。</a:t>
+            </a:r>
           </a:p>
         </p:txBody>
       </p:sp>
@@ -3058,11 +4077,59 @@
           <a:bodyPr/>
           <a:lstStyle/>
           <a:p>
+            <a:pPr>
+              <a:spcAft>
+                <a:spcPts val="600"/>
+              </a:spcAft>
+            </a:pPr>
+            <a:r>
+              <a:rPr lang="en-US" b="1" dirty="0"/>
+              <a:t>[1:30 本頁 · 10:30 至 12:00]</a:t>
+            </a:r>
+          </a:p>
+          <a:p>
+            <a:pPr>
+              <a:spcAft>
+                <a:spcPts val="600"/>
+              </a:spcAft>
+            </a:pPr>
             <a:r>
               <a:rPr lang="en-US" dirty="0"/>
-              <a:t>[1:30 本頁 · 10:30 至 12:00]¶新藥讓 allo 的時機變得不清楚，近兩年這個適應症的移植數量也在下降。BV 常被當作 bridge，通常給 4 到 6 個 cycle，最後一劑到 day 0 不需要 washout。它不增加移植相關毒性，還可能改善體能和疾病狀態，甚至減少 chronic GVHD。¶Checkpoint inhibitor 就不一樣。Nivolumab、pembrolizumab 在移植前效果很好，但可能增加 acute GVHD、SOS/VOD 和 post-transplant hyperacute febrile syndrome。建議停藥至少 6 週再移植，GVHD prophylaxis 用 PTCy。BV 不用 washout、PD-1 要停 6 週，這組對比是典型考題。¶右邊是 donor 和 conditioning。PTCy haplo 的結果和 MSD、MUD 相近，GVHD 較少。超過一半用 RIC，NRM 降低但復發增加；含 low-dose TBI 的方案較差。現在 MAC 的 NRM 已大幅下降，可以個別考慮。¶病房裡常見的情境是病人用 PD-1 達到很好的反應，大家急著排移植。這時候要先算好停藥的時間，並且提早跟移植團隊確認 PTCy 這個 GVHD prophylaxis 平台。</a:t>
-            </a:r>
-            <a:endParaRPr lang="en-US" dirty="0"/>
+              <a:t>新藥讓 allo 的時機變得不清楚，近兩年這個適應症的移植數量也在下降。BV 常被當作 bridge，通常給 4 到 6 個 cycle，最後一劑到 day 0 不需要 washout。它不增加移植相關毒性，還可能改善體能和疾病狀態，甚至減少 chronic GVHD。</a:t>
+            </a:r>
+          </a:p>
+          <a:p>
+            <a:pPr>
+              <a:spcAft>
+                <a:spcPts val="600"/>
+              </a:spcAft>
+            </a:pPr>
+            <a:r>
+              <a:rPr lang="en-US" dirty="0"/>
+              <a:t>Checkpoint inhibitor 就不一樣。Nivolumab、pembrolizumab 在移植前效果很好，但可能增加 acute GVHD、SOS/VOD 和 post-transplant hyperacute febrile syndrome。建議停藥至少 6 週再移植，GVHD prophylaxis 用 PTCy。BV 不用 washout、PD-1 要停 6 週，這組對比是典型考題。</a:t>
+            </a:r>
+          </a:p>
+          <a:p>
+            <a:pPr>
+              <a:spcAft>
+                <a:spcPts val="600"/>
+              </a:spcAft>
+            </a:pPr>
+            <a:r>
+              <a:rPr lang="en-US" dirty="0"/>
+              <a:t>右邊是 donor 和 conditioning。PTCy haplo 的結果和 MSD、MUD 相近，GVHD 較少。超過一半用 RIC，NRM 降低但復發增加；含 low-dose TBI 的方案較差。現在 MAC 的 NRM 已大幅下降，可以個別考慮。</a:t>
+            </a:r>
+          </a:p>
+          <a:p>
+            <a:pPr>
+              <a:spcAft>
+                <a:spcPts val="600"/>
+              </a:spcAft>
+            </a:pPr>
+            <a:r>
+              <a:rPr lang="en-US" dirty="0"/>
+              <a:t>病房裡常見的情境是病人用 PD-1 達到很好的反應，大家急著排移植。這時候要先算好停藥的時間，並且提早跟移植團隊確認 PTCy 這個 GVHD prophylaxis 平台。</a:t>
+            </a:r>
           </a:p>
         </p:txBody>
       </p:sp>

--- a/slides/decks/s29-hodgkin-indolent-cll.pptx
+++ b/slides/decks/s29-hodgkin-indolent-cll.pptx
@@ -135,13 +135,13 @@
   <p:extLst>
     <p:ext uri="{521415D9-36F7-43E2-AB2F-B90AF26B5E84}">
       <p14:sectionLst xmlns:p14="http://schemas.microsoft.com/office/powerpoint/2010/main">
-        <p14:section name="Opening" id="{b2270a95-6c5c-32a4-b3fd-cd88404d9396}">
+        <p14:section name="Opening" id="{e57eeecd-74dd-0ab7-9e78-13b81e9f330c}">
           <p14:sldIdLst>
             <p14:sldId id="256"/>
             <p14:sldId id="257"/>
           </p14:sldIdLst>
         </p14:section>
-        <p14:section name="Classical Hodgkin lymphoma" id="{ad4675de-e7ad-4bcd-dc98-215c250c24bc}">
+        <p14:section name="Classical Hodgkin lymphoma" id="{b1e5057a-21bd-1da8-1a10-f7ae7436d87b}">
           <p14:sldIdLst>
             <p14:sldId id="258"/>
             <p14:sldId id="259"/>
@@ -152,7 +152,7 @@
             <p14:sldId id="264"/>
           </p14:sldIdLst>
         </p14:section>
-        <p14:section name="Indolent lymphoma" id="{148be544-ff8d-d098-51ce-e5eabd33806e}">
+        <p14:section name="Indolent lymphoma" id="{7d4134bc-3902-dde9-2705-7a90415ab9e7}">
           <p14:sldIdLst>
             <p14:sldId id="265"/>
             <p14:sldId id="266"/>
@@ -160,14 +160,14 @@
             <p14:sldId id="268"/>
           </p14:sldIdLst>
         </p14:section>
-        <p14:section name="Chronic lymphocytic leukaemia" id="{c707154a-1033-9796-8434-2f2d9130f6ad}">
+        <p14:section name="Chronic lymphocytic leukaemia" id="{fbd8ee94-5822-15cb-f442-ec672e0d2d19}">
           <p14:sldIdLst>
             <p14:sldId id="269"/>
             <p14:sldId id="270"/>
             <p14:sldId id="271"/>
           </p14:sldIdLst>
         </p14:section>
-        <p14:section name="Board questions" id="{35f755d8-a97f-1af8-8cbd-677d92e2c7b1}">
+        <p14:section name="Board questions" id="{e50f08c5-7e97-f4ef-0aa3-f77ac8e8c870}">
           <p14:sldIdLst>
             <p14:sldId id="272"/>
             <p14:sldId id="273"/>
@@ -177,7 +177,7 @@
             <p14:sldId id="277"/>
           </p14:sldIdLst>
         </p14:section>
-        <p14:section name="References" id="{40e7df54-f916-c970-250f-532c9e4da5be}">
+        <p14:section name="References" id="{dbe22f8b-eaad-76ea-25a3-41b73b1f37d4}">
           <p14:sldIdLst>
             <p14:sldId id="278"/>
             <p14:sldId id="279"/>
@@ -185,7 +185,7 @@
             <p14:sldId id="281"/>
           </p14:sldIdLst>
         </p14:section>
-        <p14:section name="Backup" id="{2f617ed7-d33f-5f4c-51f9-14790bcd3153}">
+        <p14:section name="Backup" id="{447d0ec2-29f8-8244-e5db-03bfaac0940b}">
           <p14:sldIdLst>
             <p14:sldId id="282"/>
             <p14:sldId id="283"/>
@@ -8994,7 +8994,7 @@
                   <a:schemeClr val="tx1"/>
                 </a:solidFill>
               </a:rPr>
-              <a:t>Consider alloHCT; poor outlook on drugs</a:t>
+              <a:t>Poor outlook: consider alloHCT</a:t>
             </a:r>
             <a:endParaRPr lang="en-US" sz="1500" dirty="0"/>
           </a:p>
@@ -10625,7 +10625,7 @@
                   <a:schemeClr val="tx1"/>
                 </a:solidFill>
               </a:rPr>
-              <a:t>Non-relapse mortality at 10 years</a:t>
+              <a:t>Non-relapse mortality (10 y)</a:t>
             </a:r>
             <a:endParaRPr lang="en-US" sz="1800" dirty="0"/>
           </a:p>
@@ -24119,7 +24119,7 @@
                   <a:schemeClr val="tx1"/>
                 </a:solidFill>
               </a:rPr>
-              <a:t>Hold ≥ 6 weeks before allo; use PTCy</a:t>
+              <a:t>Hold ≥ 6 weeks; use PTCy</a:t>
             </a:r>
             <a:endParaRPr lang="en-US" sz="1800" dirty="0"/>
           </a:p>

--- a/slides/decks/s29-hodgkin-indolent-cll.pptx
+++ b/slides/decks/s29-hodgkin-indolent-cll.pptx
@@ -135,13 +135,13 @@
   <p:extLst>
     <p:ext uri="{521415D9-36F7-43E2-AB2F-B90AF26B5E84}">
       <p14:sectionLst xmlns:p14="http://schemas.microsoft.com/office/powerpoint/2010/main">
-        <p14:section name="Opening" id="{e57eeecd-74dd-0ab7-9e78-13b81e9f330c}">
+        <p14:section name="Opening" id="{7f554519-8a3f-dd3f-cb06-b736cca33ec3}">
           <p14:sldIdLst>
             <p14:sldId id="256"/>
             <p14:sldId id="257"/>
           </p14:sldIdLst>
         </p14:section>
-        <p14:section name="Classical Hodgkin lymphoma" id="{b1e5057a-21bd-1da8-1a10-f7ae7436d87b}">
+        <p14:section name="Classical Hodgkin lymphoma" id="{c119eda6-bd4a-bad0-d5ad-954430dd9b13}">
           <p14:sldIdLst>
             <p14:sldId id="258"/>
             <p14:sldId id="259"/>
@@ -152,7 +152,7 @@
             <p14:sldId id="264"/>
           </p14:sldIdLst>
         </p14:section>
-        <p14:section name="Indolent lymphoma" id="{7d4134bc-3902-dde9-2705-7a90415ab9e7}">
+        <p14:section name="Indolent lymphoma" id="{9161d5d6-5711-73eb-e3db-9c261349597d}">
           <p14:sldIdLst>
             <p14:sldId id="265"/>
             <p14:sldId id="266"/>
@@ -160,14 +160,14 @@
             <p14:sldId id="268"/>
           </p14:sldIdLst>
         </p14:section>
-        <p14:section name="Chronic lymphocytic leukaemia" id="{fbd8ee94-5822-15cb-f442-ec672e0d2d19}">
+        <p14:section name="Chronic lymphocytic leukaemia" id="{c6948727-b095-0abb-58e8-676145858e9c}">
           <p14:sldIdLst>
             <p14:sldId id="269"/>
             <p14:sldId id="270"/>
             <p14:sldId id="271"/>
           </p14:sldIdLst>
         </p14:section>
-        <p14:section name="Board questions" id="{e50f08c5-7e97-f4ef-0aa3-f77ac8e8c870}">
+        <p14:section name="Board questions" id="{91f50edc-7759-d4f3-4f16-aaaacf8265b8}">
           <p14:sldIdLst>
             <p14:sldId id="272"/>
             <p14:sldId id="273"/>
@@ -177,7 +177,7 @@
             <p14:sldId id="277"/>
           </p14:sldIdLst>
         </p14:section>
-        <p14:section name="References" id="{dbe22f8b-eaad-76ea-25a3-41b73b1f37d4}">
+        <p14:section name="References" id="{379f31c2-63cd-3969-48d1-e7a52808e116}">
           <p14:sldIdLst>
             <p14:sldId id="278"/>
             <p14:sldId id="279"/>
@@ -185,7 +185,7 @@
             <p14:sldId id="281"/>
           </p14:sldIdLst>
         </p14:section>
-        <p14:section name="Backup" id="{447d0ec2-29f8-8244-e5db-03bfaac0940b}">
+        <p14:section name="Backup" id="{3f982f8f-d30a-5b10-9340-5be7a61e1bc8}">
           <p14:sldIdLst>
             <p14:sldId id="282"/>
             <p14:sldId id="283"/>
